--- a/output/wordlabs-value-3day.pptx
+++ b/output/wordlabs-value-3day.pptx
@@ -4240,7 +4240,7 @@
                 <a:ea typeface="Calibri" pitchFamily="34" charset="-122"/>
                 <a:cs typeface="Calibri" pitchFamily="34" charset="-120"/>
               </a:rPr>
-              <a:t>"worth, importance, or price"</a:t>
+              <a:t>"worth, importance, price"</a:t>
             </a:r>
             <a:endParaRPr lang="en-US" sz="2200" dirty="0"/>
           </a:p>
@@ -5288,7 +5288,7 @@
                 <a:ea typeface="Calibri" pitchFamily="34" charset="-122"/>
                 <a:cs typeface="Calibri" pitchFamily="34" charset="-120"/>
               </a:rPr>
-              <a:t>Word Labs  •  wordlabs.app  •  Root: 'value' = worth, importance, or price</a:t>
+              <a:t>Word Labs  •  wordlabs.app  •  Root: 'value' = worth, importance, price</a:t>
             </a:r>
             <a:endParaRPr lang="en-US" sz="800" dirty="0"/>
           </a:p>
@@ -5928,7 +5928,7 @@
                 <a:ea typeface="Calibri" pitchFamily="34" charset="-122"/>
                 <a:cs typeface="Calibri" pitchFamily="34" charset="-120"/>
               </a:rPr>
-              <a:t>Word Labs  •  wordlabs.app  •  Root: 'value' = worth, importance, or price</a:t>
+              <a:t>Word Labs  •  wordlabs.app  •  Root: 'value' = worth, importance, price</a:t>
             </a:r>
             <a:endParaRPr lang="en-US" sz="800" dirty="0"/>
           </a:p>
@@ -6040,7 +6040,7 @@
                 <a:ea typeface="Calibri" pitchFamily="34" charset="-122"/>
                 <a:cs typeface="Calibri" pitchFamily="34" charset="-120"/>
               </a:rPr>
-              <a:t>The jeweller said the ring was incredibly </a:t>
+              <a:t>The jeweller said the ring was extremely </a:t>
             </a:r>
             <a:pPr algn="l" indent="0" marL="0">
               <a:buNone/>
@@ -6071,7 +6071,7 @@
                 <a:ea typeface="Calibri" pitchFamily="34" charset="-122"/>
                 <a:cs typeface="Calibri" pitchFamily="34" charset="-120"/>
               </a:rPr>
-              <a:t>, but the seller felt the offer was an attempt to </a:t>
+              <a:t>, but the broken chain was </a:t>
             </a:r>
             <a:pPr algn="l" indent="0" marL="0">
               <a:buNone/>
@@ -6088,7 +6088,7 @@
                 <a:ea typeface="Calibri" pitchFamily="34" charset="-122"/>
                 <a:cs typeface="Calibri" pitchFamily="34" charset="-120"/>
               </a:rPr>
-              <a:t>undervalue</a:t>
+              <a:t>valueless</a:t>
             </a:r>
             <a:pPr algn="l" indent="0" marL="0">
               <a:buNone/>
@@ -6102,7 +6102,7 @@
                 <a:ea typeface="Calibri" pitchFamily="34" charset="-122"/>
                 <a:cs typeface="Calibri" pitchFamily="34" charset="-120"/>
               </a:rPr>
-              <a:t> it.</a:t>
+              <a:t>.</a:t>
             </a:r>
             <a:endParaRPr lang="en-US" sz="1800" dirty="0"/>
           </a:p>
@@ -6385,7 +6385,7 @@
                 <a:ea typeface="Trebuchet MS" pitchFamily="34" charset="-122"/>
                 <a:cs typeface="Trebuchet MS" pitchFamily="34" charset="-120"/>
               </a:rPr>
-              <a:t>undervalue</a:t>
+              <a:t>valueless</a:t>
             </a:r>
             <a:endParaRPr lang="en-US" sz="1400" dirty="0"/>
           </a:p>
@@ -6716,7 +6716,7 @@
                 <a:ea typeface="Calibri" pitchFamily="34" charset="-122"/>
                 <a:cs typeface="Calibri" pitchFamily="34" charset="-120"/>
               </a:rPr>
-              <a:t>Word Labs  •  wordlabs.app  •  Root: 'value' = worth, importance, or price</a:t>
+              <a:t>Word Labs  •  wordlabs.app  •  Root: 'value' = worth, importance, price</a:t>
             </a:r>
             <a:endParaRPr lang="en-US" sz="800" dirty="0"/>
           </a:p>
@@ -7543,7 +7543,7 @@
                 <a:ea typeface="Calibri" pitchFamily="34" charset="-122"/>
                 <a:cs typeface="Calibri" pitchFamily="34" charset="-120"/>
               </a:rPr>
-              <a:t>Word Labs  •  wordlabs.app  •  Root: 'value' = worth, importance, or price</a:t>
+              <a:t>Word Labs  •  wordlabs.app  •  Root: 'value' = worth, importance, price</a:t>
             </a:r>
             <a:endParaRPr lang="en-US" sz="800" dirty="0"/>
           </a:p>
@@ -7980,7 +7980,46 @@
       </p:sp>
       <p:sp>
         <p:nvSpPr>
-          <p:cNvPr id="22" name="Shape 20"/>
+          <p:cNvPr id="22" name="Text 20"/>
+          <p:cNvSpPr/>
+          <p:nvPr/>
+        </p:nvSpPr>
+        <p:spPr>
+          <a:xfrm>
+            <a:off x="5803392" y="2752344"/>
+            <a:ext cx="1828800" cy="182880"/>
+          </a:xfrm>
+          <a:prstGeom prst="rect">
+            <a:avLst/>
+          </a:prstGeom>
+          <a:noFill/>
+          <a:ln/>
+        </p:spPr>
+        <p:txBody>
+          <a:bodyPr wrap="square" lIns="0" tIns="0" rIns="0" bIns="0" rtlCol="0" anchor="t"/>
+          <a:lstStyle/>
+          <a:p>
+            <a:pPr algn="ctr" indent="0" marL="0">
+              <a:buNone/>
+            </a:pPr>
+            <a:r>
+              <a:rPr lang="en-US" sz="700" i="1" dirty="0">
+                <a:solidFill>
+                  <a:srgbClr val="94A3B8"/>
+                </a:solidFill>
+                <a:latin typeface="Calibri" pitchFamily="34" charset="0"/>
+                <a:ea typeface="Calibri" pitchFamily="34" charset="-122"/>
+                <a:cs typeface="Calibri" pitchFamily="34" charset="-120"/>
+              </a:rPr>
+              <a:t>'e' dropped before vowel suffix</a:t>
+            </a:r>
+            <a:endParaRPr lang="en-US" sz="700" dirty="0"/>
+          </a:p>
+        </p:txBody>
+      </p:sp>
+      <p:sp>
+        <p:nvSpPr>
+          <p:cNvPr id="23" name="Shape 21"/>
           <p:cNvSpPr/>
           <p:nvPr/>
         </p:nvSpPr>
@@ -8007,7 +8046,7 @@
       </p:sp>
       <p:sp>
         <p:nvSpPr>
-          <p:cNvPr id="23" name="Text 21"/>
+          <p:cNvPr id="24" name="Text 22"/>
           <p:cNvSpPr/>
           <p:nvPr/>
         </p:nvSpPr>
@@ -8046,7 +8085,7 @@
       </p:sp>
       <p:sp>
         <p:nvSpPr>
-          <p:cNvPr id="24" name="Shape 22"/>
+          <p:cNvPr id="25" name="Shape 23"/>
           <p:cNvSpPr/>
           <p:nvPr/>
         </p:nvSpPr>
@@ -8073,7 +8112,7 @@
       </p:sp>
       <p:sp>
         <p:nvSpPr>
-          <p:cNvPr id="25" name="Text 23"/>
+          <p:cNvPr id="26" name="Text 24"/>
           <p:cNvSpPr/>
           <p:nvPr/>
         </p:nvSpPr>
@@ -8112,7 +8151,7 @@
       </p:sp>
       <p:sp>
         <p:nvSpPr>
-          <p:cNvPr id="26" name="Shape 24"/>
+          <p:cNvPr id="27" name="Shape 25"/>
           <p:cNvSpPr/>
           <p:nvPr/>
         </p:nvSpPr>
@@ -8139,7 +8178,7 @@
       </p:sp>
       <p:sp>
         <p:nvSpPr>
-          <p:cNvPr id="27" name="Text 25"/>
+          <p:cNvPr id="28" name="Text 26"/>
           <p:cNvSpPr/>
           <p:nvPr/>
         </p:nvSpPr>
@@ -8178,7 +8217,7 @@
       </p:sp>
       <p:sp>
         <p:nvSpPr>
-          <p:cNvPr id="28" name="Shape 26"/>
+          <p:cNvPr id="29" name="Shape 27"/>
           <p:cNvSpPr/>
           <p:nvPr/>
         </p:nvSpPr>
@@ -8205,7 +8244,7 @@
       </p:sp>
       <p:sp>
         <p:nvSpPr>
-          <p:cNvPr id="29" name="Text 27"/>
+          <p:cNvPr id="30" name="Text 28"/>
           <p:cNvSpPr/>
           <p:nvPr/>
         </p:nvSpPr>
@@ -8528,7 +8567,7 @@
                 <a:ea typeface="Calibri" pitchFamily="34" charset="-122"/>
                 <a:cs typeface="Calibri" pitchFamily="34" charset="-120"/>
               </a:rPr>
-              <a:t>Word Labs  •  wordlabs.app  •  Root: 'value' = worth, importance, or price</a:t>
+              <a:t>Word Labs  •  wordlabs.app  •  Root: 'value' = worth, importance, price</a:t>
             </a:r>
             <a:endParaRPr lang="en-US" sz="800" dirty="0"/>
           </a:p>
@@ -8965,7 +9004,46 @@
       </p:sp>
       <p:sp>
         <p:nvSpPr>
-          <p:cNvPr id="22" name="Shape 20"/>
+          <p:cNvPr id="22" name="Text 20"/>
+          <p:cNvSpPr/>
+          <p:nvPr/>
+        </p:nvSpPr>
+        <p:spPr>
+          <a:xfrm>
+            <a:off x="5803392" y="2752344"/>
+            <a:ext cx="1828800" cy="182880"/>
+          </a:xfrm>
+          <a:prstGeom prst="rect">
+            <a:avLst/>
+          </a:prstGeom>
+          <a:noFill/>
+          <a:ln/>
+        </p:spPr>
+        <p:txBody>
+          <a:bodyPr wrap="square" lIns="0" tIns="0" rIns="0" bIns="0" rtlCol="0" anchor="t"/>
+          <a:lstStyle/>
+          <a:p>
+            <a:pPr algn="ctr" indent="0" marL="0">
+              <a:buNone/>
+            </a:pPr>
+            <a:r>
+              <a:rPr lang="en-US" sz="700" i="1" dirty="0">
+                <a:solidFill>
+                  <a:srgbClr val="94A3B8"/>
+                </a:solidFill>
+                <a:latin typeface="Calibri" pitchFamily="34" charset="0"/>
+                <a:ea typeface="Calibri" pitchFamily="34" charset="-122"/>
+                <a:cs typeface="Calibri" pitchFamily="34" charset="-120"/>
+              </a:rPr>
+              <a:t>'e' dropped before vowel suffix</a:t>
+            </a:r>
+            <a:endParaRPr lang="en-US" sz="700" dirty="0"/>
+          </a:p>
+        </p:txBody>
+      </p:sp>
+      <p:sp>
+        <p:nvSpPr>
+          <p:cNvPr id="23" name="Shape 21"/>
           <p:cNvSpPr/>
           <p:nvPr/>
         </p:nvSpPr>
@@ -8992,7 +9070,7 @@
       </p:sp>
       <p:sp>
         <p:nvSpPr>
-          <p:cNvPr id="23" name="Text 21"/>
+          <p:cNvPr id="24" name="Text 22"/>
           <p:cNvSpPr/>
           <p:nvPr/>
         </p:nvSpPr>
@@ -9031,7 +9109,7 @@
       </p:sp>
       <p:sp>
         <p:nvSpPr>
-          <p:cNvPr id="24" name="Shape 22"/>
+          <p:cNvPr id="25" name="Shape 23"/>
           <p:cNvSpPr/>
           <p:nvPr/>
         </p:nvSpPr>
@@ -9058,7 +9136,7 @@
       </p:sp>
       <p:sp>
         <p:nvSpPr>
-          <p:cNvPr id="25" name="Shape 23"/>
+          <p:cNvPr id="26" name="Shape 24"/>
           <p:cNvSpPr/>
           <p:nvPr/>
         </p:nvSpPr>
@@ -9085,7 +9163,7 @@
       </p:sp>
       <p:sp>
         <p:nvSpPr>
-          <p:cNvPr id="26" name="Text 24"/>
+          <p:cNvPr id="27" name="Text 25"/>
           <p:cNvSpPr/>
           <p:nvPr/>
         </p:nvSpPr>
@@ -9124,7 +9202,7 @@
       </p:sp>
       <p:sp>
         <p:nvSpPr>
-          <p:cNvPr id="27" name="Text 25"/>
+          <p:cNvPr id="28" name="Text 26"/>
           <p:cNvSpPr/>
           <p:nvPr/>
         </p:nvSpPr>
@@ -9163,7 +9241,7 @@
       </p:sp>
       <p:sp>
         <p:nvSpPr>
-          <p:cNvPr id="28" name="Shape 26"/>
+          <p:cNvPr id="29" name="Shape 27"/>
           <p:cNvSpPr/>
           <p:nvPr/>
         </p:nvSpPr>
@@ -9190,7 +9268,7 @@
       </p:sp>
       <p:sp>
         <p:nvSpPr>
-          <p:cNvPr id="29" name="Text 27"/>
+          <p:cNvPr id="30" name="Text 28"/>
           <p:cNvSpPr/>
           <p:nvPr/>
         </p:nvSpPr>
@@ -9229,7 +9307,7 @@
       </p:sp>
       <p:sp>
         <p:nvSpPr>
-          <p:cNvPr id="30" name="Text 28"/>
+          <p:cNvPr id="31" name="Text 29"/>
           <p:cNvSpPr/>
           <p:nvPr/>
         </p:nvSpPr>
@@ -9268,7 +9346,7 @@
       </p:sp>
       <p:sp>
         <p:nvSpPr>
-          <p:cNvPr id="31" name="Shape 29"/>
+          <p:cNvPr id="32" name="Shape 30"/>
           <p:cNvSpPr/>
           <p:nvPr/>
         </p:nvSpPr>
@@ -9295,7 +9373,7 @@
       </p:sp>
       <p:sp>
         <p:nvSpPr>
-          <p:cNvPr id="32" name="Text 30"/>
+          <p:cNvPr id="33" name="Text 31"/>
           <p:cNvSpPr/>
           <p:nvPr/>
         </p:nvSpPr>
@@ -9334,7 +9412,7 @@
       </p:sp>
       <p:sp>
         <p:nvSpPr>
-          <p:cNvPr id="33" name="Text 31"/>
+          <p:cNvPr id="34" name="Text 32"/>
           <p:cNvSpPr/>
           <p:nvPr/>
         </p:nvSpPr>
@@ -9373,7 +9451,7 @@
       </p:sp>
       <p:sp>
         <p:nvSpPr>
-          <p:cNvPr id="34" name="Shape 32"/>
+          <p:cNvPr id="35" name="Shape 33"/>
           <p:cNvSpPr/>
           <p:nvPr/>
         </p:nvSpPr>
@@ -9400,7 +9478,7 @@
       </p:sp>
       <p:sp>
         <p:nvSpPr>
-          <p:cNvPr id="35" name="Text 33"/>
+          <p:cNvPr id="36" name="Text 34"/>
           <p:cNvSpPr/>
           <p:nvPr/>
         </p:nvSpPr>
@@ -9439,7 +9517,7 @@
       </p:sp>
       <p:sp>
         <p:nvSpPr>
-          <p:cNvPr id="36" name="Shape 34"/>
+          <p:cNvPr id="37" name="Shape 35"/>
           <p:cNvSpPr/>
           <p:nvPr/>
         </p:nvSpPr>
@@ -9466,7 +9544,7 @@
       </p:sp>
       <p:sp>
         <p:nvSpPr>
-          <p:cNvPr id="37" name="Text 35"/>
+          <p:cNvPr id="38" name="Text 36"/>
           <p:cNvSpPr/>
           <p:nvPr/>
         </p:nvSpPr>
@@ -9505,7 +9583,7 @@
       </p:sp>
       <p:sp>
         <p:nvSpPr>
-          <p:cNvPr id="38" name="Shape 36"/>
+          <p:cNvPr id="39" name="Shape 37"/>
           <p:cNvSpPr/>
           <p:nvPr/>
         </p:nvSpPr>
@@ -9532,7 +9610,7 @@
       </p:sp>
       <p:sp>
         <p:nvSpPr>
-          <p:cNvPr id="39" name="Text 37"/>
+          <p:cNvPr id="40" name="Text 38"/>
           <p:cNvSpPr/>
           <p:nvPr/>
         </p:nvSpPr>
@@ -9855,7 +9933,7 @@
                 <a:ea typeface="Calibri" pitchFamily="34" charset="-122"/>
                 <a:cs typeface="Calibri" pitchFamily="34" charset="-120"/>
               </a:rPr>
-              <a:t>Word Labs  •  wordlabs.app  •  Root: 'value' = worth, importance, or price</a:t>
+              <a:t>Word Labs  •  wordlabs.app  •  Root: 'value' = worth, importance, price</a:t>
             </a:r>
             <a:endParaRPr lang="en-US" sz="800" dirty="0"/>
           </a:p>
@@ -10292,7 +10370,46 @@
       </p:sp>
       <p:sp>
         <p:nvSpPr>
-          <p:cNvPr id="22" name="Shape 20"/>
+          <p:cNvPr id="22" name="Text 20"/>
+          <p:cNvSpPr/>
+          <p:nvPr/>
+        </p:nvSpPr>
+        <p:spPr>
+          <a:xfrm>
+            <a:off x="5803392" y="2752344"/>
+            <a:ext cx="1828800" cy="182880"/>
+          </a:xfrm>
+          <a:prstGeom prst="rect">
+            <a:avLst/>
+          </a:prstGeom>
+          <a:noFill/>
+          <a:ln/>
+        </p:spPr>
+        <p:txBody>
+          <a:bodyPr wrap="square" lIns="0" tIns="0" rIns="0" bIns="0" rtlCol="0" anchor="t"/>
+          <a:lstStyle/>
+          <a:p>
+            <a:pPr algn="ctr" indent="0" marL="0">
+              <a:buNone/>
+            </a:pPr>
+            <a:r>
+              <a:rPr lang="en-US" sz="700" i="1" dirty="0">
+                <a:solidFill>
+                  <a:srgbClr val="94A3B8"/>
+                </a:solidFill>
+                <a:latin typeface="Calibri" pitchFamily="34" charset="0"/>
+                <a:ea typeface="Calibri" pitchFamily="34" charset="-122"/>
+                <a:cs typeface="Calibri" pitchFamily="34" charset="-120"/>
+              </a:rPr>
+              <a:t>'e' dropped before vowel suffix</a:t>
+            </a:r>
+            <a:endParaRPr lang="en-US" sz="700" dirty="0"/>
+          </a:p>
+        </p:txBody>
+      </p:sp>
+      <p:sp>
+        <p:nvSpPr>
+          <p:cNvPr id="23" name="Shape 21"/>
           <p:cNvSpPr/>
           <p:nvPr/>
         </p:nvSpPr>
@@ -10319,7 +10436,7 @@
       </p:sp>
       <p:sp>
         <p:nvSpPr>
-          <p:cNvPr id="23" name="Text 21"/>
+          <p:cNvPr id="24" name="Text 22"/>
           <p:cNvSpPr/>
           <p:nvPr/>
         </p:nvSpPr>
@@ -10358,7 +10475,7 @@
       </p:sp>
       <p:sp>
         <p:nvSpPr>
-          <p:cNvPr id="24" name="Shape 22"/>
+          <p:cNvPr id="25" name="Shape 23"/>
           <p:cNvSpPr/>
           <p:nvPr/>
         </p:nvSpPr>
@@ -10385,7 +10502,7 @@
       </p:sp>
       <p:sp>
         <p:nvSpPr>
-          <p:cNvPr id="25" name="Shape 23"/>
+          <p:cNvPr id="26" name="Shape 24"/>
           <p:cNvSpPr/>
           <p:nvPr/>
         </p:nvSpPr>
@@ -10412,7 +10529,7 @@
       </p:sp>
       <p:sp>
         <p:nvSpPr>
-          <p:cNvPr id="26" name="Text 24"/>
+          <p:cNvPr id="27" name="Text 25"/>
           <p:cNvSpPr/>
           <p:nvPr/>
         </p:nvSpPr>
@@ -10451,7 +10568,7 @@
       </p:sp>
       <p:sp>
         <p:nvSpPr>
-          <p:cNvPr id="27" name="Text 25"/>
+          <p:cNvPr id="28" name="Text 26"/>
           <p:cNvSpPr/>
           <p:nvPr/>
         </p:nvSpPr>
@@ -10490,7 +10607,7 @@
       </p:sp>
       <p:sp>
         <p:nvSpPr>
-          <p:cNvPr id="28" name="Shape 26"/>
+          <p:cNvPr id="29" name="Shape 27"/>
           <p:cNvSpPr/>
           <p:nvPr/>
         </p:nvSpPr>
@@ -10517,7 +10634,7 @@
       </p:sp>
       <p:sp>
         <p:nvSpPr>
-          <p:cNvPr id="29" name="Text 27"/>
+          <p:cNvPr id="30" name="Text 28"/>
           <p:cNvSpPr/>
           <p:nvPr/>
         </p:nvSpPr>
@@ -10556,7 +10673,7 @@
       </p:sp>
       <p:sp>
         <p:nvSpPr>
-          <p:cNvPr id="30" name="Text 28"/>
+          <p:cNvPr id="31" name="Text 29"/>
           <p:cNvSpPr/>
           <p:nvPr/>
         </p:nvSpPr>
@@ -10595,7 +10712,7 @@
       </p:sp>
       <p:sp>
         <p:nvSpPr>
-          <p:cNvPr id="31" name="Shape 29"/>
+          <p:cNvPr id="32" name="Shape 30"/>
           <p:cNvSpPr/>
           <p:nvPr/>
         </p:nvSpPr>
@@ -10622,7 +10739,7 @@
       </p:sp>
       <p:sp>
         <p:nvSpPr>
-          <p:cNvPr id="32" name="Text 30"/>
+          <p:cNvPr id="33" name="Text 31"/>
           <p:cNvSpPr/>
           <p:nvPr/>
         </p:nvSpPr>
@@ -10661,7 +10778,7 @@
       </p:sp>
       <p:sp>
         <p:nvSpPr>
-          <p:cNvPr id="33" name="Text 31"/>
+          <p:cNvPr id="34" name="Text 32"/>
           <p:cNvSpPr/>
           <p:nvPr/>
         </p:nvSpPr>
@@ -10700,7 +10817,7 @@
       </p:sp>
       <p:sp>
         <p:nvSpPr>
-          <p:cNvPr id="34" name="Shape 32"/>
+          <p:cNvPr id="35" name="Shape 33"/>
           <p:cNvSpPr/>
           <p:nvPr/>
         </p:nvSpPr>
@@ -10727,7 +10844,7 @@
       </p:sp>
       <p:sp>
         <p:nvSpPr>
-          <p:cNvPr id="35" name="Text 33"/>
+          <p:cNvPr id="36" name="Text 34"/>
           <p:cNvSpPr/>
           <p:nvPr/>
         </p:nvSpPr>
@@ -10766,7 +10883,7 @@
       </p:sp>
       <p:sp>
         <p:nvSpPr>
-          <p:cNvPr id="36" name="Shape 34"/>
+          <p:cNvPr id="37" name="Shape 35"/>
           <p:cNvSpPr/>
           <p:nvPr/>
         </p:nvSpPr>
@@ -10793,7 +10910,7 @@
       </p:sp>
       <p:sp>
         <p:nvSpPr>
-          <p:cNvPr id="37" name="Text 35"/>
+          <p:cNvPr id="38" name="Text 36"/>
           <p:cNvSpPr/>
           <p:nvPr/>
         </p:nvSpPr>
@@ -10832,7 +10949,7 @@
       </p:sp>
       <p:sp>
         <p:nvSpPr>
-          <p:cNvPr id="38" name="Shape 36"/>
+          <p:cNvPr id="39" name="Shape 37"/>
           <p:cNvSpPr/>
           <p:nvPr/>
         </p:nvSpPr>
@@ -10859,13 +10976,13 @@
       </p:sp>
       <p:sp>
         <p:nvSpPr>
-          <p:cNvPr id="39" name="Shape 37"/>
-          <p:cNvSpPr/>
-          <p:nvPr/>
-        </p:nvSpPr>
-        <p:spPr>
-          <a:xfrm>
-            <a:off x="2023872" y="4169664"/>
+          <p:cNvPr id="40" name="Shape 38"/>
+          <p:cNvSpPr/>
+          <p:nvPr/>
+        </p:nvSpPr>
+        <p:spPr>
+          <a:xfrm>
+            <a:off x="2254649" y="4169664"/>
             <a:ext cx="685800" cy="475488"/>
           </a:xfrm>
           <a:prstGeom prst="rect">
@@ -10886,13 +11003,13 @@
       </p:sp>
       <p:sp>
         <p:nvSpPr>
-          <p:cNvPr id="40" name="Text 38"/>
-          <p:cNvSpPr/>
-          <p:nvPr/>
-        </p:nvSpPr>
-        <p:spPr>
-          <a:xfrm>
-            <a:off x="2023872" y="4169664"/>
+          <p:cNvPr id="41" name="Text 39"/>
+          <p:cNvSpPr/>
+          <p:nvPr/>
+        </p:nvSpPr>
+        <p:spPr>
+          <a:xfrm>
+            <a:off x="2254649" y="4169664"/>
             <a:ext cx="685800" cy="475488"/>
           </a:xfrm>
           <a:prstGeom prst="rect">
@@ -10925,13 +11042,13 @@
       </p:sp>
       <p:sp>
         <p:nvSpPr>
-          <p:cNvPr id="41" name="Shape 39"/>
-          <p:cNvSpPr/>
-          <p:nvPr/>
-        </p:nvSpPr>
-        <p:spPr>
-          <a:xfrm>
-            <a:off x="2831592" y="4169664"/>
+          <p:cNvPr id="42" name="Shape 40"/>
+          <p:cNvSpPr/>
+          <p:nvPr/>
+        </p:nvSpPr>
+        <p:spPr>
+          <a:xfrm>
+            <a:off x="3293146" y="4169664"/>
             <a:ext cx="685800" cy="475488"/>
           </a:xfrm>
           <a:prstGeom prst="rect">
@@ -10952,13 +11069,13 @@
       </p:sp>
       <p:sp>
         <p:nvSpPr>
-          <p:cNvPr id="42" name="Text 40"/>
-          <p:cNvSpPr/>
-          <p:nvPr/>
-        </p:nvSpPr>
-        <p:spPr>
-          <a:xfrm>
-            <a:off x="2831592" y="4169664"/>
+          <p:cNvPr id="43" name="Text 41"/>
+          <p:cNvSpPr/>
+          <p:nvPr/>
+        </p:nvSpPr>
+        <p:spPr>
+          <a:xfrm>
+            <a:off x="3293146" y="4169664"/>
             <a:ext cx="685800" cy="475488"/>
           </a:xfrm>
           <a:prstGeom prst="rect">
@@ -10983,7 +11100,7 @@
                 <a:ea typeface="Trebuchet MS" pitchFamily="34" charset="-122"/>
                 <a:cs typeface="Trebuchet MS" pitchFamily="34" charset="-120"/>
               </a:rPr>
-              <a:t>a</a:t>
+              <a:t>al</a:t>
             </a:r>
             <a:endParaRPr lang="en-US" sz="900" dirty="0"/>
           </a:p>
@@ -10991,13 +11108,13 @@
       </p:sp>
       <p:sp>
         <p:nvSpPr>
-          <p:cNvPr id="43" name="Shape 41"/>
-          <p:cNvSpPr/>
-          <p:nvPr/>
-        </p:nvSpPr>
-        <p:spPr>
-          <a:xfrm>
-            <a:off x="3639312" y="4169664"/>
+          <p:cNvPr id="44" name="Shape 42"/>
+          <p:cNvSpPr/>
+          <p:nvPr/>
+        </p:nvSpPr>
+        <p:spPr>
+          <a:xfrm>
+            <a:off x="4331643" y="4169664"/>
             <a:ext cx="685800" cy="475488"/>
           </a:xfrm>
           <a:prstGeom prst="rect">
@@ -11018,13 +11135,13 @@
       </p:sp>
       <p:sp>
         <p:nvSpPr>
-          <p:cNvPr id="44" name="Text 42"/>
-          <p:cNvSpPr/>
-          <p:nvPr/>
-        </p:nvSpPr>
-        <p:spPr>
-          <a:xfrm>
-            <a:off x="3639312" y="4169664"/>
+          <p:cNvPr id="45" name="Text 43"/>
+          <p:cNvSpPr/>
+          <p:nvPr/>
+        </p:nvSpPr>
+        <p:spPr>
+          <a:xfrm>
+            <a:off x="4331643" y="4169664"/>
             <a:ext cx="685800" cy="475488"/>
           </a:xfrm>
           <a:prstGeom prst="rect">
@@ -11049,7 +11166,7 @@
                 <a:ea typeface="Trebuchet MS" pitchFamily="34" charset="-122"/>
                 <a:cs typeface="Trebuchet MS" pitchFamily="34" charset="-120"/>
               </a:rPr>
-              <a:t>l</a:t>
+              <a:t>u</a:t>
             </a:r>
             <a:endParaRPr lang="en-US" sz="900" dirty="0"/>
           </a:p>
@@ -11057,13 +11174,13 @@
       </p:sp>
       <p:sp>
         <p:nvSpPr>
-          <p:cNvPr id="45" name="Shape 43"/>
-          <p:cNvSpPr/>
-          <p:nvPr/>
-        </p:nvSpPr>
-        <p:spPr>
-          <a:xfrm>
-            <a:off x="4447032" y="4169664"/>
+          <p:cNvPr id="46" name="Shape 44"/>
+          <p:cNvSpPr/>
+          <p:nvPr/>
+        </p:nvSpPr>
+        <p:spPr>
+          <a:xfrm>
+            <a:off x="5370141" y="4169664"/>
             <a:ext cx="685800" cy="475488"/>
           </a:xfrm>
           <a:prstGeom prst="rect">
@@ -11084,13 +11201,13 @@
       </p:sp>
       <p:sp>
         <p:nvSpPr>
-          <p:cNvPr id="46" name="Text 44"/>
-          <p:cNvSpPr/>
-          <p:nvPr/>
-        </p:nvSpPr>
-        <p:spPr>
-          <a:xfrm>
-            <a:off x="4447032" y="4169664"/>
+          <p:cNvPr id="47" name="Text 45"/>
+          <p:cNvSpPr/>
+          <p:nvPr/>
+        </p:nvSpPr>
+        <p:spPr>
+          <a:xfrm>
+            <a:off x="5370141" y="4169664"/>
             <a:ext cx="685800" cy="475488"/>
           </a:xfrm>
           <a:prstGeom prst="rect">
@@ -11115,7 +11232,7 @@
                 <a:ea typeface="Trebuchet MS" pitchFamily="34" charset="-122"/>
                 <a:cs typeface="Trebuchet MS" pitchFamily="34" charset="-120"/>
               </a:rPr>
-              <a:t>u</a:t>
+              <a:t>a</a:t>
             </a:r>
             <a:endParaRPr lang="en-US" sz="900" dirty="0"/>
           </a:p>
@@ -11123,13 +11240,13 @@
       </p:sp>
       <p:sp>
         <p:nvSpPr>
-          <p:cNvPr id="47" name="Shape 45"/>
-          <p:cNvSpPr/>
-          <p:nvPr/>
-        </p:nvSpPr>
-        <p:spPr>
-          <a:xfrm>
-            <a:off x="5254752" y="4169664"/>
+          <p:cNvPr id="48" name="Shape 46"/>
+          <p:cNvSpPr/>
+          <p:nvPr/>
+        </p:nvSpPr>
+        <p:spPr>
+          <a:xfrm>
+            <a:off x="6408638" y="4169664"/>
             <a:ext cx="685800" cy="475488"/>
           </a:xfrm>
           <a:prstGeom prst="rect">
@@ -11150,13 +11267,13 @@
       </p:sp>
       <p:sp>
         <p:nvSpPr>
-          <p:cNvPr id="48" name="Text 46"/>
-          <p:cNvSpPr/>
-          <p:nvPr/>
-        </p:nvSpPr>
-        <p:spPr>
-          <a:xfrm>
-            <a:off x="5254752" y="4169664"/>
+          <p:cNvPr id="49" name="Text 47"/>
+          <p:cNvSpPr/>
+          <p:nvPr/>
+        </p:nvSpPr>
+        <p:spPr>
+          <a:xfrm>
+            <a:off x="6408638" y="4169664"/>
             <a:ext cx="685800" cy="475488"/>
           </a:xfrm>
           <a:prstGeom prst="rect">
@@ -11181,7 +11298,7 @@
                 <a:ea typeface="Trebuchet MS" pitchFamily="34" charset="-122"/>
                 <a:cs typeface="Trebuchet MS" pitchFamily="34" charset="-120"/>
               </a:rPr>
-              <a:t>e</a:t>
+              <a:t>b</a:t>
             </a:r>
             <a:endParaRPr lang="en-US" sz="900" dirty="0"/>
           </a:p>
@@ -11189,13 +11306,13 @@
       </p:sp>
       <p:sp>
         <p:nvSpPr>
-          <p:cNvPr id="49" name="Shape 47"/>
-          <p:cNvSpPr/>
-          <p:nvPr/>
-        </p:nvSpPr>
-        <p:spPr>
-          <a:xfrm>
-            <a:off x="6062472" y="4169664"/>
+          <p:cNvPr id="50" name="Shape 48"/>
+          <p:cNvSpPr/>
+          <p:nvPr/>
+        </p:nvSpPr>
+        <p:spPr>
+          <a:xfrm>
+            <a:off x="7447135" y="4169664"/>
             <a:ext cx="685800" cy="475488"/>
           </a:xfrm>
           <a:prstGeom prst="rect">
@@ -11216,145 +11333,13 @@
       </p:sp>
       <p:sp>
         <p:nvSpPr>
-          <p:cNvPr id="50" name="Text 48"/>
-          <p:cNvSpPr/>
-          <p:nvPr/>
-        </p:nvSpPr>
-        <p:spPr>
-          <a:xfrm>
-            <a:off x="6062472" y="4169664"/>
-            <a:ext cx="685800" cy="475488"/>
-          </a:xfrm>
-          <a:prstGeom prst="rect">
-            <a:avLst/>
-          </a:prstGeom>
-          <a:noFill/>
-          <a:ln/>
-        </p:spPr>
-        <p:txBody>
-          <a:bodyPr wrap="square" lIns="0" tIns="0" rIns="0" bIns="0" rtlCol="0" anchor="ctr"/>
-          <a:lstStyle/>
-          <a:p>
-            <a:pPr algn="ctr" indent="0" marL="0">
-              <a:buNone/>
-            </a:pPr>
-            <a:r>
-              <a:rPr lang="en-US" sz="900" b="1" dirty="0">
-                <a:solidFill>
-                  <a:srgbClr val="9D174D"/>
-                </a:solidFill>
-                <a:latin typeface="Trebuchet MS" pitchFamily="34" charset="0"/>
-                <a:ea typeface="Trebuchet MS" pitchFamily="34" charset="-122"/>
-                <a:cs typeface="Trebuchet MS" pitchFamily="34" charset="-120"/>
-              </a:rPr>
-              <a:t>a</a:t>
-            </a:r>
-            <a:endParaRPr lang="en-US" sz="900" dirty="0"/>
-          </a:p>
-        </p:txBody>
-      </p:sp>
-      <p:sp>
-        <p:nvSpPr>
-          <p:cNvPr id="51" name="Shape 49"/>
-          <p:cNvSpPr/>
-          <p:nvPr/>
-        </p:nvSpPr>
-        <p:spPr>
-          <a:xfrm>
-            <a:off x="6870192" y="4169664"/>
-            <a:ext cx="685800" cy="475488"/>
-          </a:xfrm>
-          <a:prstGeom prst="rect">
-            <a:avLst>
-              <a:gd name="adj" fmla="val 7692"/>
-            </a:avLst>
-          </a:prstGeom>
-          <a:solidFill>
-            <a:srgbClr val="FFFFFF"/>
-          </a:solidFill>
-          <a:ln w="12700">
-            <a:solidFill>
-              <a:srgbClr val="DB2777"/>
-            </a:solidFill>
-            <a:prstDash val="solid"/>
-          </a:ln>
-        </p:spPr>
-      </p:sp>
-      <p:sp>
-        <p:nvSpPr>
-          <p:cNvPr id="52" name="Text 50"/>
-          <p:cNvSpPr/>
-          <p:nvPr/>
-        </p:nvSpPr>
-        <p:spPr>
-          <a:xfrm>
-            <a:off x="6870192" y="4169664"/>
-            <a:ext cx="685800" cy="475488"/>
-          </a:xfrm>
-          <a:prstGeom prst="rect">
-            <a:avLst/>
-          </a:prstGeom>
-          <a:noFill/>
-          <a:ln/>
-        </p:spPr>
-        <p:txBody>
-          <a:bodyPr wrap="square" lIns="0" tIns="0" rIns="0" bIns="0" rtlCol="0" anchor="ctr"/>
-          <a:lstStyle/>
-          <a:p>
-            <a:pPr algn="ctr" indent="0" marL="0">
-              <a:buNone/>
-            </a:pPr>
-            <a:r>
-              <a:rPr lang="en-US" sz="900" b="1" dirty="0">
-                <a:solidFill>
-                  <a:srgbClr val="9D174D"/>
-                </a:solidFill>
-                <a:latin typeface="Trebuchet MS" pitchFamily="34" charset="0"/>
-                <a:ea typeface="Trebuchet MS" pitchFamily="34" charset="-122"/>
-                <a:cs typeface="Trebuchet MS" pitchFamily="34" charset="-120"/>
-              </a:rPr>
-              <a:t>b</a:t>
-            </a:r>
-            <a:endParaRPr lang="en-US" sz="900" dirty="0"/>
-          </a:p>
-        </p:txBody>
-      </p:sp>
-      <p:sp>
-        <p:nvSpPr>
-          <p:cNvPr id="53" name="Shape 51"/>
-          <p:cNvSpPr/>
-          <p:nvPr/>
-        </p:nvSpPr>
-        <p:spPr>
-          <a:xfrm>
-            <a:off x="7677912" y="4169664"/>
-            <a:ext cx="685800" cy="475488"/>
-          </a:xfrm>
-          <a:prstGeom prst="rect">
-            <a:avLst>
-              <a:gd name="adj" fmla="val 7692"/>
-            </a:avLst>
-          </a:prstGeom>
-          <a:solidFill>
-            <a:srgbClr val="FFFFFF"/>
-          </a:solidFill>
-          <a:ln w="12700">
-            <a:solidFill>
-              <a:srgbClr val="DB2777"/>
-            </a:solidFill>
-            <a:prstDash val="solid"/>
-          </a:ln>
-        </p:spPr>
-      </p:sp>
-      <p:sp>
-        <p:nvSpPr>
-          <p:cNvPr id="54" name="Text 52"/>
-          <p:cNvSpPr/>
-          <p:nvPr/>
-        </p:nvSpPr>
-        <p:spPr>
-          <a:xfrm>
-            <a:off x="7677912" y="4169664"/>
+          <p:cNvPr id="51" name="Text 49"/>
+          <p:cNvSpPr/>
+          <p:nvPr/>
+        </p:nvSpPr>
+        <p:spPr>
+          <a:xfrm>
+            <a:off x="7447135" y="4169664"/>
             <a:ext cx="685800" cy="475488"/>
           </a:xfrm>
           <a:prstGeom prst="rect">
@@ -11671,7 +11656,7 @@
                 <a:ea typeface="Calibri" pitchFamily="34" charset="-122"/>
                 <a:cs typeface="Calibri" pitchFamily="34" charset="-120"/>
               </a:rPr>
-              <a:t>Word Labs  •  wordlabs.app  •  Root: 'value' = worth, importance, or price</a:t>
+              <a:t>Word Labs  •  wordlabs.app  •  Root: 'value' = worth, importance, price</a:t>
             </a:r>
             <a:endParaRPr lang="en-US" sz="800" dirty="0"/>
           </a:p>
@@ -11810,7 +11795,7 @@
                 <a:ea typeface="Trebuchet MS" pitchFamily="34" charset="-122"/>
                 <a:cs typeface="Trebuchet MS" pitchFamily="34" charset="-120"/>
               </a:rPr>
-              <a:t>undervalue</a:t>
+              <a:t>valueless</a:t>
             </a:r>
             <a:endParaRPr lang="en-US" sz="2800" dirty="0"/>
           </a:p>
@@ -12498,7 +12483,7 @@
                 <a:ea typeface="Calibri" pitchFamily="34" charset="-122"/>
                 <a:cs typeface="Calibri" pitchFamily="34" charset="-120"/>
               </a:rPr>
-              <a:t>Word Labs  •  wordlabs.app  •  Root: 'value' = worth, importance, or price</a:t>
+              <a:t>Word Labs  •  wordlabs.app  •  Root: 'value' = worth, importance, price</a:t>
             </a:r>
             <a:endParaRPr lang="en-US" sz="800" dirty="0"/>
           </a:p>
@@ -12637,7 +12622,7 @@
                 <a:ea typeface="Trebuchet MS" pitchFamily="34" charset="-122"/>
                 <a:cs typeface="Trebuchet MS" pitchFamily="34" charset="-120"/>
               </a:rPr>
-              <a:t>undervalue</a:t>
+              <a:t>valueless</a:t>
             </a:r>
             <a:endParaRPr lang="en-US" sz="2800" dirty="0"/>
           </a:p>
@@ -12726,11 +12711,11 @@
             </a:avLst>
           </a:prstGeom>
           <a:solidFill>
-            <a:srgbClr val="DDD6FE"/>
+            <a:srgbClr val="CCFBF1"/>
           </a:solidFill>
           <a:ln w="19050">
             <a:solidFill>
-              <a:srgbClr val="7C3AED"/>
+              <a:srgbClr val="0D9488"/>
             </a:solidFill>
             <a:prstDash val="solid"/>
           </a:ln>
@@ -12770,13 +12755,13 @@
             <a:r>
               <a:rPr lang="en-US" sz="1300" b="1" dirty="0">
                 <a:solidFill>
-                  <a:srgbClr val="4C1D95"/>
+                  <a:srgbClr val="0F766E"/>
                 </a:solidFill>
                 <a:latin typeface="Trebuchet MS" pitchFamily="34" charset="0"/>
                 <a:ea typeface="Trebuchet MS" pitchFamily="34" charset="-122"/>
                 <a:cs typeface="Trebuchet MS" pitchFamily="34" charset="-120"/>
               </a:rPr>
-              <a:t>under</a:t>
+              <a:t>value</a:t>
             </a:r>
             <a:endParaRPr lang="en-US" sz="1300" dirty="0"/>
           </a:p>
@@ -12815,7 +12800,7 @@
                 <a:ea typeface="Calibri" pitchFamily="34" charset="-122"/>
                 <a:cs typeface="Calibri" pitchFamily="34" charset="-120"/>
               </a:rPr>
-              <a:t>below or less than</a:t>
+              <a:t>worth</a:t>
             </a:r>
             <a:endParaRPr lang="en-US" sz="850" dirty="0"/>
           </a:p>
@@ -12838,11 +12823,11 @@
             </a:avLst>
           </a:prstGeom>
           <a:solidFill>
-            <a:srgbClr val="CCFBF1"/>
+            <a:srgbClr val="DDD6FE"/>
           </a:solidFill>
           <a:ln w="19050">
             <a:solidFill>
-              <a:srgbClr val="0D9488"/>
+              <a:srgbClr val="7C3AED"/>
             </a:solidFill>
             <a:prstDash val="solid"/>
           </a:ln>
@@ -12882,13 +12867,13 @@
             <a:r>
               <a:rPr lang="en-US" sz="1300" b="1" dirty="0">
                 <a:solidFill>
-                  <a:srgbClr val="0F766E"/>
+                  <a:srgbClr val="4C1D95"/>
                 </a:solidFill>
                 <a:latin typeface="Trebuchet MS" pitchFamily="34" charset="0"/>
                 <a:ea typeface="Trebuchet MS" pitchFamily="34" charset="-122"/>
                 <a:cs typeface="Trebuchet MS" pitchFamily="34" charset="-120"/>
               </a:rPr>
-              <a:t>value</a:t>
+              <a:t>less</a:t>
             </a:r>
             <a:endParaRPr lang="en-US" sz="1300" dirty="0"/>
           </a:p>
@@ -12927,7 +12912,7 @@
                 <a:ea typeface="Calibri" pitchFamily="34" charset="-122"/>
                 <a:cs typeface="Calibri" pitchFamily="34" charset="-120"/>
               </a:rPr>
-              <a:t>worth</a:t>
+              <a:t>without</a:t>
             </a:r>
             <a:endParaRPr lang="en-US" sz="850" dirty="0"/>
           </a:p>
@@ -13483,7 +13468,7 @@
                 <a:ea typeface="Calibri" pitchFamily="34" charset="-122"/>
                 <a:cs typeface="Calibri" pitchFamily="34" charset="-120"/>
               </a:rPr>
-              <a:t>Word Labs  •  wordlabs.app  •  Root: 'value' = worth, importance, or price</a:t>
+              <a:t>Word Labs  •  wordlabs.app  •  Root: 'value' = worth, importance, price</a:t>
             </a:r>
             <a:endParaRPr lang="en-US" sz="800" dirty="0"/>
           </a:p>
@@ -13622,7 +13607,7 @@
                 <a:ea typeface="Trebuchet MS" pitchFamily="34" charset="-122"/>
                 <a:cs typeface="Trebuchet MS" pitchFamily="34" charset="-120"/>
               </a:rPr>
-              <a:t>undervalue</a:t>
+              <a:t>valueless</a:t>
             </a:r>
             <a:endParaRPr lang="en-US" sz="2800" dirty="0"/>
           </a:p>
@@ -13711,11 +13696,11 @@
             </a:avLst>
           </a:prstGeom>
           <a:solidFill>
-            <a:srgbClr val="DDD6FE"/>
+            <a:srgbClr val="CCFBF1"/>
           </a:solidFill>
           <a:ln w="19050">
             <a:solidFill>
-              <a:srgbClr val="7C3AED"/>
+              <a:srgbClr val="0D9488"/>
             </a:solidFill>
             <a:prstDash val="solid"/>
           </a:ln>
@@ -13755,13 +13740,13 @@
             <a:r>
               <a:rPr lang="en-US" sz="1300" b="1" dirty="0">
                 <a:solidFill>
-                  <a:srgbClr val="4C1D95"/>
+                  <a:srgbClr val="0F766E"/>
                 </a:solidFill>
                 <a:latin typeface="Trebuchet MS" pitchFamily="34" charset="0"/>
                 <a:ea typeface="Trebuchet MS" pitchFamily="34" charset="-122"/>
                 <a:cs typeface="Trebuchet MS" pitchFamily="34" charset="-120"/>
               </a:rPr>
-              <a:t>under</a:t>
+              <a:t>value</a:t>
             </a:r>
             <a:endParaRPr lang="en-US" sz="1300" dirty="0"/>
           </a:p>
@@ -13800,7 +13785,7 @@
                 <a:ea typeface="Calibri" pitchFamily="34" charset="-122"/>
                 <a:cs typeface="Calibri" pitchFamily="34" charset="-120"/>
               </a:rPr>
-              <a:t>below or less than</a:t>
+              <a:t>worth</a:t>
             </a:r>
             <a:endParaRPr lang="en-US" sz="850" dirty="0"/>
           </a:p>
@@ -13823,11 +13808,11 @@
             </a:avLst>
           </a:prstGeom>
           <a:solidFill>
-            <a:srgbClr val="CCFBF1"/>
+            <a:srgbClr val="DDD6FE"/>
           </a:solidFill>
           <a:ln w="19050">
             <a:solidFill>
-              <a:srgbClr val="0D9488"/>
+              <a:srgbClr val="7C3AED"/>
             </a:solidFill>
             <a:prstDash val="solid"/>
           </a:ln>
@@ -13867,13 +13852,13 @@
             <a:r>
               <a:rPr lang="en-US" sz="1300" b="1" dirty="0">
                 <a:solidFill>
-                  <a:srgbClr val="0F766E"/>
+                  <a:srgbClr val="4C1D95"/>
                 </a:solidFill>
                 <a:latin typeface="Trebuchet MS" pitchFamily="34" charset="0"/>
                 <a:ea typeface="Trebuchet MS" pitchFamily="34" charset="-122"/>
                 <a:cs typeface="Trebuchet MS" pitchFamily="34" charset="-120"/>
               </a:rPr>
-              <a:t>value</a:t>
+              <a:t>less</a:t>
             </a:r>
             <a:endParaRPr lang="en-US" sz="1300" dirty="0"/>
           </a:p>
@@ -13912,7 +13897,7 @@
                 <a:ea typeface="Calibri" pitchFamily="34" charset="-122"/>
                 <a:cs typeface="Calibri" pitchFamily="34" charset="-120"/>
               </a:rPr>
-              <a:t>worth</a:t>
+              <a:t>without</a:t>
             </a:r>
             <a:endParaRPr lang="en-US" sz="850" dirty="0"/>
           </a:p>
@@ -14019,8 +14004,8 @@
         </p:nvSpPr>
         <p:spPr>
           <a:xfrm>
-            <a:off x="1975104" y="3364992"/>
-            <a:ext cx="1554480" cy="475488"/>
+            <a:off x="2313432" y="3364992"/>
+            <a:ext cx="1645920" cy="475488"/>
           </a:xfrm>
           <a:prstGeom prst="rect">
             <a:avLst>
@@ -14046,8 +14031,8 @@
         </p:nvSpPr>
         <p:spPr>
           <a:xfrm>
-            <a:off x="1975104" y="3364992"/>
-            <a:ext cx="1554480" cy="475488"/>
+            <a:off x="2313432" y="3364992"/>
+            <a:ext cx="1645920" cy="475488"/>
           </a:xfrm>
           <a:prstGeom prst="rect">
             <a:avLst/>
@@ -14071,7 +14056,7 @@
                 <a:ea typeface="Trebuchet MS" pitchFamily="34" charset="-122"/>
                 <a:cs typeface="Trebuchet MS" pitchFamily="34" charset="-120"/>
               </a:rPr>
-              <a:t>un</a:t>
+              <a:t>val</a:t>
             </a:r>
             <a:endParaRPr lang="en-US" sz="1400" dirty="0"/>
           </a:p>
@@ -14085,8 +14070,8 @@
         </p:nvSpPr>
         <p:spPr>
           <a:xfrm>
-            <a:off x="3529584" y="3364992"/>
-            <a:ext cx="73152" cy="475488"/>
+            <a:off x="3959352" y="3364992"/>
+            <a:ext cx="411480" cy="475488"/>
           </a:xfrm>
           <a:prstGeom prst="rect">
             <a:avLst/>
@@ -14124,8 +14109,8 @@
         </p:nvSpPr>
         <p:spPr>
           <a:xfrm>
-            <a:off x="3602736" y="3364992"/>
-            <a:ext cx="1554480" cy="475488"/>
+            <a:off x="4370832" y="3364992"/>
+            <a:ext cx="1645920" cy="475488"/>
           </a:xfrm>
           <a:prstGeom prst="rect">
             <a:avLst>
@@ -14151,8 +14136,8 @@
         </p:nvSpPr>
         <p:spPr>
           <a:xfrm>
-            <a:off x="3602736" y="3364992"/>
-            <a:ext cx="1554480" cy="475488"/>
+            <a:off x="4370832" y="3364992"/>
+            <a:ext cx="1645920" cy="475488"/>
           </a:xfrm>
           <a:prstGeom prst="rect">
             <a:avLst/>
@@ -14176,7 +14161,7 @@
                 <a:ea typeface="Trebuchet MS" pitchFamily="34" charset="-122"/>
                 <a:cs typeface="Trebuchet MS" pitchFamily="34" charset="-120"/>
               </a:rPr>
-              <a:t>der</a:t>
+              <a:t>ue</a:t>
             </a:r>
             <a:endParaRPr lang="en-US" sz="1400" dirty="0"/>
           </a:p>
@@ -14190,8 +14175,8 @@
         </p:nvSpPr>
         <p:spPr>
           <a:xfrm>
-            <a:off x="5157216" y="3364992"/>
-            <a:ext cx="73152" cy="475488"/>
+            <a:off x="6016752" y="3364992"/>
+            <a:ext cx="411480" cy="475488"/>
           </a:xfrm>
           <a:prstGeom prst="rect">
             <a:avLst/>
@@ -14229,8 +14214,8 @@
         </p:nvSpPr>
         <p:spPr>
           <a:xfrm>
-            <a:off x="5230368" y="3364992"/>
-            <a:ext cx="1554480" cy="475488"/>
+            <a:off x="6428232" y="3364992"/>
+            <a:ext cx="1645920" cy="475488"/>
           </a:xfrm>
           <a:prstGeom prst="rect">
             <a:avLst>
@@ -14256,8 +14241,8 @@
         </p:nvSpPr>
         <p:spPr>
           <a:xfrm>
-            <a:off x="5230368" y="3364992"/>
-            <a:ext cx="1554480" cy="475488"/>
+            <a:off x="6428232" y="3364992"/>
+            <a:ext cx="1645920" cy="475488"/>
           </a:xfrm>
           <a:prstGeom prst="rect">
             <a:avLst/>
@@ -14281,7 +14266,7 @@
                 <a:ea typeface="Trebuchet MS" pitchFamily="34" charset="-122"/>
                 <a:cs typeface="Trebuchet MS" pitchFamily="34" charset="-120"/>
               </a:rPr>
-              <a:t>val</a:t>
+              <a:t>less</a:t>
             </a:r>
             <a:endParaRPr lang="en-US" sz="1400" dirty="0"/>
           </a:p>
@@ -14289,119 +14274,80 @@
       </p:sp>
       <p:sp>
         <p:nvSpPr>
-          <p:cNvPr id="33" name="Text 31"/>
-          <p:cNvSpPr/>
-          <p:nvPr/>
-        </p:nvSpPr>
-        <p:spPr>
-          <a:xfrm>
-            <a:off x="6784848" y="3364992"/>
-            <a:ext cx="73152" cy="475488"/>
-          </a:xfrm>
-          <a:prstGeom prst="rect">
-            <a:avLst/>
-          </a:prstGeom>
-          <a:noFill/>
-          <a:ln/>
-        </p:spPr>
-        <p:txBody>
-          <a:bodyPr wrap="square" lIns="0" tIns="0" rIns="0" bIns="0" rtlCol="0" anchor="ctr"/>
-          <a:lstStyle/>
-          <a:p>
-            <a:pPr algn="ctr" indent="0" marL="0">
-              <a:buNone/>
-            </a:pPr>
-            <a:r>
-              <a:rPr lang="en-US" sz="1600" b="1" dirty="0">
-                <a:solidFill>
-                  <a:srgbClr val="0D9488"/>
+          <p:cNvPr id="33" name="Shape 31"/>
+          <p:cNvSpPr/>
+          <p:nvPr/>
+        </p:nvSpPr>
+        <p:spPr>
+          <a:xfrm>
+            <a:off x="365760" y="4096512"/>
+            <a:ext cx="1371600" cy="804672"/>
+          </a:xfrm>
+          <a:prstGeom prst="rect">
+            <a:avLst>
+              <a:gd name="adj" fmla="val 6818"/>
+            </a:avLst>
+          </a:prstGeom>
+          <a:solidFill>
+            <a:srgbClr val="E2E8F0"/>
+          </a:solidFill>
+          <a:ln w="12700">
+            <a:solidFill>
+              <a:srgbClr val="E2E8F0"/>
+            </a:solidFill>
+            <a:prstDash val="solid"/>
+          </a:ln>
+        </p:spPr>
+      </p:sp>
+      <p:sp>
+        <p:nvSpPr>
+          <p:cNvPr id="34" name="Text 32"/>
+          <p:cNvSpPr/>
+          <p:nvPr/>
+        </p:nvSpPr>
+        <p:spPr>
+          <a:xfrm>
+            <a:off x="365760" y="4096512"/>
+            <a:ext cx="1371600" cy="804672"/>
+          </a:xfrm>
+          <a:prstGeom prst="rect">
+            <a:avLst/>
+          </a:prstGeom>
+          <a:noFill/>
+          <a:ln/>
+        </p:spPr>
+        <p:txBody>
+          <a:bodyPr wrap="square" lIns="0" tIns="0" rIns="0" bIns="0" rtlCol="0" anchor="ctr"/>
+          <a:lstStyle/>
+          <a:p>
+            <a:pPr algn="ctr" indent="0" marL="0">
+              <a:buNone/>
+            </a:pPr>
+            <a:r>
+              <a:rPr lang="en-US" sz="1100" b="1" dirty="0">
+                <a:solidFill>
+                  <a:srgbClr val="475569"/>
                 </a:solidFill>
                 <a:latin typeface="Trebuchet MS" pitchFamily="34" charset="0"/>
                 <a:ea typeface="Trebuchet MS" pitchFamily="34" charset="-122"/>
                 <a:cs typeface="Trebuchet MS" pitchFamily="34" charset="-120"/>
               </a:rPr>
-              <a:t>·</a:t>
-            </a:r>
-            <a:endParaRPr lang="en-US" sz="1600" dirty="0"/>
-          </a:p>
-        </p:txBody>
-      </p:sp>
-      <p:sp>
-        <p:nvSpPr>
-          <p:cNvPr id="34" name="Shape 32"/>
-          <p:cNvSpPr/>
-          <p:nvPr/>
-        </p:nvSpPr>
-        <p:spPr>
-          <a:xfrm>
-            <a:off x="6858000" y="3364992"/>
-            <a:ext cx="1554480" cy="475488"/>
-          </a:xfrm>
-          <a:prstGeom prst="rect">
-            <a:avLst>
-              <a:gd name="adj" fmla="val 9615"/>
-            </a:avLst>
-          </a:prstGeom>
-          <a:solidFill>
-            <a:srgbClr val="FFFFFF"/>
-          </a:solidFill>
-          <a:ln w="12700">
-            <a:solidFill>
-              <a:srgbClr val="0D9488"/>
-            </a:solidFill>
-            <a:prstDash val="solid"/>
-          </a:ln>
-        </p:spPr>
-      </p:sp>
-      <p:sp>
-        <p:nvSpPr>
-          <p:cNvPr id="35" name="Text 33"/>
-          <p:cNvSpPr/>
-          <p:nvPr/>
-        </p:nvSpPr>
-        <p:spPr>
-          <a:xfrm>
-            <a:off x="6858000" y="3364992"/>
-            <a:ext cx="1554480" cy="475488"/>
-          </a:xfrm>
-          <a:prstGeom prst="rect">
-            <a:avLst/>
-          </a:prstGeom>
-          <a:noFill/>
-          <a:ln/>
-        </p:spPr>
-        <p:txBody>
-          <a:bodyPr wrap="square" lIns="0" tIns="0" rIns="0" bIns="0" rtlCol="0" anchor="ctr"/>
-          <a:lstStyle/>
-          <a:p>
-            <a:pPr algn="ctr" indent="0" marL="0">
-              <a:buNone/>
-            </a:pPr>
-            <a:r>
-              <a:rPr lang="en-US" sz="1400" b="1" dirty="0">
-                <a:solidFill>
-                  <a:srgbClr val="0D9488"/>
-                </a:solidFill>
-                <a:latin typeface="Trebuchet MS" pitchFamily="34" charset="0"/>
-                <a:ea typeface="Trebuchet MS" pitchFamily="34" charset="-122"/>
-                <a:cs typeface="Trebuchet MS" pitchFamily="34" charset="-120"/>
-              </a:rPr>
-              <a:t>ue</a:t>
-            </a:r>
-            <a:endParaRPr lang="en-US" sz="1400" dirty="0"/>
-          </a:p>
-        </p:txBody>
-      </p:sp>
-      <p:sp>
-        <p:nvSpPr>
-          <p:cNvPr id="36" name="Shape 34"/>
-          <p:cNvSpPr/>
-          <p:nvPr/>
-        </p:nvSpPr>
-        <p:spPr>
-          <a:xfrm>
-            <a:off x="365760" y="4096512"/>
-            <a:ext cx="1371600" cy="804672"/>
+              <a:t>Phonemes</a:t>
+            </a:r>
+            <a:endParaRPr lang="en-US" sz="1100" dirty="0"/>
+          </a:p>
+        </p:txBody>
+      </p:sp>
+      <p:sp>
+        <p:nvSpPr>
+          <p:cNvPr id="35" name="Shape 33"/>
+          <p:cNvSpPr/>
+          <p:nvPr/>
+        </p:nvSpPr>
+        <p:spPr>
+          <a:xfrm>
+            <a:off x="1874520" y="4096512"/>
+            <a:ext cx="6903720" cy="804672"/>
           </a:xfrm>
           <a:prstGeom prst="rect">
             <a:avLst>
@@ -14409,85 +14355,19 @@
             </a:avLst>
           </a:prstGeom>
           <a:solidFill>
-            <a:srgbClr val="E2E8F0"/>
+            <a:srgbClr val="F8FAFC"/>
           </a:solidFill>
           <a:ln w="12700">
             <a:solidFill>
               <a:srgbClr val="E2E8F0"/>
             </a:solidFill>
-            <a:prstDash val="solid"/>
-          </a:ln>
-        </p:spPr>
-      </p:sp>
-      <p:sp>
-        <p:nvSpPr>
-          <p:cNvPr id="37" name="Text 35"/>
-          <p:cNvSpPr/>
-          <p:nvPr/>
-        </p:nvSpPr>
-        <p:spPr>
-          <a:xfrm>
-            <a:off x="365760" y="4096512"/>
-            <a:ext cx="1371600" cy="804672"/>
-          </a:xfrm>
-          <a:prstGeom prst="rect">
-            <a:avLst/>
-          </a:prstGeom>
-          <a:noFill/>
-          <a:ln/>
-        </p:spPr>
-        <p:txBody>
-          <a:bodyPr wrap="square" lIns="0" tIns="0" rIns="0" bIns="0" rtlCol="0" anchor="ctr"/>
-          <a:lstStyle/>
-          <a:p>
-            <a:pPr algn="ctr" indent="0" marL="0">
-              <a:buNone/>
-            </a:pPr>
-            <a:r>
-              <a:rPr lang="en-US" sz="1100" b="1" dirty="0">
-                <a:solidFill>
-                  <a:srgbClr val="475569"/>
-                </a:solidFill>
-                <a:latin typeface="Trebuchet MS" pitchFamily="34" charset="0"/>
-                <a:ea typeface="Trebuchet MS" pitchFamily="34" charset="-122"/>
-                <a:cs typeface="Trebuchet MS" pitchFamily="34" charset="-120"/>
-              </a:rPr>
-              <a:t>Phonemes</a:t>
-            </a:r>
-            <a:endParaRPr lang="en-US" sz="1100" dirty="0"/>
-          </a:p>
-        </p:txBody>
-      </p:sp>
-      <p:sp>
-        <p:nvSpPr>
-          <p:cNvPr id="38" name="Shape 36"/>
-          <p:cNvSpPr/>
-          <p:nvPr/>
-        </p:nvSpPr>
-        <p:spPr>
-          <a:xfrm>
-            <a:off x="1874520" y="4096512"/>
-            <a:ext cx="6903720" cy="804672"/>
-          </a:xfrm>
-          <a:prstGeom prst="rect">
-            <a:avLst>
-              <a:gd name="adj" fmla="val 6818"/>
-            </a:avLst>
-          </a:prstGeom>
-          <a:solidFill>
-            <a:srgbClr val="F8FAFC"/>
-          </a:solidFill>
-          <a:ln w="12700">
-            <a:solidFill>
-              <a:srgbClr val="E2E8F0"/>
-            </a:solidFill>
             <a:prstDash val="dash"/>
           </a:ln>
         </p:spPr>
       </p:sp>
       <p:sp>
         <p:nvSpPr>
-          <p:cNvPr id="39" name="Text 37"/>
+          <p:cNvPr id="36" name="Text 34"/>
           <p:cNvSpPr/>
           <p:nvPr/>
         </p:nvSpPr>
@@ -14719,7 +14599,7 @@
                 <a:ea typeface="Calibri" pitchFamily="34" charset="-122"/>
                 <a:cs typeface="Calibri" pitchFamily="34" charset="-120"/>
               </a:rPr>
-              <a:t>Root 'value' — worth, importance, or price</a:t>
+              <a:t>Root 'value' — worth, importance, price</a:t>
             </a:r>
             <a:endParaRPr lang="en-US" sz="1600" dirty="0"/>
           </a:p>
@@ -15075,7 +14955,7 @@
                 <a:ea typeface="Calibri" pitchFamily="34" charset="-122"/>
                 <a:cs typeface="Calibri" pitchFamily="34" charset="-120"/>
               </a:rPr>
-              <a:t>Word Labs  •  wordlabs.app  •  Root: 'value' = worth, importance, or price</a:t>
+              <a:t>Word Labs  •  wordlabs.app  •  Root: 'value' = worth, importance, price</a:t>
             </a:r>
             <a:endParaRPr lang="en-US" sz="800" dirty="0"/>
           </a:p>
@@ -15214,7 +15094,7 @@
                 <a:ea typeface="Trebuchet MS" pitchFamily="34" charset="-122"/>
                 <a:cs typeface="Trebuchet MS" pitchFamily="34" charset="-120"/>
               </a:rPr>
-              <a:t>undervalue</a:t>
+              <a:t>valueless</a:t>
             </a:r>
             <a:endParaRPr lang="en-US" sz="2800" dirty="0"/>
           </a:p>
@@ -15303,11 +15183,11 @@
             </a:avLst>
           </a:prstGeom>
           <a:solidFill>
-            <a:srgbClr val="DDD6FE"/>
+            <a:srgbClr val="CCFBF1"/>
           </a:solidFill>
           <a:ln w="19050">
             <a:solidFill>
-              <a:srgbClr val="7C3AED"/>
+              <a:srgbClr val="0D9488"/>
             </a:solidFill>
             <a:prstDash val="solid"/>
           </a:ln>
@@ -15347,13 +15227,13 @@
             <a:r>
               <a:rPr lang="en-US" sz="1300" b="1" dirty="0">
                 <a:solidFill>
-                  <a:srgbClr val="4C1D95"/>
+                  <a:srgbClr val="0F766E"/>
                 </a:solidFill>
                 <a:latin typeface="Trebuchet MS" pitchFamily="34" charset="0"/>
                 <a:ea typeface="Trebuchet MS" pitchFamily="34" charset="-122"/>
                 <a:cs typeface="Trebuchet MS" pitchFamily="34" charset="-120"/>
               </a:rPr>
-              <a:t>under</a:t>
+              <a:t>value</a:t>
             </a:r>
             <a:endParaRPr lang="en-US" sz="1300" dirty="0"/>
           </a:p>
@@ -15392,7 +15272,7 @@
                 <a:ea typeface="Calibri" pitchFamily="34" charset="-122"/>
                 <a:cs typeface="Calibri" pitchFamily="34" charset="-120"/>
               </a:rPr>
-              <a:t>below or less than</a:t>
+              <a:t>worth</a:t>
             </a:r>
             <a:endParaRPr lang="en-US" sz="850" dirty="0"/>
           </a:p>
@@ -15415,11 +15295,11 @@
             </a:avLst>
           </a:prstGeom>
           <a:solidFill>
-            <a:srgbClr val="CCFBF1"/>
+            <a:srgbClr val="DDD6FE"/>
           </a:solidFill>
           <a:ln w="19050">
             <a:solidFill>
-              <a:srgbClr val="0D9488"/>
+              <a:srgbClr val="7C3AED"/>
             </a:solidFill>
             <a:prstDash val="solid"/>
           </a:ln>
@@ -15459,13 +15339,13 @@
             <a:r>
               <a:rPr lang="en-US" sz="1300" b="1" dirty="0">
                 <a:solidFill>
-                  <a:srgbClr val="0F766E"/>
+                  <a:srgbClr val="4C1D95"/>
                 </a:solidFill>
                 <a:latin typeface="Trebuchet MS" pitchFamily="34" charset="0"/>
                 <a:ea typeface="Trebuchet MS" pitchFamily="34" charset="-122"/>
                 <a:cs typeface="Trebuchet MS" pitchFamily="34" charset="-120"/>
               </a:rPr>
-              <a:t>value</a:t>
+              <a:t>less</a:t>
             </a:r>
             <a:endParaRPr lang="en-US" sz="1300" dirty="0"/>
           </a:p>
@@ -15504,7 +15384,7 @@
                 <a:ea typeface="Calibri" pitchFamily="34" charset="-122"/>
                 <a:cs typeface="Calibri" pitchFamily="34" charset="-120"/>
               </a:rPr>
-              <a:t>worth</a:t>
+              <a:t>without</a:t>
             </a:r>
             <a:endParaRPr lang="en-US" sz="850" dirty="0"/>
           </a:p>
@@ -15611,8 +15491,8 @@
         </p:nvSpPr>
         <p:spPr>
           <a:xfrm>
-            <a:off x="1975104" y="3364992"/>
-            <a:ext cx="1554480" cy="475488"/>
+            <a:off x="2313432" y="3364992"/>
+            <a:ext cx="1645920" cy="475488"/>
           </a:xfrm>
           <a:prstGeom prst="rect">
             <a:avLst>
@@ -15638,8 +15518,8 @@
         </p:nvSpPr>
         <p:spPr>
           <a:xfrm>
-            <a:off x="1975104" y="3364992"/>
-            <a:ext cx="1554480" cy="475488"/>
+            <a:off x="2313432" y="3364992"/>
+            <a:ext cx="1645920" cy="475488"/>
           </a:xfrm>
           <a:prstGeom prst="rect">
             <a:avLst/>
@@ -15663,7 +15543,7 @@
                 <a:ea typeface="Trebuchet MS" pitchFamily="34" charset="-122"/>
                 <a:cs typeface="Trebuchet MS" pitchFamily="34" charset="-120"/>
               </a:rPr>
-              <a:t>un</a:t>
+              <a:t>val</a:t>
             </a:r>
             <a:endParaRPr lang="en-US" sz="1400" dirty="0"/>
           </a:p>
@@ -15677,8 +15557,8 @@
         </p:nvSpPr>
         <p:spPr>
           <a:xfrm>
-            <a:off x="3529584" y="3364992"/>
-            <a:ext cx="73152" cy="475488"/>
+            <a:off x="3959352" y="3364992"/>
+            <a:ext cx="411480" cy="475488"/>
           </a:xfrm>
           <a:prstGeom prst="rect">
             <a:avLst/>
@@ -15716,8 +15596,8 @@
         </p:nvSpPr>
         <p:spPr>
           <a:xfrm>
-            <a:off x="3602736" y="3364992"/>
-            <a:ext cx="1554480" cy="475488"/>
+            <a:off x="4370832" y="3364992"/>
+            <a:ext cx="1645920" cy="475488"/>
           </a:xfrm>
           <a:prstGeom prst="rect">
             <a:avLst>
@@ -15743,8 +15623,8 @@
         </p:nvSpPr>
         <p:spPr>
           <a:xfrm>
-            <a:off x="3602736" y="3364992"/>
-            <a:ext cx="1554480" cy="475488"/>
+            <a:off x="4370832" y="3364992"/>
+            <a:ext cx="1645920" cy="475488"/>
           </a:xfrm>
           <a:prstGeom prst="rect">
             <a:avLst/>
@@ -15768,7 +15648,7 @@
                 <a:ea typeface="Trebuchet MS" pitchFamily="34" charset="-122"/>
                 <a:cs typeface="Trebuchet MS" pitchFamily="34" charset="-120"/>
               </a:rPr>
-              <a:t>der</a:t>
+              <a:t>ue</a:t>
             </a:r>
             <a:endParaRPr lang="en-US" sz="1400" dirty="0"/>
           </a:p>
@@ -15782,8 +15662,8 @@
         </p:nvSpPr>
         <p:spPr>
           <a:xfrm>
-            <a:off x="5157216" y="3364992"/>
-            <a:ext cx="73152" cy="475488"/>
+            <a:off x="6016752" y="3364992"/>
+            <a:ext cx="411480" cy="475488"/>
           </a:xfrm>
           <a:prstGeom prst="rect">
             <a:avLst/>
@@ -15821,8 +15701,8 @@
         </p:nvSpPr>
         <p:spPr>
           <a:xfrm>
-            <a:off x="5230368" y="3364992"/>
-            <a:ext cx="1554480" cy="475488"/>
+            <a:off x="6428232" y="3364992"/>
+            <a:ext cx="1645920" cy="475488"/>
           </a:xfrm>
           <a:prstGeom prst="rect">
             <a:avLst>
@@ -15848,8 +15728,8 @@
         </p:nvSpPr>
         <p:spPr>
           <a:xfrm>
-            <a:off x="5230368" y="3364992"/>
-            <a:ext cx="1554480" cy="475488"/>
+            <a:off x="6428232" y="3364992"/>
+            <a:ext cx="1645920" cy="475488"/>
           </a:xfrm>
           <a:prstGeom prst="rect">
             <a:avLst/>
@@ -15873,7 +15753,7 @@
                 <a:ea typeface="Trebuchet MS" pitchFamily="34" charset="-122"/>
                 <a:cs typeface="Trebuchet MS" pitchFamily="34" charset="-120"/>
               </a:rPr>
-              <a:t>val</a:t>
+              <a:t>less</a:t>
             </a:r>
             <a:endParaRPr lang="en-US" sz="1400" dirty="0"/>
           </a:p>
@@ -15881,212 +15761,239 @@
       </p:sp>
       <p:sp>
         <p:nvSpPr>
-          <p:cNvPr id="33" name="Text 31"/>
-          <p:cNvSpPr/>
-          <p:nvPr/>
-        </p:nvSpPr>
-        <p:spPr>
-          <a:xfrm>
-            <a:off x="6784848" y="3364992"/>
-            <a:ext cx="73152" cy="475488"/>
-          </a:xfrm>
-          <a:prstGeom prst="rect">
-            <a:avLst/>
-          </a:prstGeom>
-          <a:noFill/>
-          <a:ln/>
-        </p:spPr>
-        <p:txBody>
-          <a:bodyPr wrap="square" lIns="0" tIns="0" rIns="0" bIns="0" rtlCol="0" anchor="ctr"/>
-          <a:lstStyle/>
-          <a:p>
-            <a:pPr algn="ctr" indent="0" marL="0">
-              <a:buNone/>
-            </a:pPr>
-            <a:r>
-              <a:rPr lang="en-US" sz="1600" b="1" dirty="0">
-                <a:solidFill>
-                  <a:srgbClr val="0D9488"/>
+          <p:cNvPr id="33" name="Shape 31"/>
+          <p:cNvSpPr/>
+          <p:nvPr/>
+        </p:nvSpPr>
+        <p:spPr>
+          <a:xfrm>
+            <a:off x="365760" y="4096512"/>
+            <a:ext cx="1371600" cy="804672"/>
+          </a:xfrm>
+          <a:prstGeom prst="rect">
+            <a:avLst>
+              <a:gd name="adj" fmla="val 6818"/>
+            </a:avLst>
+          </a:prstGeom>
+          <a:solidFill>
+            <a:srgbClr val="E2E8F0"/>
+          </a:solidFill>
+          <a:ln w="12700">
+            <a:solidFill>
+              <a:srgbClr val="E2E8F0"/>
+            </a:solidFill>
+            <a:prstDash val="solid"/>
+          </a:ln>
+        </p:spPr>
+      </p:sp>
+      <p:sp>
+        <p:nvSpPr>
+          <p:cNvPr id="34" name="Text 32"/>
+          <p:cNvSpPr/>
+          <p:nvPr/>
+        </p:nvSpPr>
+        <p:spPr>
+          <a:xfrm>
+            <a:off x="365760" y="4096512"/>
+            <a:ext cx="1371600" cy="804672"/>
+          </a:xfrm>
+          <a:prstGeom prst="rect">
+            <a:avLst/>
+          </a:prstGeom>
+          <a:noFill/>
+          <a:ln/>
+        </p:spPr>
+        <p:txBody>
+          <a:bodyPr wrap="square" lIns="0" tIns="0" rIns="0" bIns="0" rtlCol="0" anchor="ctr"/>
+          <a:lstStyle/>
+          <a:p>
+            <a:pPr algn="ctr" indent="0" marL="0">
+              <a:buNone/>
+            </a:pPr>
+            <a:r>
+              <a:rPr lang="en-US" sz="1100" b="1" dirty="0">
+                <a:solidFill>
+                  <a:srgbClr val="475569"/>
                 </a:solidFill>
                 <a:latin typeface="Trebuchet MS" pitchFamily="34" charset="0"/>
                 <a:ea typeface="Trebuchet MS" pitchFamily="34" charset="-122"/>
                 <a:cs typeface="Trebuchet MS" pitchFamily="34" charset="-120"/>
               </a:rPr>
-              <a:t>·</a:t>
-            </a:r>
-            <a:endParaRPr lang="en-US" sz="1600" dirty="0"/>
-          </a:p>
-        </p:txBody>
-      </p:sp>
-      <p:sp>
-        <p:nvSpPr>
-          <p:cNvPr id="34" name="Shape 32"/>
-          <p:cNvSpPr/>
-          <p:nvPr/>
-        </p:nvSpPr>
-        <p:spPr>
-          <a:xfrm>
-            <a:off x="6858000" y="3364992"/>
-            <a:ext cx="1554480" cy="475488"/>
+              <a:t>Phonemes</a:t>
+            </a:r>
+            <a:endParaRPr lang="en-US" sz="1100" dirty="0"/>
+          </a:p>
+        </p:txBody>
+      </p:sp>
+      <p:sp>
+        <p:nvSpPr>
+          <p:cNvPr id="35" name="Shape 33"/>
+          <p:cNvSpPr/>
+          <p:nvPr/>
+        </p:nvSpPr>
+        <p:spPr>
+          <a:xfrm>
+            <a:off x="1874520" y="4096512"/>
+            <a:ext cx="6903720" cy="658368"/>
           </a:xfrm>
           <a:prstGeom prst="rect">
             <a:avLst>
-              <a:gd name="adj" fmla="val 9615"/>
+              <a:gd name="adj" fmla="val 8333"/>
             </a:avLst>
           </a:prstGeom>
           <a:solidFill>
+            <a:srgbClr val="FCE7F3"/>
+          </a:solidFill>
+          <a:ln w="12700">
+            <a:solidFill>
+              <a:srgbClr val="DB2777"/>
+            </a:solidFill>
+            <a:prstDash val="solid"/>
+          </a:ln>
+        </p:spPr>
+      </p:sp>
+      <p:sp>
+        <p:nvSpPr>
+          <p:cNvPr id="36" name="Shape 34"/>
+          <p:cNvSpPr/>
+          <p:nvPr/>
+        </p:nvSpPr>
+        <p:spPr>
+          <a:xfrm>
+            <a:off x="2124837" y="4169664"/>
+            <a:ext cx="685800" cy="475488"/>
+          </a:xfrm>
+          <a:prstGeom prst="rect">
+            <a:avLst>
+              <a:gd name="adj" fmla="val 7692"/>
+            </a:avLst>
+          </a:prstGeom>
+          <a:solidFill>
             <a:srgbClr val="FFFFFF"/>
           </a:solidFill>
           <a:ln w="12700">
             <a:solidFill>
-              <a:srgbClr val="0D9488"/>
-            </a:solidFill>
-            <a:prstDash val="solid"/>
-          </a:ln>
-        </p:spPr>
-      </p:sp>
-      <p:sp>
-        <p:nvSpPr>
-          <p:cNvPr id="35" name="Text 33"/>
-          <p:cNvSpPr/>
-          <p:nvPr/>
-        </p:nvSpPr>
-        <p:spPr>
-          <a:xfrm>
-            <a:off x="6858000" y="3364992"/>
-            <a:ext cx="1554480" cy="475488"/>
-          </a:xfrm>
-          <a:prstGeom prst="rect">
-            <a:avLst/>
-          </a:prstGeom>
-          <a:noFill/>
-          <a:ln/>
-        </p:spPr>
-        <p:txBody>
-          <a:bodyPr wrap="square" lIns="0" tIns="0" rIns="0" bIns="0" rtlCol="0" anchor="ctr"/>
-          <a:lstStyle/>
-          <a:p>
-            <a:pPr algn="ctr" indent="0" marL="0">
-              <a:buNone/>
-            </a:pPr>
-            <a:r>
-              <a:rPr lang="en-US" sz="1400" b="1" dirty="0">
-                <a:solidFill>
-                  <a:srgbClr val="0D9488"/>
+              <a:srgbClr val="DB2777"/>
+            </a:solidFill>
+            <a:prstDash val="solid"/>
+          </a:ln>
+        </p:spPr>
+      </p:sp>
+      <p:sp>
+        <p:nvSpPr>
+          <p:cNvPr id="37" name="Text 35"/>
+          <p:cNvSpPr/>
+          <p:nvPr/>
+        </p:nvSpPr>
+        <p:spPr>
+          <a:xfrm>
+            <a:off x="2124837" y="4169664"/>
+            <a:ext cx="685800" cy="475488"/>
+          </a:xfrm>
+          <a:prstGeom prst="rect">
+            <a:avLst/>
+          </a:prstGeom>
+          <a:noFill/>
+          <a:ln/>
+        </p:spPr>
+        <p:txBody>
+          <a:bodyPr wrap="square" lIns="0" tIns="0" rIns="0" bIns="0" rtlCol="0" anchor="ctr"/>
+          <a:lstStyle/>
+          <a:p>
+            <a:pPr algn="ctr" indent="0" marL="0">
+              <a:buNone/>
+            </a:pPr>
+            <a:r>
+              <a:rPr lang="en-US" sz="900" b="1" dirty="0">
+                <a:solidFill>
+                  <a:srgbClr val="9D174D"/>
                 </a:solidFill>
                 <a:latin typeface="Trebuchet MS" pitchFamily="34" charset="0"/>
                 <a:ea typeface="Trebuchet MS" pitchFamily="34" charset="-122"/>
                 <a:cs typeface="Trebuchet MS" pitchFamily="34" charset="-120"/>
               </a:rPr>
-              <a:t>ue</a:t>
-            </a:r>
-            <a:endParaRPr lang="en-US" sz="1400" dirty="0"/>
-          </a:p>
-        </p:txBody>
-      </p:sp>
-      <p:sp>
-        <p:nvSpPr>
-          <p:cNvPr id="36" name="Shape 34"/>
-          <p:cNvSpPr/>
-          <p:nvPr/>
-        </p:nvSpPr>
-        <p:spPr>
-          <a:xfrm>
-            <a:off x="365760" y="4096512"/>
-            <a:ext cx="1371600" cy="804672"/>
+              <a:t>v</a:t>
+            </a:r>
+            <a:endParaRPr lang="en-US" sz="900" dirty="0"/>
+          </a:p>
+        </p:txBody>
+      </p:sp>
+      <p:sp>
+        <p:nvSpPr>
+          <p:cNvPr id="38" name="Shape 36"/>
+          <p:cNvSpPr/>
+          <p:nvPr/>
+        </p:nvSpPr>
+        <p:spPr>
+          <a:xfrm>
+            <a:off x="3033522" y="4169664"/>
+            <a:ext cx="685800" cy="475488"/>
           </a:xfrm>
           <a:prstGeom prst="rect">
             <a:avLst>
-              <a:gd name="adj" fmla="val 6818"/>
+              <a:gd name="adj" fmla="val 7692"/>
             </a:avLst>
           </a:prstGeom>
           <a:solidFill>
-            <a:srgbClr val="E2E8F0"/>
-          </a:solidFill>
-          <a:ln w="12700">
-            <a:solidFill>
-              <a:srgbClr val="E2E8F0"/>
-            </a:solidFill>
-            <a:prstDash val="solid"/>
-          </a:ln>
-        </p:spPr>
-      </p:sp>
-      <p:sp>
-        <p:nvSpPr>
-          <p:cNvPr id="37" name="Text 35"/>
-          <p:cNvSpPr/>
-          <p:nvPr/>
-        </p:nvSpPr>
-        <p:spPr>
-          <a:xfrm>
-            <a:off x="365760" y="4096512"/>
-            <a:ext cx="1371600" cy="804672"/>
-          </a:xfrm>
-          <a:prstGeom prst="rect">
-            <a:avLst/>
-          </a:prstGeom>
-          <a:noFill/>
-          <a:ln/>
-        </p:spPr>
-        <p:txBody>
-          <a:bodyPr wrap="square" lIns="0" tIns="0" rIns="0" bIns="0" rtlCol="0" anchor="ctr"/>
-          <a:lstStyle/>
-          <a:p>
-            <a:pPr algn="ctr" indent="0" marL="0">
-              <a:buNone/>
-            </a:pPr>
-            <a:r>
-              <a:rPr lang="en-US" sz="1100" b="1" dirty="0">
-                <a:solidFill>
-                  <a:srgbClr val="475569"/>
+            <a:srgbClr val="FFFFFF"/>
+          </a:solidFill>
+          <a:ln w="12700">
+            <a:solidFill>
+              <a:srgbClr val="DB2777"/>
+            </a:solidFill>
+            <a:prstDash val="solid"/>
+          </a:ln>
+        </p:spPr>
+      </p:sp>
+      <p:sp>
+        <p:nvSpPr>
+          <p:cNvPr id="39" name="Text 37"/>
+          <p:cNvSpPr/>
+          <p:nvPr/>
+        </p:nvSpPr>
+        <p:spPr>
+          <a:xfrm>
+            <a:off x="3033522" y="4169664"/>
+            <a:ext cx="685800" cy="475488"/>
+          </a:xfrm>
+          <a:prstGeom prst="rect">
+            <a:avLst/>
+          </a:prstGeom>
+          <a:noFill/>
+          <a:ln/>
+        </p:spPr>
+        <p:txBody>
+          <a:bodyPr wrap="square" lIns="0" tIns="0" rIns="0" bIns="0" rtlCol="0" anchor="ctr"/>
+          <a:lstStyle/>
+          <a:p>
+            <a:pPr algn="ctr" indent="0" marL="0">
+              <a:buNone/>
+            </a:pPr>
+            <a:r>
+              <a:rPr lang="en-US" sz="900" b="1" dirty="0">
+                <a:solidFill>
+                  <a:srgbClr val="9D174D"/>
                 </a:solidFill>
                 <a:latin typeface="Trebuchet MS" pitchFamily="34" charset="0"/>
                 <a:ea typeface="Trebuchet MS" pitchFamily="34" charset="-122"/>
                 <a:cs typeface="Trebuchet MS" pitchFamily="34" charset="-120"/>
               </a:rPr>
-              <a:t>Phonemes</a:t>
-            </a:r>
-            <a:endParaRPr lang="en-US" sz="1100" dirty="0"/>
-          </a:p>
-        </p:txBody>
-      </p:sp>
-      <p:sp>
-        <p:nvSpPr>
-          <p:cNvPr id="38" name="Shape 36"/>
-          <p:cNvSpPr/>
-          <p:nvPr/>
-        </p:nvSpPr>
-        <p:spPr>
-          <a:xfrm>
-            <a:off x="1874520" y="4096512"/>
-            <a:ext cx="6903720" cy="658368"/>
-          </a:xfrm>
-          <a:prstGeom prst="rect">
-            <a:avLst>
-              <a:gd name="adj" fmla="val 8333"/>
-            </a:avLst>
-          </a:prstGeom>
-          <a:solidFill>
-            <a:srgbClr val="FCE7F3"/>
-          </a:solidFill>
-          <a:ln w="12700">
-            <a:solidFill>
-              <a:srgbClr val="DB2777"/>
-            </a:solidFill>
-            <a:prstDash val="solid"/>
-          </a:ln>
-        </p:spPr>
-      </p:sp>
-      <p:sp>
-        <p:nvSpPr>
-          <p:cNvPr id="39" name="Shape 37"/>
-          <p:cNvSpPr/>
-          <p:nvPr/>
-        </p:nvSpPr>
-        <p:spPr>
-          <a:xfrm>
-            <a:off x="1951330" y="4169664"/>
-            <a:ext cx="676656" cy="475488"/>
+              <a:t>al</a:t>
+            </a:r>
+            <a:endParaRPr lang="en-US" sz="900" dirty="0"/>
+          </a:p>
+        </p:txBody>
+      </p:sp>
+      <p:sp>
+        <p:nvSpPr>
+          <p:cNvPr id="40" name="Shape 38"/>
+          <p:cNvSpPr/>
+          <p:nvPr/>
+        </p:nvSpPr>
+        <p:spPr>
+          <a:xfrm>
+            <a:off x="3942207" y="4169664"/>
+            <a:ext cx="685800" cy="475488"/>
           </a:xfrm>
           <a:prstGeom prst="rect">
             <a:avLst>
@@ -16106,14 +16013,14 @@
       </p:sp>
       <p:sp>
         <p:nvSpPr>
-          <p:cNvPr id="40" name="Text 38"/>
-          <p:cNvSpPr/>
-          <p:nvPr/>
-        </p:nvSpPr>
-        <p:spPr>
-          <a:xfrm>
-            <a:off x="1951330" y="4169664"/>
-            <a:ext cx="676656" cy="475488"/>
+          <p:cNvPr id="41" name="Text 39"/>
+          <p:cNvSpPr/>
+          <p:nvPr/>
+        </p:nvSpPr>
+        <p:spPr>
+          <a:xfrm>
+            <a:off x="3942207" y="4169664"/>
+            <a:ext cx="685800" cy="475488"/>
           </a:xfrm>
           <a:prstGeom prst="rect">
             <a:avLst/>
@@ -16145,14 +16052,14 @@
       </p:sp>
       <p:sp>
         <p:nvSpPr>
-          <p:cNvPr id="41" name="Shape 39"/>
-          <p:cNvSpPr/>
-          <p:nvPr/>
-        </p:nvSpPr>
-        <p:spPr>
-          <a:xfrm>
-            <a:off x="2677363" y="4169664"/>
-            <a:ext cx="676656" cy="475488"/>
+          <p:cNvPr id="42" name="Shape 40"/>
+          <p:cNvSpPr/>
+          <p:nvPr/>
+        </p:nvSpPr>
+        <p:spPr>
+          <a:xfrm>
+            <a:off x="4850892" y="4169664"/>
+            <a:ext cx="685800" cy="475488"/>
           </a:xfrm>
           <a:prstGeom prst="rect">
             <a:avLst>
@@ -16172,14 +16079,14 @@
       </p:sp>
       <p:sp>
         <p:nvSpPr>
-          <p:cNvPr id="42" name="Text 40"/>
-          <p:cNvSpPr/>
-          <p:nvPr/>
-        </p:nvSpPr>
-        <p:spPr>
-          <a:xfrm>
-            <a:off x="2677363" y="4169664"/>
-            <a:ext cx="676656" cy="475488"/>
+          <p:cNvPr id="43" name="Text 41"/>
+          <p:cNvSpPr/>
+          <p:nvPr/>
+        </p:nvSpPr>
+        <p:spPr>
+          <a:xfrm>
+            <a:off x="4850892" y="4169664"/>
+            <a:ext cx="685800" cy="475488"/>
           </a:xfrm>
           <a:prstGeom prst="rect">
             <a:avLst/>
@@ -16203,7 +16110,7 @@
                 <a:ea typeface="Trebuchet MS" pitchFamily="34" charset="-122"/>
                 <a:cs typeface="Trebuchet MS" pitchFamily="34" charset="-120"/>
               </a:rPr>
-              <a:t>n</a:t>
+              <a:t>e</a:t>
             </a:r>
             <a:endParaRPr lang="en-US" sz="900" dirty="0"/>
           </a:p>
@@ -16211,14 +16118,14 @@
       </p:sp>
       <p:sp>
         <p:nvSpPr>
-          <p:cNvPr id="43" name="Shape 41"/>
-          <p:cNvSpPr/>
-          <p:nvPr/>
-        </p:nvSpPr>
-        <p:spPr>
-          <a:xfrm>
-            <a:off x="3403397" y="4169664"/>
-            <a:ext cx="676656" cy="475488"/>
+          <p:cNvPr id="44" name="Shape 42"/>
+          <p:cNvSpPr/>
+          <p:nvPr/>
+        </p:nvSpPr>
+        <p:spPr>
+          <a:xfrm>
+            <a:off x="5759577" y="4169664"/>
+            <a:ext cx="685800" cy="475488"/>
           </a:xfrm>
           <a:prstGeom prst="rect">
             <a:avLst>
@@ -16238,14 +16145,14 @@
       </p:sp>
       <p:sp>
         <p:nvSpPr>
-          <p:cNvPr id="44" name="Text 42"/>
-          <p:cNvSpPr/>
-          <p:nvPr/>
-        </p:nvSpPr>
-        <p:spPr>
-          <a:xfrm>
-            <a:off x="3403397" y="4169664"/>
-            <a:ext cx="676656" cy="475488"/>
+          <p:cNvPr id="45" name="Text 43"/>
+          <p:cNvSpPr/>
+          <p:nvPr/>
+        </p:nvSpPr>
+        <p:spPr>
+          <a:xfrm>
+            <a:off x="5759577" y="4169664"/>
+            <a:ext cx="685800" cy="475488"/>
           </a:xfrm>
           <a:prstGeom prst="rect">
             <a:avLst/>
@@ -16269,7 +16176,7 @@
                 <a:ea typeface="Trebuchet MS" pitchFamily="34" charset="-122"/>
                 <a:cs typeface="Trebuchet MS" pitchFamily="34" charset="-120"/>
               </a:rPr>
-              <a:t>d</a:t>
+              <a:t>l</a:t>
             </a:r>
             <a:endParaRPr lang="en-US" sz="900" dirty="0"/>
           </a:p>
@@ -16277,14 +16184,14 @@
       </p:sp>
       <p:sp>
         <p:nvSpPr>
-          <p:cNvPr id="45" name="Shape 43"/>
-          <p:cNvSpPr/>
-          <p:nvPr/>
-        </p:nvSpPr>
-        <p:spPr>
-          <a:xfrm>
-            <a:off x="4129430" y="4169664"/>
-            <a:ext cx="676656" cy="475488"/>
+          <p:cNvPr id="46" name="Shape 44"/>
+          <p:cNvSpPr/>
+          <p:nvPr/>
+        </p:nvSpPr>
+        <p:spPr>
+          <a:xfrm>
+            <a:off x="6668262" y="4169664"/>
+            <a:ext cx="685800" cy="475488"/>
           </a:xfrm>
           <a:prstGeom prst="rect">
             <a:avLst>
@@ -16304,14 +16211,14 @@
       </p:sp>
       <p:sp>
         <p:nvSpPr>
-          <p:cNvPr id="46" name="Text 44"/>
-          <p:cNvSpPr/>
-          <p:nvPr/>
-        </p:nvSpPr>
-        <p:spPr>
-          <a:xfrm>
-            <a:off x="4129430" y="4169664"/>
-            <a:ext cx="676656" cy="475488"/>
+          <p:cNvPr id="47" name="Text 45"/>
+          <p:cNvSpPr/>
+          <p:nvPr/>
+        </p:nvSpPr>
+        <p:spPr>
+          <a:xfrm>
+            <a:off x="6668262" y="4169664"/>
+            <a:ext cx="685800" cy="475488"/>
           </a:xfrm>
           <a:prstGeom prst="rect">
             <a:avLst/>
@@ -16335,7 +16242,7 @@
                 <a:ea typeface="Trebuchet MS" pitchFamily="34" charset="-122"/>
                 <a:cs typeface="Trebuchet MS" pitchFamily="34" charset="-120"/>
               </a:rPr>
-              <a:t>er</a:t>
+              <a:t>e</a:t>
             </a:r>
             <a:endParaRPr lang="en-US" sz="900" dirty="0"/>
           </a:p>
@@ -16343,14 +16250,14 @@
       </p:sp>
       <p:sp>
         <p:nvSpPr>
-          <p:cNvPr id="47" name="Shape 45"/>
-          <p:cNvSpPr/>
-          <p:nvPr/>
-        </p:nvSpPr>
-        <p:spPr>
-          <a:xfrm>
-            <a:off x="4855464" y="4169664"/>
-            <a:ext cx="676656" cy="475488"/>
+          <p:cNvPr id="48" name="Shape 46"/>
+          <p:cNvSpPr/>
+          <p:nvPr/>
+        </p:nvSpPr>
+        <p:spPr>
+          <a:xfrm>
+            <a:off x="7576947" y="4169664"/>
+            <a:ext cx="685800" cy="475488"/>
           </a:xfrm>
           <a:prstGeom prst="rect">
             <a:avLst>
@@ -16370,14 +16277,14 @@
       </p:sp>
       <p:sp>
         <p:nvSpPr>
-          <p:cNvPr id="48" name="Text 46"/>
-          <p:cNvSpPr/>
-          <p:nvPr/>
-        </p:nvSpPr>
-        <p:spPr>
-          <a:xfrm>
-            <a:off x="4855464" y="4169664"/>
-            <a:ext cx="676656" cy="475488"/>
+          <p:cNvPr id="49" name="Text 47"/>
+          <p:cNvSpPr/>
+          <p:nvPr/>
+        </p:nvSpPr>
+        <p:spPr>
+          <a:xfrm>
+            <a:off x="7576947" y="4169664"/>
+            <a:ext cx="685800" cy="475488"/>
           </a:xfrm>
           <a:prstGeom prst="rect">
             <a:avLst/>
@@ -16401,271 +16308,7 @@
                 <a:ea typeface="Trebuchet MS" pitchFamily="34" charset="-122"/>
                 <a:cs typeface="Trebuchet MS" pitchFamily="34" charset="-120"/>
               </a:rPr>
-              <a:t>v</a:t>
-            </a:r>
-            <a:endParaRPr lang="en-US" sz="900" dirty="0"/>
-          </a:p>
-        </p:txBody>
-      </p:sp>
-      <p:sp>
-        <p:nvSpPr>
-          <p:cNvPr id="49" name="Shape 47"/>
-          <p:cNvSpPr/>
-          <p:nvPr/>
-        </p:nvSpPr>
-        <p:spPr>
-          <a:xfrm>
-            <a:off x="5581498" y="4169664"/>
-            <a:ext cx="676656" cy="475488"/>
-          </a:xfrm>
-          <a:prstGeom prst="rect">
-            <a:avLst>
-              <a:gd name="adj" fmla="val 7692"/>
-            </a:avLst>
-          </a:prstGeom>
-          <a:solidFill>
-            <a:srgbClr val="FFFFFF"/>
-          </a:solidFill>
-          <a:ln w="12700">
-            <a:solidFill>
-              <a:srgbClr val="DB2777"/>
-            </a:solidFill>
-            <a:prstDash val="solid"/>
-          </a:ln>
-        </p:spPr>
-      </p:sp>
-      <p:sp>
-        <p:nvSpPr>
-          <p:cNvPr id="50" name="Text 48"/>
-          <p:cNvSpPr/>
-          <p:nvPr/>
-        </p:nvSpPr>
-        <p:spPr>
-          <a:xfrm>
-            <a:off x="5581498" y="4169664"/>
-            <a:ext cx="676656" cy="475488"/>
-          </a:xfrm>
-          <a:prstGeom prst="rect">
-            <a:avLst/>
-          </a:prstGeom>
-          <a:noFill/>
-          <a:ln/>
-        </p:spPr>
-        <p:txBody>
-          <a:bodyPr wrap="square" lIns="0" tIns="0" rIns="0" bIns="0" rtlCol="0" anchor="ctr"/>
-          <a:lstStyle/>
-          <a:p>
-            <a:pPr algn="ctr" indent="0" marL="0">
-              <a:buNone/>
-            </a:pPr>
-            <a:r>
-              <a:rPr lang="en-US" sz="900" b="1" dirty="0">
-                <a:solidFill>
-                  <a:srgbClr val="9D174D"/>
-                </a:solidFill>
-                <a:latin typeface="Trebuchet MS" pitchFamily="34" charset="0"/>
-                <a:ea typeface="Trebuchet MS" pitchFamily="34" charset="-122"/>
-                <a:cs typeface="Trebuchet MS" pitchFamily="34" charset="-120"/>
-              </a:rPr>
-              <a:t>a</a:t>
-            </a:r>
-            <a:endParaRPr lang="en-US" sz="900" dirty="0"/>
-          </a:p>
-        </p:txBody>
-      </p:sp>
-      <p:sp>
-        <p:nvSpPr>
-          <p:cNvPr id="51" name="Shape 49"/>
-          <p:cNvSpPr/>
-          <p:nvPr/>
-        </p:nvSpPr>
-        <p:spPr>
-          <a:xfrm>
-            <a:off x="6307531" y="4169664"/>
-            <a:ext cx="676656" cy="475488"/>
-          </a:xfrm>
-          <a:prstGeom prst="rect">
-            <a:avLst>
-              <a:gd name="adj" fmla="val 7692"/>
-            </a:avLst>
-          </a:prstGeom>
-          <a:solidFill>
-            <a:srgbClr val="FFFFFF"/>
-          </a:solidFill>
-          <a:ln w="12700">
-            <a:solidFill>
-              <a:srgbClr val="DB2777"/>
-            </a:solidFill>
-            <a:prstDash val="solid"/>
-          </a:ln>
-        </p:spPr>
-      </p:sp>
-      <p:sp>
-        <p:nvSpPr>
-          <p:cNvPr id="52" name="Text 50"/>
-          <p:cNvSpPr/>
-          <p:nvPr/>
-        </p:nvSpPr>
-        <p:spPr>
-          <a:xfrm>
-            <a:off x="6307531" y="4169664"/>
-            <a:ext cx="676656" cy="475488"/>
-          </a:xfrm>
-          <a:prstGeom prst="rect">
-            <a:avLst/>
-          </a:prstGeom>
-          <a:noFill/>
-          <a:ln/>
-        </p:spPr>
-        <p:txBody>
-          <a:bodyPr wrap="square" lIns="0" tIns="0" rIns="0" bIns="0" rtlCol="0" anchor="ctr"/>
-          <a:lstStyle/>
-          <a:p>
-            <a:pPr algn="ctr" indent="0" marL="0">
-              <a:buNone/>
-            </a:pPr>
-            <a:r>
-              <a:rPr lang="en-US" sz="900" b="1" dirty="0">
-                <a:solidFill>
-                  <a:srgbClr val="9D174D"/>
-                </a:solidFill>
-                <a:latin typeface="Trebuchet MS" pitchFamily="34" charset="0"/>
-                <a:ea typeface="Trebuchet MS" pitchFamily="34" charset="-122"/>
-                <a:cs typeface="Trebuchet MS" pitchFamily="34" charset="-120"/>
-              </a:rPr>
-              <a:t>l</a:t>
-            </a:r>
-            <a:endParaRPr lang="en-US" sz="900" dirty="0"/>
-          </a:p>
-        </p:txBody>
-      </p:sp>
-      <p:sp>
-        <p:nvSpPr>
-          <p:cNvPr id="53" name="Shape 51"/>
-          <p:cNvSpPr/>
-          <p:nvPr/>
-        </p:nvSpPr>
-        <p:spPr>
-          <a:xfrm>
-            <a:off x="7033565" y="4169664"/>
-            <a:ext cx="676656" cy="475488"/>
-          </a:xfrm>
-          <a:prstGeom prst="rect">
-            <a:avLst>
-              <a:gd name="adj" fmla="val 7692"/>
-            </a:avLst>
-          </a:prstGeom>
-          <a:solidFill>
-            <a:srgbClr val="FFFFFF"/>
-          </a:solidFill>
-          <a:ln w="12700">
-            <a:solidFill>
-              <a:srgbClr val="DB2777"/>
-            </a:solidFill>
-            <a:prstDash val="solid"/>
-          </a:ln>
-        </p:spPr>
-      </p:sp>
-      <p:sp>
-        <p:nvSpPr>
-          <p:cNvPr id="54" name="Text 52"/>
-          <p:cNvSpPr/>
-          <p:nvPr/>
-        </p:nvSpPr>
-        <p:spPr>
-          <a:xfrm>
-            <a:off x="7033565" y="4169664"/>
-            <a:ext cx="676656" cy="475488"/>
-          </a:xfrm>
-          <a:prstGeom prst="rect">
-            <a:avLst/>
-          </a:prstGeom>
-          <a:noFill/>
-          <a:ln/>
-        </p:spPr>
-        <p:txBody>
-          <a:bodyPr wrap="square" lIns="0" tIns="0" rIns="0" bIns="0" rtlCol="0" anchor="ctr"/>
-          <a:lstStyle/>
-          <a:p>
-            <a:pPr algn="ctr" indent="0" marL="0">
-              <a:buNone/>
-            </a:pPr>
-            <a:r>
-              <a:rPr lang="en-US" sz="900" b="1" dirty="0">
-                <a:solidFill>
-                  <a:srgbClr val="9D174D"/>
-                </a:solidFill>
-                <a:latin typeface="Trebuchet MS" pitchFamily="34" charset="0"/>
-                <a:ea typeface="Trebuchet MS" pitchFamily="34" charset="-122"/>
-                <a:cs typeface="Trebuchet MS" pitchFamily="34" charset="-120"/>
-              </a:rPr>
-              <a:t>u</a:t>
-            </a:r>
-            <a:endParaRPr lang="en-US" sz="900" dirty="0"/>
-          </a:p>
-        </p:txBody>
-      </p:sp>
-      <p:sp>
-        <p:nvSpPr>
-          <p:cNvPr id="55" name="Shape 53"/>
-          <p:cNvSpPr/>
-          <p:nvPr/>
-        </p:nvSpPr>
-        <p:spPr>
-          <a:xfrm>
-            <a:off x="7759598" y="4169664"/>
-            <a:ext cx="676656" cy="475488"/>
-          </a:xfrm>
-          <a:prstGeom prst="rect">
-            <a:avLst>
-              <a:gd name="adj" fmla="val 7692"/>
-            </a:avLst>
-          </a:prstGeom>
-          <a:solidFill>
-            <a:srgbClr val="FFFFFF"/>
-          </a:solidFill>
-          <a:ln w="12700">
-            <a:solidFill>
-              <a:srgbClr val="DB2777"/>
-            </a:solidFill>
-            <a:prstDash val="solid"/>
-          </a:ln>
-        </p:spPr>
-      </p:sp>
-      <p:sp>
-        <p:nvSpPr>
-          <p:cNvPr id="56" name="Text 54"/>
-          <p:cNvSpPr/>
-          <p:nvPr/>
-        </p:nvSpPr>
-        <p:spPr>
-          <a:xfrm>
-            <a:off x="7759598" y="4169664"/>
-            <a:ext cx="676656" cy="475488"/>
-          </a:xfrm>
-          <a:prstGeom prst="rect">
-            <a:avLst/>
-          </a:prstGeom>
-          <a:noFill/>
-          <a:ln/>
-        </p:spPr>
-        <p:txBody>
-          <a:bodyPr wrap="square" lIns="0" tIns="0" rIns="0" bIns="0" rtlCol="0" anchor="ctr"/>
-          <a:lstStyle/>
-          <a:p>
-            <a:pPr algn="ctr" indent="0" marL="0">
-              <a:buNone/>
-            </a:pPr>
-            <a:r>
-              <a:rPr lang="en-US" sz="900" b="1" dirty="0">
-                <a:solidFill>
-                  <a:srgbClr val="9D174D"/>
-                </a:solidFill>
-                <a:latin typeface="Trebuchet MS" pitchFamily="34" charset="0"/>
-                <a:ea typeface="Trebuchet MS" pitchFamily="34" charset="-122"/>
-                <a:cs typeface="Trebuchet MS" pitchFamily="34" charset="-120"/>
-              </a:rPr>
-              <a:t>e</a:t>
+              <a:t>ss</a:t>
             </a:r>
             <a:endParaRPr lang="en-US" sz="900" dirty="0"/>
           </a:p>
@@ -17239,7 +16882,7 @@
                 <a:ea typeface="Calibri" pitchFamily="34" charset="-122"/>
                 <a:cs typeface="Calibri" pitchFamily="34" charset="-120"/>
               </a:rPr>
-              <a:t>Word Labs  •  wordlabs.app  •  Root: 'value' = worth, importance, or price</a:t>
+              <a:t>Word Labs  •  wordlabs.app  •  Root: 'value' = worth, importance, price</a:t>
             </a:r>
             <a:endParaRPr lang="en-US" sz="800" dirty="0"/>
           </a:p>
@@ -17573,7 +17216,7 @@
                 <a:ea typeface="Trebuchet MS" pitchFamily="34" charset="-122"/>
                 <a:cs typeface="Trebuchet MS" pitchFamily="34" charset="-120"/>
               </a:rPr>
-              <a:t>2</a:t>
+              <a:t>1</a:t>
             </a:r>
             <a:pPr algn="ctr" indent="0" marL="0">
               <a:buNone/>
@@ -17587,7 +17230,7 @@
                 <a:ea typeface="Trebuchet MS" pitchFamily="34" charset="-122"/>
                 <a:cs typeface="Trebuchet MS" pitchFamily="34" charset="-120"/>
               </a:rPr>
-              <a:t>  punctuation marks</a:t>
+              <a:t>  punctuation mark</a:t>
             </a:r>
             <a:endParaRPr lang="en-US" sz="2800" dirty="0"/>
           </a:p>
@@ -17879,7 +17522,7 @@
                 <a:ea typeface="Calibri" pitchFamily="34" charset="-122"/>
                 <a:cs typeface="Calibri" pitchFamily="34" charset="-120"/>
               </a:rPr>
-              <a:t>Word Labs  •  wordlabs.app  •  Root: 'value' = worth, importance, or price</a:t>
+              <a:t>Word Labs  •  wordlabs.app  •  Root: 'value' = worth, importance, price</a:t>
             </a:r>
             <a:endParaRPr lang="en-US" sz="800" dirty="0"/>
           </a:p>
@@ -17991,7 +17634,7 @@
                 <a:ea typeface="Calibri" pitchFamily="34" charset="-122"/>
                 <a:cs typeface="Calibri" pitchFamily="34" charset="-120"/>
               </a:rPr>
-              <a:t>The committee had to </a:t>
+              <a:t>After the </a:t>
             </a:r>
             <a:pPr algn="l" indent="0" marL="0">
               <a:buNone/>
@@ -18008,7 +17651,7 @@
                 <a:ea typeface="Calibri" pitchFamily="34" charset="-122"/>
                 <a:cs typeface="Calibri" pitchFamily="34" charset="-120"/>
               </a:rPr>
-              <a:t>revalue</a:t>
+              <a:t>valuation</a:t>
             </a:r>
             <a:pPr algn="l" indent="0" marL="0">
               <a:buNone/>
@@ -18022,7 +17665,7 @@
                 <a:ea typeface="Calibri" pitchFamily="34" charset="-122"/>
                 <a:cs typeface="Calibri" pitchFamily="34" charset="-120"/>
               </a:rPr>
-              <a:t> the painting after discovering it was previously </a:t>
+              <a:t>, we discovered the painting was </a:t>
             </a:r>
             <a:pPr algn="l" indent="0" marL="0">
               <a:buNone/>
@@ -18053,7 +17696,7 @@
                 <a:ea typeface="Calibri" pitchFamily="34" charset="-122"/>
                 <a:cs typeface="Calibri" pitchFamily="34" charset="-120"/>
               </a:rPr>
-              <a:t>, making it one of their most </a:t>
+              <a:t>, so the gallery decided to </a:t>
             </a:r>
             <a:pPr algn="l" indent="0" marL="0">
               <a:buNone/>
@@ -18070,7 +17713,7 @@
                 <a:ea typeface="Calibri" pitchFamily="34" charset="-122"/>
                 <a:cs typeface="Calibri" pitchFamily="34" charset="-120"/>
               </a:rPr>
-              <a:t>valued</a:t>
+              <a:t>revalue</a:t>
             </a:r>
             <a:pPr algn="l" indent="0" marL="0">
               <a:buNone/>
@@ -18084,7 +17727,7 @@
                 <a:ea typeface="Calibri" pitchFamily="34" charset="-122"/>
                 <a:cs typeface="Calibri" pitchFamily="34" charset="-120"/>
               </a:rPr>
-              <a:t> possessions.</a:t>
+              <a:t> all its artwork.</a:t>
             </a:r>
             <a:endParaRPr lang="en-US" sz="1800" dirty="0"/>
           </a:p>
@@ -18239,7 +17882,7 @@
                 <a:ea typeface="Trebuchet MS" pitchFamily="34" charset="-122"/>
                 <a:cs typeface="Trebuchet MS" pitchFamily="34" charset="-120"/>
               </a:rPr>
-              <a:t>revalue</a:t>
+              <a:t>valuation</a:t>
             </a:r>
             <a:endParaRPr lang="en-US" sz="1400" dirty="0"/>
           </a:p>
@@ -18495,7 +18138,7 @@
                 <a:ea typeface="Trebuchet MS" pitchFamily="34" charset="-122"/>
                 <a:cs typeface="Trebuchet MS" pitchFamily="34" charset="-120"/>
               </a:rPr>
-              <a:t>valued</a:t>
+              <a:t>revalue</a:t>
             </a:r>
             <a:endParaRPr lang="en-US" sz="1400" dirty="0"/>
           </a:p>
@@ -18826,7 +18469,7 @@
                 <a:ea typeface="Calibri" pitchFamily="34" charset="-122"/>
                 <a:cs typeface="Calibri" pitchFamily="34" charset="-120"/>
               </a:rPr>
-              <a:t>Word Labs  •  wordlabs.app  •  Root: 'value' = worth, importance, or price</a:t>
+              <a:t>Word Labs  •  wordlabs.app  •  Root: 'value' = worth, importance, price</a:t>
             </a:r>
             <a:endParaRPr lang="en-US" sz="800" dirty="0"/>
           </a:p>
@@ -18965,7 +18608,7 @@
                 <a:ea typeface="Trebuchet MS" pitchFamily="34" charset="-122"/>
                 <a:cs typeface="Trebuchet MS" pitchFamily="34" charset="-120"/>
               </a:rPr>
-              <a:t>revalue</a:t>
+              <a:t>valuation</a:t>
             </a:r>
             <a:endParaRPr lang="en-US" sz="2800" dirty="0"/>
           </a:p>
@@ -19653,7 +19296,7 @@
                 <a:ea typeface="Calibri" pitchFamily="34" charset="-122"/>
                 <a:cs typeface="Calibri" pitchFamily="34" charset="-120"/>
               </a:rPr>
-              <a:t>Word Labs  •  wordlabs.app  •  Root: 'value' = worth, importance, or price</a:t>
+              <a:t>Word Labs  •  wordlabs.app  •  Root: 'value' = worth, importance, price</a:t>
             </a:r>
             <a:endParaRPr lang="en-US" sz="800" dirty="0"/>
           </a:p>
@@ -19792,7 +19435,7 @@
                 <a:ea typeface="Trebuchet MS" pitchFamily="34" charset="-122"/>
                 <a:cs typeface="Trebuchet MS" pitchFamily="34" charset="-120"/>
               </a:rPr>
-              <a:t>revalue</a:t>
+              <a:t>valuation</a:t>
             </a:r>
             <a:endParaRPr lang="en-US" sz="2800" dirty="0"/>
           </a:p>
@@ -19881,11 +19524,11 @@
             </a:avLst>
           </a:prstGeom>
           <a:solidFill>
-            <a:srgbClr val="DDD6FE"/>
+            <a:srgbClr val="CCFBF1"/>
           </a:solidFill>
           <a:ln w="19050">
             <a:solidFill>
-              <a:srgbClr val="7C3AED"/>
+              <a:srgbClr val="0D9488"/>
             </a:solidFill>
             <a:prstDash val="solid"/>
           </a:ln>
@@ -19925,13 +19568,13 @@
             <a:r>
               <a:rPr lang="en-US" sz="1300" b="1" dirty="0">
                 <a:solidFill>
-                  <a:srgbClr val="4C1D95"/>
+                  <a:srgbClr val="0F766E"/>
                 </a:solidFill>
                 <a:latin typeface="Trebuchet MS" pitchFamily="34" charset="0"/>
                 <a:ea typeface="Trebuchet MS" pitchFamily="34" charset="-122"/>
                 <a:cs typeface="Trebuchet MS" pitchFamily="34" charset="-120"/>
               </a:rPr>
-              <a:t>re</a:t>
+              <a:t>value</a:t>
             </a:r>
             <a:endParaRPr lang="en-US" sz="1300" dirty="0"/>
           </a:p>
@@ -19970,7 +19613,7 @@
                 <a:ea typeface="Calibri" pitchFamily="34" charset="-122"/>
                 <a:cs typeface="Calibri" pitchFamily="34" charset="-120"/>
               </a:rPr>
-              <a:t>again</a:t>
+              <a:t>worth</a:t>
             </a:r>
             <a:endParaRPr lang="en-US" sz="850" dirty="0"/>
           </a:p>
@@ -19993,11 +19636,11 @@
             </a:avLst>
           </a:prstGeom>
           <a:solidFill>
-            <a:srgbClr val="CCFBF1"/>
+            <a:srgbClr val="FCE7F3"/>
           </a:solidFill>
           <a:ln w="19050">
             <a:solidFill>
-              <a:srgbClr val="0D9488"/>
+              <a:srgbClr val="DB2777"/>
             </a:solidFill>
             <a:prstDash val="solid"/>
           </a:ln>
@@ -20037,13 +19680,13 @@
             <a:r>
               <a:rPr lang="en-US" sz="1300" b="1" dirty="0">
                 <a:solidFill>
-                  <a:srgbClr val="0F766E"/>
+                  <a:srgbClr val="9D174D"/>
                 </a:solidFill>
                 <a:latin typeface="Trebuchet MS" pitchFamily="34" charset="0"/>
                 <a:ea typeface="Trebuchet MS" pitchFamily="34" charset="-122"/>
                 <a:cs typeface="Trebuchet MS" pitchFamily="34" charset="-120"/>
               </a:rPr>
-              <a:t>value</a:t>
+              <a:t>ation</a:t>
             </a:r>
             <a:endParaRPr lang="en-US" sz="1300" dirty="0"/>
           </a:p>
@@ -20082,7 +19725,7 @@
                 <a:ea typeface="Calibri" pitchFamily="34" charset="-122"/>
                 <a:cs typeface="Calibri" pitchFamily="34" charset="-120"/>
               </a:rPr>
-              <a:t>worth</a:t>
+              <a:t>process or result of</a:t>
             </a:r>
             <a:endParaRPr lang="en-US" sz="850" dirty="0"/>
           </a:p>
@@ -20090,7 +19733,46 @@
       </p:sp>
       <p:sp>
         <p:nvSpPr>
-          <p:cNvPr id="22" name="Shape 20"/>
+          <p:cNvPr id="22" name="Text 20"/>
+          <p:cNvSpPr/>
+          <p:nvPr/>
+        </p:nvSpPr>
+        <p:spPr>
+          <a:xfrm>
+            <a:off x="5803392" y="2752344"/>
+            <a:ext cx="1828800" cy="182880"/>
+          </a:xfrm>
+          <a:prstGeom prst="rect">
+            <a:avLst/>
+          </a:prstGeom>
+          <a:noFill/>
+          <a:ln/>
+        </p:spPr>
+        <p:txBody>
+          <a:bodyPr wrap="square" lIns="0" tIns="0" rIns="0" bIns="0" rtlCol="0" anchor="t"/>
+          <a:lstStyle/>
+          <a:p>
+            <a:pPr algn="ctr" indent="0" marL="0">
+              <a:buNone/>
+            </a:pPr>
+            <a:r>
+              <a:rPr lang="en-US" sz="700" i="1" dirty="0">
+                <a:solidFill>
+                  <a:srgbClr val="94A3B8"/>
+                </a:solidFill>
+                <a:latin typeface="Calibri" pitchFamily="34" charset="0"/>
+                <a:ea typeface="Calibri" pitchFamily="34" charset="-122"/>
+                <a:cs typeface="Calibri" pitchFamily="34" charset="-120"/>
+              </a:rPr>
+              <a:t>'e' dropped before vowel suffix</a:t>
+            </a:r>
+            <a:endParaRPr lang="en-US" sz="700" dirty="0"/>
+          </a:p>
+        </p:txBody>
+      </p:sp>
+      <p:sp>
+        <p:nvSpPr>
+          <p:cNvPr id="23" name="Shape 21"/>
           <p:cNvSpPr/>
           <p:nvPr/>
         </p:nvSpPr>
@@ -20117,7 +19799,7 @@
       </p:sp>
       <p:sp>
         <p:nvSpPr>
-          <p:cNvPr id="23" name="Text 21"/>
+          <p:cNvPr id="24" name="Text 22"/>
           <p:cNvSpPr/>
           <p:nvPr/>
         </p:nvSpPr>
@@ -20156,7 +19838,7 @@
       </p:sp>
       <p:sp>
         <p:nvSpPr>
-          <p:cNvPr id="24" name="Shape 22"/>
+          <p:cNvPr id="25" name="Shape 23"/>
           <p:cNvSpPr/>
           <p:nvPr/>
         </p:nvSpPr>
@@ -20183,7 +19865,7 @@
       </p:sp>
       <p:sp>
         <p:nvSpPr>
-          <p:cNvPr id="25" name="Text 23"/>
+          <p:cNvPr id="26" name="Text 24"/>
           <p:cNvSpPr/>
           <p:nvPr/>
         </p:nvSpPr>
@@ -20222,7 +19904,7 @@
       </p:sp>
       <p:sp>
         <p:nvSpPr>
-          <p:cNvPr id="26" name="Shape 24"/>
+          <p:cNvPr id="27" name="Shape 25"/>
           <p:cNvSpPr/>
           <p:nvPr/>
         </p:nvSpPr>
@@ -20249,7 +19931,7 @@
       </p:sp>
       <p:sp>
         <p:nvSpPr>
-          <p:cNvPr id="27" name="Text 25"/>
+          <p:cNvPr id="28" name="Text 26"/>
           <p:cNvSpPr/>
           <p:nvPr/>
         </p:nvSpPr>
@@ -20288,7 +19970,7 @@
       </p:sp>
       <p:sp>
         <p:nvSpPr>
-          <p:cNvPr id="28" name="Shape 26"/>
+          <p:cNvPr id="29" name="Shape 27"/>
           <p:cNvSpPr/>
           <p:nvPr/>
         </p:nvSpPr>
@@ -20315,7 +19997,7 @@
       </p:sp>
       <p:sp>
         <p:nvSpPr>
-          <p:cNvPr id="29" name="Text 27"/>
+          <p:cNvPr id="30" name="Text 28"/>
           <p:cNvSpPr/>
           <p:nvPr/>
         </p:nvSpPr>
@@ -20638,7 +20320,7 @@
                 <a:ea typeface="Calibri" pitchFamily="34" charset="-122"/>
                 <a:cs typeface="Calibri" pitchFamily="34" charset="-120"/>
               </a:rPr>
-              <a:t>Word Labs  •  wordlabs.app  •  Root: 'value' = worth, importance, or price</a:t>
+              <a:t>Word Labs  •  wordlabs.app  •  Root: 'value' = worth, importance, price</a:t>
             </a:r>
             <a:endParaRPr lang="en-US" sz="800" dirty="0"/>
           </a:p>
@@ -20777,7 +20459,7 @@
                 <a:ea typeface="Trebuchet MS" pitchFamily="34" charset="-122"/>
                 <a:cs typeface="Trebuchet MS" pitchFamily="34" charset="-120"/>
               </a:rPr>
-              <a:t>revalue</a:t>
+              <a:t>valuation</a:t>
             </a:r>
             <a:endParaRPr lang="en-US" sz="2800" dirty="0"/>
           </a:p>
@@ -20866,11 +20548,11 @@
             </a:avLst>
           </a:prstGeom>
           <a:solidFill>
-            <a:srgbClr val="DDD6FE"/>
+            <a:srgbClr val="CCFBF1"/>
           </a:solidFill>
           <a:ln w="19050">
             <a:solidFill>
-              <a:srgbClr val="7C3AED"/>
+              <a:srgbClr val="0D9488"/>
             </a:solidFill>
             <a:prstDash val="solid"/>
           </a:ln>
@@ -20910,13 +20592,13 @@
             <a:r>
               <a:rPr lang="en-US" sz="1300" b="1" dirty="0">
                 <a:solidFill>
-                  <a:srgbClr val="4C1D95"/>
+                  <a:srgbClr val="0F766E"/>
                 </a:solidFill>
                 <a:latin typeface="Trebuchet MS" pitchFamily="34" charset="0"/>
                 <a:ea typeface="Trebuchet MS" pitchFamily="34" charset="-122"/>
                 <a:cs typeface="Trebuchet MS" pitchFamily="34" charset="-120"/>
               </a:rPr>
-              <a:t>re</a:t>
+              <a:t>value</a:t>
             </a:r>
             <a:endParaRPr lang="en-US" sz="1300" dirty="0"/>
           </a:p>
@@ -20955,7 +20637,7 @@
                 <a:ea typeface="Calibri" pitchFamily="34" charset="-122"/>
                 <a:cs typeface="Calibri" pitchFamily="34" charset="-120"/>
               </a:rPr>
-              <a:t>again</a:t>
+              <a:t>worth</a:t>
             </a:r>
             <a:endParaRPr lang="en-US" sz="850" dirty="0"/>
           </a:p>
@@ -20978,11 +20660,11 @@
             </a:avLst>
           </a:prstGeom>
           <a:solidFill>
-            <a:srgbClr val="CCFBF1"/>
+            <a:srgbClr val="FCE7F3"/>
           </a:solidFill>
           <a:ln w="19050">
             <a:solidFill>
-              <a:srgbClr val="0D9488"/>
+              <a:srgbClr val="DB2777"/>
             </a:solidFill>
             <a:prstDash val="solid"/>
           </a:ln>
@@ -21022,13 +20704,13 @@
             <a:r>
               <a:rPr lang="en-US" sz="1300" b="1" dirty="0">
                 <a:solidFill>
-                  <a:srgbClr val="0F766E"/>
+                  <a:srgbClr val="9D174D"/>
                 </a:solidFill>
                 <a:latin typeface="Trebuchet MS" pitchFamily="34" charset="0"/>
                 <a:ea typeface="Trebuchet MS" pitchFamily="34" charset="-122"/>
                 <a:cs typeface="Trebuchet MS" pitchFamily="34" charset="-120"/>
               </a:rPr>
-              <a:t>value</a:t>
+              <a:t>ation</a:t>
             </a:r>
             <a:endParaRPr lang="en-US" sz="1300" dirty="0"/>
           </a:p>
@@ -21067,7 +20749,7 @@
                 <a:ea typeface="Calibri" pitchFamily="34" charset="-122"/>
                 <a:cs typeface="Calibri" pitchFamily="34" charset="-120"/>
               </a:rPr>
-              <a:t>worth</a:t>
+              <a:t>process or result of</a:t>
             </a:r>
             <a:endParaRPr lang="en-US" sz="850" dirty="0"/>
           </a:p>
@@ -21075,7 +20757,46 @@
       </p:sp>
       <p:sp>
         <p:nvSpPr>
-          <p:cNvPr id="22" name="Shape 20"/>
+          <p:cNvPr id="22" name="Text 20"/>
+          <p:cNvSpPr/>
+          <p:nvPr/>
+        </p:nvSpPr>
+        <p:spPr>
+          <a:xfrm>
+            <a:off x="5803392" y="2752344"/>
+            <a:ext cx="1828800" cy="182880"/>
+          </a:xfrm>
+          <a:prstGeom prst="rect">
+            <a:avLst/>
+          </a:prstGeom>
+          <a:noFill/>
+          <a:ln/>
+        </p:spPr>
+        <p:txBody>
+          <a:bodyPr wrap="square" lIns="0" tIns="0" rIns="0" bIns="0" rtlCol="0" anchor="t"/>
+          <a:lstStyle/>
+          <a:p>
+            <a:pPr algn="ctr" indent="0" marL="0">
+              <a:buNone/>
+            </a:pPr>
+            <a:r>
+              <a:rPr lang="en-US" sz="700" i="1" dirty="0">
+                <a:solidFill>
+                  <a:srgbClr val="94A3B8"/>
+                </a:solidFill>
+                <a:latin typeface="Calibri" pitchFamily="34" charset="0"/>
+                <a:ea typeface="Calibri" pitchFamily="34" charset="-122"/>
+                <a:cs typeface="Calibri" pitchFamily="34" charset="-120"/>
+              </a:rPr>
+              <a:t>'e' dropped before vowel suffix</a:t>
+            </a:r>
+            <a:endParaRPr lang="en-US" sz="700" dirty="0"/>
+          </a:p>
+        </p:txBody>
+      </p:sp>
+      <p:sp>
+        <p:nvSpPr>
+          <p:cNvPr id="23" name="Shape 21"/>
           <p:cNvSpPr/>
           <p:nvPr/>
         </p:nvSpPr>
@@ -21102,7 +20823,7 @@
       </p:sp>
       <p:sp>
         <p:nvSpPr>
-          <p:cNvPr id="23" name="Text 21"/>
+          <p:cNvPr id="24" name="Text 22"/>
           <p:cNvSpPr/>
           <p:nvPr/>
         </p:nvSpPr>
@@ -21141,7 +20862,7 @@
       </p:sp>
       <p:sp>
         <p:nvSpPr>
-          <p:cNvPr id="24" name="Shape 22"/>
+          <p:cNvPr id="25" name="Shape 23"/>
           <p:cNvSpPr/>
           <p:nvPr/>
         </p:nvSpPr>
@@ -21168,14 +20889,14 @@
       </p:sp>
       <p:sp>
         <p:nvSpPr>
-          <p:cNvPr id="25" name="Shape 23"/>
-          <p:cNvSpPr/>
-          <p:nvPr/>
-        </p:nvSpPr>
-        <p:spPr>
-          <a:xfrm>
-            <a:off x="2313432" y="3364992"/>
-            <a:ext cx="1645920" cy="475488"/>
+          <p:cNvPr id="26" name="Shape 24"/>
+          <p:cNvSpPr/>
+          <p:nvPr/>
+        </p:nvSpPr>
+        <p:spPr>
+          <a:xfrm>
+            <a:off x="1975104" y="3364992"/>
+            <a:ext cx="1554480" cy="475488"/>
           </a:xfrm>
           <a:prstGeom prst="rect">
             <a:avLst>
@@ -21195,14 +20916,14 @@
       </p:sp>
       <p:sp>
         <p:nvSpPr>
-          <p:cNvPr id="26" name="Text 24"/>
-          <p:cNvSpPr/>
-          <p:nvPr/>
-        </p:nvSpPr>
-        <p:spPr>
-          <a:xfrm>
-            <a:off x="2313432" y="3364992"/>
-            <a:ext cx="1645920" cy="475488"/>
+          <p:cNvPr id="27" name="Text 25"/>
+          <p:cNvSpPr/>
+          <p:nvPr/>
+        </p:nvSpPr>
+        <p:spPr>
+          <a:xfrm>
+            <a:off x="1975104" y="3364992"/>
+            <a:ext cx="1554480" cy="475488"/>
           </a:xfrm>
           <a:prstGeom prst="rect">
             <a:avLst/>
@@ -21226,7 +20947,7 @@
                 <a:ea typeface="Trebuchet MS" pitchFamily="34" charset="-122"/>
                 <a:cs typeface="Trebuchet MS" pitchFamily="34" charset="-120"/>
               </a:rPr>
-              <a:t>re</a:t>
+              <a:t>val</a:t>
             </a:r>
             <a:endParaRPr lang="en-US" sz="1400" dirty="0"/>
           </a:p>
@@ -21234,14 +20955,14 @@
       </p:sp>
       <p:sp>
         <p:nvSpPr>
-          <p:cNvPr id="27" name="Text 25"/>
-          <p:cNvSpPr/>
-          <p:nvPr/>
-        </p:nvSpPr>
-        <p:spPr>
-          <a:xfrm>
-            <a:off x="3959352" y="3364992"/>
-            <a:ext cx="411480" cy="475488"/>
+          <p:cNvPr id="28" name="Text 26"/>
+          <p:cNvSpPr/>
+          <p:nvPr/>
+        </p:nvSpPr>
+        <p:spPr>
+          <a:xfrm>
+            <a:off x="3529584" y="3364992"/>
+            <a:ext cx="73152" cy="475488"/>
           </a:xfrm>
           <a:prstGeom prst="rect">
             <a:avLst/>
@@ -21273,14 +20994,14 @@
       </p:sp>
       <p:sp>
         <p:nvSpPr>
-          <p:cNvPr id="28" name="Shape 26"/>
-          <p:cNvSpPr/>
-          <p:nvPr/>
-        </p:nvSpPr>
-        <p:spPr>
-          <a:xfrm>
-            <a:off x="4370832" y="3364992"/>
-            <a:ext cx="1645920" cy="475488"/>
+          <p:cNvPr id="29" name="Shape 27"/>
+          <p:cNvSpPr/>
+          <p:nvPr/>
+        </p:nvSpPr>
+        <p:spPr>
+          <a:xfrm>
+            <a:off x="3602736" y="3364992"/>
+            <a:ext cx="1554480" cy="475488"/>
           </a:xfrm>
           <a:prstGeom prst="rect">
             <a:avLst>
@@ -21300,14 +21021,14 @@
       </p:sp>
       <p:sp>
         <p:nvSpPr>
-          <p:cNvPr id="29" name="Text 27"/>
-          <p:cNvSpPr/>
-          <p:nvPr/>
-        </p:nvSpPr>
-        <p:spPr>
-          <a:xfrm>
-            <a:off x="4370832" y="3364992"/>
-            <a:ext cx="1645920" cy="475488"/>
+          <p:cNvPr id="30" name="Text 28"/>
+          <p:cNvSpPr/>
+          <p:nvPr/>
+        </p:nvSpPr>
+        <p:spPr>
+          <a:xfrm>
+            <a:off x="3602736" y="3364992"/>
+            <a:ext cx="1554480" cy="475488"/>
           </a:xfrm>
           <a:prstGeom prst="rect">
             <a:avLst/>
@@ -21331,7 +21052,7 @@
                 <a:ea typeface="Trebuchet MS" pitchFamily="34" charset="-122"/>
                 <a:cs typeface="Trebuchet MS" pitchFamily="34" charset="-120"/>
               </a:rPr>
-              <a:t>val</a:t>
+              <a:t>u</a:t>
             </a:r>
             <a:endParaRPr lang="en-US" sz="1400" dirty="0"/>
           </a:p>
@@ -21339,14 +21060,14 @@
       </p:sp>
       <p:sp>
         <p:nvSpPr>
-          <p:cNvPr id="30" name="Text 28"/>
-          <p:cNvSpPr/>
-          <p:nvPr/>
-        </p:nvSpPr>
-        <p:spPr>
-          <a:xfrm>
-            <a:off x="6016752" y="3364992"/>
-            <a:ext cx="411480" cy="475488"/>
+          <p:cNvPr id="31" name="Text 29"/>
+          <p:cNvSpPr/>
+          <p:nvPr/>
+        </p:nvSpPr>
+        <p:spPr>
+          <a:xfrm>
+            <a:off x="5157216" y="3364992"/>
+            <a:ext cx="73152" cy="475488"/>
           </a:xfrm>
           <a:prstGeom prst="rect">
             <a:avLst/>
@@ -21378,14 +21099,14 @@
       </p:sp>
       <p:sp>
         <p:nvSpPr>
-          <p:cNvPr id="31" name="Shape 29"/>
-          <p:cNvSpPr/>
-          <p:nvPr/>
-        </p:nvSpPr>
-        <p:spPr>
-          <a:xfrm>
-            <a:off x="6428232" y="3364992"/>
-            <a:ext cx="1645920" cy="475488"/>
+          <p:cNvPr id="32" name="Shape 30"/>
+          <p:cNvSpPr/>
+          <p:nvPr/>
+        </p:nvSpPr>
+        <p:spPr>
+          <a:xfrm>
+            <a:off x="5230368" y="3364992"/>
+            <a:ext cx="1554480" cy="475488"/>
           </a:xfrm>
           <a:prstGeom prst="rect">
             <a:avLst>
@@ -21405,14 +21126,14 @@
       </p:sp>
       <p:sp>
         <p:nvSpPr>
-          <p:cNvPr id="32" name="Text 30"/>
-          <p:cNvSpPr/>
-          <p:nvPr/>
-        </p:nvSpPr>
-        <p:spPr>
-          <a:xfrm>
-            <a:off x="6428232" y="3364992"/>
-            <a:ext cx="1645920" cy="475488"/>
+          <p:cNvPr id="33" name="Text 31"/>
+          <p:cNvSpPr/>
+          <p:nvPr/>
+        </p:nvSpPr>
+        <p:spPr>
+          <a:xfrm>
+            <a:off x="5230368" y="3364992"/>
+            <a:ext cx="1554480" cy="475488"/>
           </a:xfrm>
           <a:prstGeom prst="rect">
             <a:avLst/>
@@ -21436,7 +21157,7 @@
                 <a:ea typeface="Trebuchet MS" pitchFamily="34" charset="-122"/>
                 <a:cs typeface="Trebuchet MS" pitchFamily="34" charset="-120"/>
               </a:rPr>
-              <a:t>ue</a:t>
+              <a:t>a</a:t>
             </a:r>
             <a:endParaRPr lang="en-US" sz="1400" dirty="0"/>
           </a:p>
@@ -21444,7 +21165,112 @@
       </p:sp>
       <p:sp>
         <p:nvSpPr>
-          <p:cNvPr id="33" name="Shape 31"/>
+          <p:cNvPr id="34" name="Text 32"/>
+          <p:cNvSpPr/>
+          <p:nvPr/>
+        </p:nvSpPr>
+        <p:spPr>
+          <a:xfrm>
+            <a:off x="6784848" y="3364992"/>
+            <a:ext cx="73152" cy="475488"/>
+          </a:xfrm>
+          <a:prstGeom prst="rect">
+            <a:avLst/>
+          </a:prstGeom>
+          <a:noFill/>
+          <a:ln/>
+        </p:spPr>
+        <p:txBody>
+          <a:bodyPr wrap="square" lIns="0" tIns="0" rIns="0" bIns="0" rtlCol="0" anchor="ctr"/>
+          <a:lstStyle/>
+          <a:p>
+            <a:pPr algn="ctr" indent="0" marL="0">
+              <a:buNone/>
+            </a:pPr>
+            <a:r>
+              <a:rPr lang="en-US" sz="1600" b="1" dirty="0">
+                <a:solidFill>
+                  <a:srgbClr val="0D9488"/>
+                </a:solidFill>
+                <a:latin typeface="Trebuchet MS" pitchFamily="34" charset="0"/>
+                <a:ea typeface="Trebuchet MS" pitchFamily="34" charset="-122"/>
+                <a:cs typeface="Trebuchet MS" pitchFamily="34" charset="-120"/>
+              </a:rPr>
+              <a:t>·</a:t>
+            </a:r>
+            <a:endParaRPr lang="en-US" sz="1600" dirty="0"/>
+          </a:p>
+        </p:txBody>
+      </p:sp>
+      <p:sp>
+        <p:nvSpPr>
+          <p:cNvPr id="35" name="Shape 33"/>
+          <p:cNvSpPr/>
+          <p:nvPr/>
+        </p:nvSpPr>
+        <p:spPr>
+          <a:xfrm>
+            <a:off x="6858000" y="3364992"/>
+            <a:ext cx="1554480" cy="475488"/>
+          </a:xfrm>
+          <a:prstGeom prst="rect">
+            <a:avLst>
+              <a:gd name="adj" fmla="val 9615"/>
+            </a:avLst>
+          </a:prstGeom>
+          <a:solidFill>
+            <a:srgbClr val="FFFFFF"/>
+          </a:solidFill>
+          <a:ln w="12700">
+            <a:solidFill>
+              <a:srgbClr val="0D9488"/>
+            </a:solidFill>
+            <a:prstDash val="solid"/>
+          </a:ln>
+        </p:spPr>
+      </p:sp>
+      <p:sp>
+        <p:nvSpPr>
+          <p:cNvPr id="36" name="Text 34"/>
+          <p:cNvSpPr/>
+          <p:nvPr/>
+        </p:nvSpPr>
+        <p:spPr>
+          <a:xfrm>
+            <a:off x="6858000" y="3364992"/>
+            <a:ext cx="1554480" cy="475488"/>
+          </a:xfrm>
+          <a:prstGeom prst="rect">
+            <a:avLst/>
+          </a:prstGeom>
+          <a:noFill/>
+          <a:ln/>
+        </p:spPr>
+        <p:txBody>
+          <a:bodyPr wrap="square" lIns="0" tIns="0" rIns="0" bIns="0" rtlCol="0" anchor="ctr"/>
+          <a:lstStyle/>
+          <a:p>
+            <a:pPr algn="ctr" indent="0" marL="0">
+              <a:buNone/>
+            </a:pPr>
+            <a:r>
+              <a:rPr lang="en-US" sz="1400" b="1" dirty="0">
+                <a:solidFill>
+                  <a:srgbClr val="0D9488"/>
+                </a:solidFill>
+                <a:latin typeface="Trebuchet MS" pitchFamily="34" charset="0"/>
+                <a:ea typeface="Trebuchet MS" pitchFamily="34" charset="-122"/>
+                <a:cs typeface="Trebuchet MS" pitchFamily="34" charset="-120"/>
+              </a:rPr>
+              <a:t>tion</a:t>
+            </a:r>
+            <a:endParaRPr lang="en-US" sz="1400" dirty="0"/>
+          </a:p>
+        </p:txBody>
+      </p:sp>
+      <p:sp>
+        <p:nvSpPr>
+          <p:cNvPr id="37" name="Shape 35"/>
           <p:cNvSpPr/>
           <p:nvPr/>
         </p:nvSpPr>
@@ -21471,7 +21297,7 @@
       </p:sp>
       <p:sp>
         <p:nvSpPr>
-          <p:cNvPr id="34" name="Text 32"/>
+          <p:cNvPr id="38" name="Text 36"/>
           <p:cNvSpPr/>
           <p:nvPr/>
         </p:nvSpPr>
@@ -21510,7 +21336,7 @@
       </p:sp>
       <p:sp>
         <p:nvSpPr>
-          <p:cNvPr id="35" name="Shape 33"/>
+          <p:cNvPr id="39" name="Shape 37"/>
           <p:cNvSpPr/>
           <p:nvPr/>
         </p:nvSpPr>
@@ -21537,7 +21363,7 @@
       </p:sp>
       <p:sp>
         <p:nvSpPr>
-          <p:cNvPr id="36" name="Text 34"/>
+          <p:cNvPr id="40" name="Text 38"/>
           <p:cNvSpPr/>
           <p:nvPr/>
         </p:nvSpPr>
@@ -21860,7 +21686,7 @@
                 <a:ea typeface="Calibri" pitchFamily="34" charset="-122"/>
                 <a:cs typeface="Calibri" pitchFamily="34" charset="-120"/>
               </a:rPr>
-              <a:t>Word Labs  •  wordlabs.app  •  Root: 'value' = worth, importance, or price</a:t>
+              <a:t>Word Labs  •  wordlabs.app  •  Root: 'value' = worth, importance, price</a:t>
             </a:r>
             <a:endParaRPr lang="en-US" sz="800" dirty="0"/>
           </a:p>
@@ -21999,7 +21825,7 @@
                 <a:ea typeface="Trebuchet MS" pitchFamily="34" charset="-122"/>
                 <a:cs typeface="Trebuchet MS" pitchFamily="34" charset="-120"/>
               </a:rPr>
-              <a:t>revalue</a:t>
+              <a:t>valuation</a:t>
             </a:r>
             <a:endParaRPr lang="en-US" sz="2800" dirty="0"/>
           </a:p>
@@ -22088,11 +21914,11 @@
             </a:avLst>
           </a:prstGeom>
           <a:solidFill>
-            <a:srgbClr val="DDD6FE"/>
+            <a:srgbClr val="CCFBF1"/>
           </a:solidFill>
           <a:ln w="19050">
             <a:solidFill>
-              <a:srgbClr val="7C3AED"/>
+              <a:srgbClr val="0D9488"/>
             </a:solidFill>
             <a:prstDash val="solid"/>
           </a:ln>
@@ -22132,13 +21958,13 @@
             <a:r>
               <a:rPr lang="en-US" sz="1300" b="1" dirty="0">
                 <a:solidFill>
-                  <a:srgbClr val="4C1D95"/>
+                  <a:srgbClr val="0F766E"/>
                 </a:solidFill>
                 <a:latin typeface="Trebuchet MS" pitchFamily="34" charset="0"/>
                 <a:ea typeface="Trebuchet MS" pitchFamily="34" charset="-122"/>
                 <a:cs typeface="Trebuchet MS" pitchFamily="34" charset="-120"/>
               </a:rPr>
-              <a:t>re</a:t>
+              <a:t>value</a:t>
             </a:r>
             <a:endParaRPr lang="en-US" sz="1300" dirty="0"/>
           </a:p>
@@ -22177,7 +22003,7 @@
                 <a:ea typeface="Calibri" pitchFamily="34" charset="-122"/>
                 <a:cs typeface="Calibri" pitchFamily="34" charset="-120"/>
               </a:rPr>
-              <a:t>again</a:t>
+              <a:t>worth</a:t>
             </a:r>
             <a:endParaRPr lang="en-US" sz="850" dirty="0"/>
           </a:p>
@@ -22200,11 +22026,11 @@
             </a:avLst>
           </a:prstGeom>
           <a:solidFill>
-            <a:srgbClr val="CCFBF1"/>
+            <a:srgbClr val="FCE7F3"/>
           </a:solidFill>
           <a:ln w="19050">
             <a:solidFill>
-              <a:srgbClr val="0D9488"/>
+              <a:srgbClr val="DB2777"/>
             </a:solidFill>
             <a:prstDash val="solid"/>
           </a:ln>
@@ -22244,13 +22070,13 @@
             <a:r>
               <a:rPr lang="en-US" sz="1300" b="1" dirty="0">
                 <a:solidFill>
-                  <a:srgbClr val="0F766E"/>
+                  <a:srgbClr val="9D174D"/>
                 </a:solidFill>
                 <a:latin typeface="Trebuchet MS" pitchFamily="34" charset="0"/>
                 <a:ea typeface="Trebuchet MS" pitchFamily="34" charset="-122"/>
                 <a:cs typeface="Trebuchet MS" pitchFamily="34" charset="-120"/>
               </a:rPr>
-              <a:t>value</a:t>
+              <a:t>ation</a:t>
             </a:r>
             <a:endParaRPr lang="en-US" sz="1300" dirty="0"/>
           </a:p>
@@ -22289,7 +22115,7 @@
                 <a:ea typeface="Calibri" pitchFamily="34" charset="-122"/>
                 <a:cs typeface="Calibri" pitchFamily="34" charset="-120"/>
               </a:rPr>
-              <a:t>worth</a:t>
+              <a:t>process or result of</a:t>
             </a:r>
             <a:endParaRPr lang="en-US" sz="850" dirty="0"/>
           </a:p>
@@ -22297,7 +22123,46 @@
       </p:sp>
       <p:sp>
         <p:nvSpPr>
-          <p:cNvPr id="22" name="Shape 20"/>
+          <p:cNvPr id="22" name="Text 20"/>
+          <p:cNvSpPr/>
+          <p:nvPr/>
+        </p:nvSpPr>
+        <p:spPr>
+          <a:xfrm>
+            <a:off x="5803392" y="2752344"/>
+            <a:ext cx="1828800" cy="182880"/>
+          </a:xfrm>
+          <a:prstGeom prst="rect">
+            <a:avLst/>
+          </a:prstGeom>
+          <a:noFill/>
+          <a:ln/>
+        </p:spPr>
+        <p:txBody>
+          <a:bodyPr wrap="square" lIns="0" tIns="0" rIns="0" bIns="0" rtlCol="0" anchor="t"/>
+          <a:lstStyle/>
+          <a:p>
+            <a:pPr algn="ctr" indent="0" marL="0">
+              <a:buNone/>
+            </a:pPr>
+            <a:r>
+              <a:rPr lang="en-US" sz="700" i="1" dirty="0">
+                <a:solidFill>
+                  <a:srgbClr val="94A3B8"/>
+                </a:solidFill>
+                <a:latin typeface="Calibri" pitchFamily="34" charset="0"/>
+                <a:ea typeface="Calibri" pitchFamily="34" charset="-122"/>
+                <a:cs typeface="Calibri" pitchFamily="34" charset="-120"/>
+              </a:rPr>
+              <a:t>'e' dropped before vowel suffix</a:t>
+            </a:r>
+            <a:endParaRPr lang="en-US" sz="700" dirty="0"/>
+          </a:p>
+        </p:txBody>
+      </p:sp>
+      <p:sp>
+        <p:nvSpPr>
+          <p:cNvPr id="23" name="Shape 21"/>
           <p:cNvSpPr/>
           <p:nvPr/>
         </p:nvSpPr>
@@ -22324,7 +22189,7 @@
       </p:sp>
       <p:sp>
         <p:nvSpPr>
-          <p:cNvPr id="23" name="Text 21"/>
+          <p:cNvPr id="24" name="Text 22"/>
           <p:cNvSpPr/>
           <p:nvPr/>
         </p:nvSpPr>
@@ -22363,7 +22228,7 @@
       </p:sp>
       <p:sp>
         <p:nvSpPr>
-          <p:cNvPr id="24" name="Shape 22"/>
+          <p:cNvPr id="25" name="Shape 23"/>
           <p:cNvSpPr/>
           <p:nvPr/>
         </p:nvSpPr>
@@ -22390,14 +22255,14 @@
       </p:sp>
       <p:sp>
         <p:nvSpPr>
-          <p:cNvPr id="25" name="Shape 23"/>
-          <p:cNvSpPr/>
-          <p:nvPr/>
-        </p:nvSpPr>
-        <p:spPr>
-          <a:xfrm>
-            <a:off x="2313432" y="3364992"/>
-            <a:ext cx="1645920" cy="475488"/>
+          <p:cNvPr id="26" name="Shape 24"/>
+          <p:cNvSpPr/>
+          <p:nvPr/>
+        </p:nvSpPr>
+        <p:spPr>
+          <a:xfrm>
+            <a:off x="1975104" y="3364992"/>
+            <a:ext cx="1554480" cy="475488"/>
           </a:xfrm>
           <a:prstGeom prst="rect">
             <a:avLst>
@@ -22417,14 +22282,14 @@
       </p:sp>
       <p:sp>
         <p:nvSpPr>
-          <p:cNvPr id="26" name="Text 24"/>
-          <p:cNvSpPr/>
-          <p:nvPr/>
-        </p:nvSpPr>
-        <p:spPr>
-          <a:xfrm>
-            <a:off x="2313432" y="3364992"/>
-            <a:ext cx="1645920" cy="475488"/>
+          <p:cNvPr id="27" name="Text 25"/>
+          <p:cNvSpPr/>
+          <p:nvPr/>
+        </p:nvSpPr>
+        <p:spPr>
+          <a:xfrm>
+            <a:off x="1975104" y="3364992"/>
+            <a:ext cx="1554480" cy="475488"/>
           </a:xfrm>
           <a:prstGeom prst="rect">
             <a:avLst/>
@@ -22448,7 +22313,7 @@
                 <a:ea typeface="Trebuchet MS" pitchFamily="34" charset="-122"/>
                 <a:cs typeface="Trebuchet MS" pitchFamily="34" charset="-120"/>
               </a:rPr>
-              <a:t>re</a:t>
+              <a:t>val</a:t>
             </a:r>
             <a:endParaRPr lang="en-US" sz="1400" dirty="0"/>
           </a:p>
@@ -22456,14 +22321,14 @@
       </p:sp>
       <p:sp>
         <p:nvSpPr>
-          <p:cNvPr id="27" name="Text 25"/>
-          <p:cNvSpPr/>
-          <p:nvPr/>
-        </p:nvSpPr>
-        <p:spPr>
-          <a:xfrm>
-            <a:off x="3959352" y="3364992"/>
-            <a:ext cx="411480" cy="475488"/>
+          <p:cNvPr id="28" name="Text 26"/>
+          <p:cNvSpPr/>
+          <p:nvPr/>
+        </p:nvSpPr>
+        <p:spPr>
+          <a:xfrm>
+            <a:off x="3529584" y="3364992"/>
+            <a:ext cx="73152" cy="475488"/>
           </a:xfrm>
           <a:prstGeom prst="rect">
             <a:avLst/>
@@ -22495,14 +22360,14 @@
       </p:sp>
       <p:sp>
         <p:nvSpPr>
-          <p:cNvPr id="28" name="Shape 26"/>
-          <p:cNvSpPr/>
-          <p:nvPr/>
-        </p:nvSpPr>
-        <p:spPr>
-          <a:xfrm>
-            <a:off x="4370832" y="3364992"/>
-            <a:ext cx="1645920" cy="475488"/>
+          <p:cNvPr id="29" name="Shape 27"/>
+          <p:cNvSpPr/>
+          <p:nvPr/>
+        </p:nvSpPr>
+        <p:spPr>
+          <a:xfrm>
+            <a:off x="3602736" y="3364992"/>
+            <a:ext cx="1554480" cy="475488"/>
           </a:xfrm>
           <a:prstGeom prst="rect">
             <a:avLst>
@@ -22522,14 +22387,14 @@
       </p:sp>
       <p:sp>
         <p:nvSpPr>
-          <p:cNvPr id="29" name="Text 27"/>
-          <p:cNvSpPr/>
-          <p:nvPr/>
-        </p:nvSpPr>
-        <p:spPr>
-          <a:xfrm>
-            <a:off x="4370832" y="3364992"/>
-            <a:ext cx="1645920" cy="475488"/>
+          <p:cNvPr id="30" name="Text 28"/>
+          <p:cNvSpPr/>
+          <p:nvPr/>
+        </p:nvSpPr>
+        <p:spPr>
+          <a:xfrm>
+            <a:off x="3602736" y="3364992"/>
+            <a:ext cx="1554480" cy="475488"/>
           </a:xfrm>
           <a:prstGeom prst="rect">
             <a:avLst/>
@@ -22553,7 +22418,7 @@
                 <a:ea typeface="Trebuchet MS" pitchFamily="34" charset="-122"/>
                 <a:cs typeface="Trebuchet MS" pitchFamily="34" charset="-120"/>
               </a:rPr>
-              <a:t>val</a:t>
+              <a:t>u</a:t>
             </a:r>
             <a:endParaRPr lang="en-US" sz="1400" dirty="0"/>
           </a:p>
@@ -22561,14 +22426,14 @@
       </p:sp>
       <p:sp>
         <p:nvSpPr>
-          <p:cNvPr id="30" name="Text 28"/>
-          <p:cNvSpPr/>
-          <p:nvPr/>
-        </p:nvSpPr>
-        <p:spPr>
-          <a:xfrm>
-            <a:off x="6016752" y="3364992"/>
-            <a:ext cx="411480" cy="475488"/>
+          <p:cNvPr id="31" name="Text 29"/>
+          <p:cNvSpPr/>
+          <p:nvPr/>
+        </p:nvSpPr>
+        <p:spPr>
+          <a:xfrm>
+            <a:off x="5157216" y="3364992"/>
+            <a:ext cx="73152" cy="475488"/>
           </a:xfrm>
           <a:prstGeom prst="rect">
             <a:avLst/>
@@ -22600,14 +22465,14 @@
       </p:sp>
       <p:sp>
         <p:nvSpPr>
-          <p:cNvPr id="31" name="Shape 29"/>
-          <p:cNvSpPr/>
-          <p:nvPr/>
-        </p:nvSpPr>
-        <p:spPr>
-          <a:xfrm>
-            <a:off x="6428232" y="3364992"/>
-            <a:ext cx="1645920" cy="475488"/>
+          <p:cNvPr id="32" name="Shape 30"/>
+          <p:cNvSpPr/>
+          <p:nvPr/>
+        </p:nvSpPr>
+        <p:spPr>
+          <a:xfrm>
+            <a:off x="5230368" y="3364992"/>
+            <a:ext cx="1554480" cy="475488"/>
           </a:xfrm>
           <a:prstGeom prst="rect">
             <a:avLst>
@@ -22627,14 +22492,14 @@
       </p:sp>
       <p:sp>
         <p:nvSpPr>
-          <p:cNvPr id="32" name="Text 30"/>
-          <p:cNvSpPr/>
-          <p:nvPr/>
-        </p:nvSpPr>
-        <p:spPr>
-          <a:xfrm>
-            <a:off x="6428232" y="3364992"/>
-            <a:ext cx="1645920" cy="475488"/>
+          <p:cNvPr id="33" name="Text 31"/>
+          <p:cNvSpPr/>
+          <p:nvPr/>
+        </p:nvSpPr>
+        <p:spPr>
+          <a:xfrm>
+            <a:off x="5230368" y="3364992"/>
+            <a:ext cx="1554480" cy="475488"/>
           </a:xfrm>
           <a:prstGeom prst="rect">
             <a:avLst/>
@@ -22658,7 +22523,7 @@
                 <a:ea typeface="Trebuchet MS" pitchFamily="34" charset="-122"/>
                 <a:cs typeface="Trebuchet MS" pitchFamily="34" charset="-120"/>
               </a:rPr>
-              <a:t>ue</a:t>
+              <a:t>a</a:t>
             </a:r>
             <a:endParaRPr lang="en-US" sz="1400" dirty="0"/>
           </a:p>
@@ -22666,7 +22531,112 @@
       </p:sp>
       <p:sp>
         <p:nvSpPr>
-          <p:cNvPr id="33" name="Shape 31"/>
+          <p:cNvPr id="34" name="Text 32"/>
+          <p:cNvSpPr/>
+          <p:nvPr/>
+        </p:nvSpPr>
+        <p:spPr>
+          <a:xfrm>
+            <a:off x="6784848" y="3364992"/>
+            <a:ext cx="73152" cy="475488"/>
+          </a:xfrm>
+          <a:prstGeom prst="rect">
+            <a:avLst/>
+          </a:prstGeom>
+          <a:noFill/>
+          <a:ln/>
+        </p:spPr>
+        <p:txBody>
+          <a:bodyPr wrap="square" lIns="0" tIns="0" rIns="0" bIns="0" rtlCol="0" anchor="ctr"/>
+          <a:lstStyle/>
+          <a:p>
+            <a:pPr algn="ctr" indent="0" marL="0">
+              <a:buNone/>
+            </a:pPr>
+            <a:r>
+              <a:rPr lang="en-US" sz="1600" b="1" dirty="0">
+                <a:solidFill>
+                  <a:srgbClr val="0D9488"/>
+                </a:solidFill>
+                <a:latin typeface="Trebuchet MS" pitchFamily="34" charset="0"/>
+                <a:ea typeface="Trebuchet MS" pitchFamily="34" charset="-122"/>
+                <a:cs typeface="Trebuchet MS" pitchFamily="34" charset="-120"/>
+              </a:rPr>
+              <a:t>·</a:t>
+            </a:r>
+            <a:endParaRPr lang="en-US" sz="1600" dirty="0"/>
+          </a:p>
+        </p:txBody>
+      </p:sp>
+      <p:sp>
+        <p:nvSpPr>
+          <p:cNvPr id="35" name="Shape 33"/>
+          <p:cNvSpPr/>
+          <p:nvPr/>
+        </p:nvSpPr>
+        <p:spPr>
+          <a:xfrm>
+            <a:off x="6858000" y="3364992"/>
+            <a:ext cx="1554480" cy="475488"/>
+          </a:xfrm>
+          <a:prstGeom prst="rect">
+            <a:avLst>
+              <a:gd name="adj" fmla="val 9615"/>
+            </a:avLst>
+          </a:prstGeom>
+          <a:solidFill>
+            <a:srgbClr val="FFFFFF"/>
+          </a:solidFill>
+          <a:ln w="12700">
+            <a:solidFill>
+              <a:srgbClr val="0D9488"/>
+            </a:solidFill>
+            <a:prstDash val="solid"/>
+          </a:ln>
+        </p:spPr>
+      </p:sp>
+      <p:sp>
+        <p:nvSpPr>
+          <p:cNvPr id="36" name="Text 34"/>
+          <p:cNvSpPr/>
+          <p:nvPr/>
+        </p:nvSpPr>
+        <p:spPr>
+          <a:xfrm>
+            <a:off x="6858000" y="3364992"/>
+            <a:ext cx="1554480" cy="475488"/>
+          </a:xfrm>
+          <a:prstGeom prst="rect">
+            <a:avLst/>
+          </a:prstGeom>
+          <a:noFill/>
+          <a:ln/>
+        </p:spPr>
+        <p:txBody>
+          <a:bodyPr wrap="square" lIns="0" tIns="0" rIns="0" bIns="0" rtlCol="0" anchor="ctr"/>
+          <a:lstStyle/>
+          <a:p>
+            <a:pPr algn="ctr" indent="0" marL="0">
+              <a:buNone/>
+            </a:pPr>
+            <a:r>
+              <a:rPr lang="en-US" sz="1400" b="1" dirty="0">
+                <a:solidFill>
+                  <a:srgbClr val="0D9488"/>
+                </a:solidFill>
+                <a:latin typeface="Trebuchet MS" pitchFamily="34" charset="0"/>
+                <a:ea typeface="Trebuchet MS" pitchFamily="34" charset="-122"/>
+                <a:cs typeface="Trebuchet MS" pitchFamily="34" charset="-120"/>
+              </a:rPr>
+              <a:t>tion</a:t>
+            </a:r>
+            <a:endParaRPr lang="en-US" sz="1400" dirty="0"/>
+          </a:p>
+        </p:txBody>
+      </p:sp>
+      <p:sp>
+        <p:nvSpPr>
+          <p:cNvPr id="37" name="Shape 35"/>
           <p:cNvSpPr/>
           <p:nvPr/>
         </p:nvSpPr>
@@ -22693,7 +22663,7 @@
       </p:sp>
       <p:sp>
         <p:nvSpPr>
-          <p:cNvPr id="34" name="Text 32"/>
+          <p:cNvPr id="38" name="Text 36"/>
           <p:cNvSpPr/>
           <p:nvPr/>
         </p:nvSpPr>
@@ -22732,18 +22702,18 @@
       </p:sp>
       <p:sp>
         <p:nvSpPr>
-          <p:cNvPr id="35" name="Shape 33"/>
+          <p:cNvPr id="39" name="Shape 37"/>
           <p:cNvSpPr/>
           <p:nvPr/>
         </p:nvSpPr>
         <p:spPr>
           <a:xfrm>
             <a:off x="1874520" y="4096512"/>
-            <a:ext cx="6903720" cy="658368"/>
+            <a:ext cx="6903720" cy="804672"/>
           </a:xfrm>
           <a:prstGeom prst="rect">
             <a:avLst>
-              <a:gd name="adj" fmla="val 8333"/>
+              <a:gd name="adj" fmla="val 6818"/>
             </a:avLst>
           </a:prstGeom>
           <a:solidFill>
@@ -22759,18 +22729,18 @@
       </p:sp>
       <p:sp>
         <p:nvSpPr>
-          <p:cNvPr id="36" name="Shape 34"/>
+          <p:cNvPr id="40" name="Shape 38"/>
           <p:cNvSpPr/>
           <p:nvPr/>
         </p:nvSpPr>
         <p:spPr>
           <a:xfrm>
             <a:off x="2124837" y="4169664"/>
-            <a:ext cx="685800" cy="475488"/>
+            <a:ext cx="685800" cy="384048"/>
           </a:xfrm>
           <a:prstGeom prst="rect">
             <a:avLst>
-              <a:gd name="adj" fmla="val 7692"/>
+              <a:gd name="adj" fmla="val 9524"/>
             </a:avLst>
           </a:prstGeom>
           <a:solidFill>
@@ -22786,14 +22756,14 @@
       </p:sp>
       <p:sp>
         <p:nvSpPr>
-          <p:cNvPr id="37" name="Text 35"/>
+          <p:cNvPr id="41" name="Text 39"/>
           <p:cNvSpPr/>
           <p:nvPr/>
         </p:nvSpPr>
         <p:spPr>
           <a:xfrm>
             <a:off x="2124837" y="4169664"/>
-            <a:ext cx="685800" cy="475488"/>
+            <a:ext cx="685800" cy="384048"/>
           </a:xfrm>
           <a:prstGeom prst="rect">
             <a:avLst/>
@@ -22817,7 +22787,7 @@
                 <a:ea typeface="Trebuchet MS" pitchFamily="34" charset="-122"/>
                 <a:cs typeface="Trebuchet MS" pitchFamily="34" charset="-120"/>
               </a:rPr>
-              <a:t>r</a:t>
+              <a:t>v</a:t>
             </a:r>
             <a:endParaRPr lang="en-US" sz="900" dirty="0"/>
           </a:p>
@@ -22825,18 +22795,18 @@
       </p:sp>
       <p:sp>
         <p:nvSpPr>
-          <p:cNvPr id="38" name="Shape 36"/>
+          <p:cNvPr id="42" name="Shape 40"/>
           <p:cNvSpPr/>
           <p:nvPr/>
         </p:nvSpPr>
         <p:spPr>
           <a:xfrm>
             <a:off x="3033522" y="4169664"/>
-            <a:ext cx="685800" cy="475488"/>
+            <a:ext cx="685800" cy="384048"/>
           </a:xfrm>
           <a:prstGeom prst="rect">
             <a:avLst>
-              <a:gd name="adj" fmla="val 7692"/>
+              <a:gd name="adj" fmla="val 9524"/>
             </a:avLst>
           </a:prstGeom>
           <a:solidFill>
@@ -22852,14 +22822,14 @@
       </p:sp>
       <p:sp>
         <p:nvSpPr>
-          <p:cNvPr id="39" name="Text 37"/>
+          <p:cNvPr id="43" name="Text 41"/>
           <p:cNvSpPr/>
           <p:nvPr/>
         </p:nvSpPr>
         <p:spPr>
           <a:xfrm>
             <a:off x="3033522" y="4169664"/>
-            <a:ext cx="685800" cy="475488"/>
+            <a:ext cx="685800" cy="384048"/>
           </a:xfrm>
           <a:prstGeom prst="rect">
             <a:avLst/>
@@ -22883,7 +22853,7 @@
                 <a:ea typeface="Trebuchet MS" pitchFamily="34" charset="-122"/>
                 <a:cs typeface="Trebuchet MS" pitchFamily="34" charset="-120"/>
               </a:rPr>
-              <a:t>e</a:t>
+              <a:t>al</a:t>
             </a:r>
             <a:endParaRPr lang="en-US" sz="900" dirty="0"/>
           </a:p>
@@ -22891,18 +22861,18 @@
       </p:sp>
       <p:sp>
         <p:nvSpPr>
-          <p:cNvPr id="40" name="Shape 38"/>
+          <p:cNvPr id="44" name="Shape 42"/>
           <p:cNvSpPr/>
           <p:nvPr/>
         </p:nvSpPr>
         <p:spPr>
           <a:xfrm>
             <a:off x="3942207" y="4169664"/>
-            <a:ext cx="685800" cy="475488"/>
+            <a:ext cx="685800" cy="384048"/>
           </a:xfrm>
           <a:prstGeom prst="rect">
             <a:avLst>
-              <a:gd name="adj" fmla="val 7692"/>
+              <a:gd name="adj" fmla="val 9524"/>
             </a:avLst>
           </a:prstGeom>
           <a:solidFill>
@@ -22918,14 +22888,14 @@
       </p:sp>
       <p:sp>
         <p:nvSpPr>
-          <p:cNvPr id="41" name="Text 39"/>
+          <p:cNvPr id="45" name="Text 43"/>
           <p:cNvSpPr/>
           <p:nvPr/>
         </p:nvSpPr>
         <p:spPr>
           <a:xfrm>
             <a:off x="3942207" y="4169664"/>
-            <a:ext cx="685800" cy="475488"/>
+            <a:ext cx="685800" cy="384048"/>
           </a:xfrm>
           <a:prstGeom prst="rect">
             <a:avLst/>
@@ -22949,7 +22919,7 @@
                 <a:ea typeface="Trebuchet MS" pitchFamily="34" charset="-122"/>
                 <a:cs typeface="Trebuchet MS" pitchFamily="34" charset="-120"/>
               </a:rPr>
-              <a:t>v</a:t>
+              <a:t>u</a:t>
             </a:r>
             <a:endParaRPr lang="en-US" sz="900" dirty="0"/>
           </a:p>
@@ -22957,18 +22927,18 @@
       </p:sp>
       <p:sp>
         <p:nvSpPr>
-          <p:cNvPr id="42" name="Shape 40"/>
+          <p:cNvPr id="46" name="Shape 44"/>
           <p:cNvSpPr/>
           <p:nvPr/>
         </p:nvSpPr>
         <p:spPr>
           <a:xfrm>
             <a:off x="4850892" y="4169664"/>
-            <a:ext cx="685800" cy="475488"/>
+            <a:ext cx="685800" cy="384048"/>
           </a:xfrm>
           <a:prstGeom prst="rect">
             <a:avLst>
-              <a:gd name="adj" fmla="val 7692"/>
+              <a:gd name="adj" fmla="val 9524"/>
             </a:avLst>
           </a:prstGeom>
           <a:solidFill>
@@ -22984,14 +22954,14 @@
       </p:sp>
       <p:sp>
         <p:nvSpPr>
-          <p:cNvPr id="43" name="Text 41"/>
+          <p:cNvPr id="47" name="Text 45"/>
           <p:cNvSpPr/>
           <p:nvPr/>
         </p:nvSpPr>
         <p:spPr>
           <a:xfrm>
             <a:off x="4850892" y="4169664"/>
-            <a:ext cx="685800" cy="475488"/>
+            <a:ext cx="685800" cy="384048"/>
           </a:xfrm>
           <a:prstGeom prst="rect">
             <a:avLst/>
@@ -23023,18 +22993,18 @@
       </p:sp>
       <p:sp>
         <p:nvSpPr>
-          <p:cNvPr id="44" name="Shape 42"/>
+          <p:cNvPr id="48" name="Shape 46"/>
           <p:cNvSpPr/>
           <p:nvPr/>
         </p:nvSpPr>
         <p:spPr>
           <a:xfrm>
             <a:off x="5759577" y="4169664"/>
-            <a:ext cx="685800" cy="475488"/>
+            <a:ext cx="685800" cy="384048"/>
           </a:xfrm>
           <a:prstGeom prst="rect">
             <a:avLst>
-              <a:gd name="adj" fmla="val 7692"/>
+              <a:gd name="adj" fmla="val 9524"/>
             </a:avLst>
           </a:prstGeom>
           <a:solidFill>
@@ -23050,14 +23020,14 @@
       </p:sp>
       <p:sp>
         <p:nvSpPr>
-          <p:cNvPr id="45" name="Text 43"/>
+          <p:cNvPr id="49" name="Text 47"/>
           <p:cNvSpPr/>
           <p:nvPr/>
         </p:nvSpPr>
         <p:spPr>
           <a:xfrm>
             <a:off x="5759577" y="4169664"/>
-            <a:ext cx="685800" cy="475488"/>
+            <a:ext cx="685800" cy="384048"/>
           </a:xfrm>
           <a:prstGeom prst="rect">
             <a:avLst/>
@@ -23081,7 +23051,7 @@
                 <a:ea typeface="Trebuchet MS" pitchFamily="34" charset="-122"/>
                 <a:cs typeface="Trebuchet MS" pitchFamily="34" charset="-120"/>
               </a:rPr>
-              <a:t>l</a:t>
+              <a:t>t</a:t>
             </a:r>
             <a:endParaRPr lang="en-US" sz="900" dirty="0"/>
           </a:p>
@@ -23089,18 +23059,57 @@
       </p:sp>
       <p:sp>
         <p:nvSpPr>
-          <p:cNvPr id="46" name="Shape 44"/>
+          <p:cNvPr id="50" name="Text 48"/>
+          <p:cNvSpPr/>
+          <p:nvPr/>
+        </p:nvSpPr>
+        <p:spPr>
+          <a:xfrm>
+            <a:off x="5759577" y="4572000"/>
+            <a:ext cx="685800" cy="219456"/>
+          </a:xfrm>
+          <a:prstGeom prst="rect">
+            <a:avLst/>
+          </a:prstGeom>
+          <a:noFill/>
+          <a:ln/>
+        </p:spPr>
+        <p:txBody>
+          <a:bodyPr wrap="square" lIns="0" tIns="0" rIns="0" bIns="0" rtlCol="0" anchor="t"/>
+          <a:lstStyle/>
+          <a:p>
+            <a:pPr algn="ctr" indent="0" marL="0">
+              <a:buNone/>
+            </a:pPr>
+            <a:r>
+              <a:rPr lang="en-US" sz="750" i="1" dirty="0">
+                <a:solidFill>
+                  <a:srgbClr val="94A3B8"/>
+                </a:solidFill>
+                <a:latin typeface="Calibri" pitchFamily="34" charset="0"/>
+                <a:ea typeface="Calibri" pitchFamily="34" charset="-122"/>
+                <a:cs typeface="Calibri" pitchFamily="34" charset="-120"/>
+              </a:rPr>
+              <a:t>/sh/</a:t>
+            </a:r>
+            <a:endParaRPr lang="en-US" sz="750" dirty="0"/>
+          </a:p>
+        </p:txBody>
+      </p:sp>
+      <p:sp>
+        <p:nvSpPr>
+          <p:cNvPr id="51" name="Shape 49"/>
           <p:cNvSpPr/>
           <p:nvPr/>
         </p:nvSpPr>
         <p:spPr>
           <a:xfrm>
             <a:off x="6668262" y="4169664"/>
-            <a:ext cx="685800" cy="475488"/>
+            <a:ext cx="685800" cy="384048"/>
           </a:xfrm>
           <a:prstGeom prst="rect">
             <a:avLst>
-              <a:gd name="adj" fmla="val 7692"/>
+              <a:gd name="adj" fmla="val 9524"/>
             </a:avLst>
           </a:prstGeom>
           <a:solidFill>
@@ -23116,14 +23125,14 @@
       </p:sp>
       <p:sp>
         <p:nvSpPr>
-          <p:cNvPr id="47" name="Text 45"/>
+          <p:cNvPr id="52" name="Text 50"/>
           <p:cNvSpPr/>
           <p:nvPr/>
         </p:nvSpPr>
         <p:spPr>
           <a:xfrm>
             <a:off x="6668262" y="4169664"/>
-            <a:ext cx="685800" cy="475488"/>
+            <a:ext cx="685800" cy="384048"/>
           </a:xfrm>
           <a:prstGeom prst="rect">
             <a:avLst/>
@@ -23147,7 +23156,7 @@
                 <a:ea typeface="Trebuchet MS" pitchFamily="34" charset="-122"/>
                 <a:cs typeface="Trebuchet MS" pitchFamily="34" charset="-120"/>
               </a:rPr>
-              <a:t>u</a:t>
+              <a:t>io</a:t>
             </a:r>
             <a:endParaRPr lang="en-US" sz="900" dirty="0"/>
           </a:p>
@@ -23155,18 +23164,18 @@
       </p:sp>
       <p:sp>
         <p:nvSpPr>
-          <p:cNvPr id="48" name="Shape 46"/>
+          <p:cNvPr id="53" name="Shape 51"/>
           <p:cNvSpPr/>
           <p:nvPr/>
         </p:nvSpPr>
         <p:spPr>
           <a:xfrm>
             <a:off x="7576947" y="4169664"/>
-            <a:ext cx="685800" cy="475488"/>
+            <a:ext cx="685800" cy="384048"/>
           </a:xfrm>
           <a:prstGeom prst="rect">
             <a:avLst>
-              <a:gd name="adj" fmla="val 7692"/>
+              <a:gd name="adj" fmla="val 9524"/>
             </a:avLst>
           </a:prstGeom>
           <a:solidFill>
@@ -23182,14 +23191,14 @@
       </p:sp>
       <p:sp>
         <p:nvSpPr>
-          <p:cNvPr id="49" name="Text 47"/>
+          <p:cNvPr id="54" name="Text 52"/>
           <p:cNvSpPr/>
           <p:nvPr/>
         </p:nvSpPr>
         <p:spPr>
           <a:xfrm>
             <a:off x="7576947" y="4169664"/>
-            <a:ext cx="685800" cy="475488"/>
+            <a:ext cx="685800" cy="384048"/>
           </a:xfrm>
           <a:prstGeom prst="rect">
             <a:avLst/>
@@ -23213,7 +23222,7 @@
                 <a:ea typeface="Trebuchet MS" pitchFamily="34" charset="-122"/>
                 <a:cs typeface="Trebuchet MS" pitchFamily="34" charset="-120"/>
               </a:rPr>
-              <a:t>e</a:t>
+              <a:t>n</a:t>
             </a:r>
             <a:endParaRPr lang="en-US" sz="900" dirty="0"/>
           </a:p>
@@ -23505,7 +23514,7 @@
                 <a:ea typeface="Calibri" pitchFamily="34" charset="-122"/>
                 <a:cs typeface="Calibri" pitchFamily="34" charset="-120"/>
               </a:rPr>
-              <a:t>Word Labs  •  wordlabs.app  •  Root: 'value' = worth, importance, or price</a:t>
+              <a:t>Word Labs  •  wordlabs.app  •  Root: 'value' = worth, importance, price</a:t>
             </a:r>
             <a:endParaRPr lang="en-US" sz="800" dirty="0"/>
           </a:p>
@@ -24332,7 +24341,7 @@
                 <a:ea typeface="Calibri" pitchFamily="34" charset="-122"/>
                 <a:cs typeface="Calibri" pitchFamily="34" charset="-120"/>
               </a:rPr>
-              <a:t>Word Labs  •  wordlabs.app  •  Root: 'value' = worth, importance, or price</a:t>
+              <a:t>Word Labs  •  wordlabs.app  •  Root: 'value' = worth, importance, price</a:t>
             </a:r>
             <a:endParaRPr lang="en-US" sz="800" dirty="0"/>
           </a:p>
@@ -24649,7 +24658,7 @@
                 <a:ea typeface="Calibri" pitchFamily="34" charset="-122"/>
                 <a:cs typeface="Calibri" pitchFamily="34" charset="-120"/>
               </a:rPr>
-              <a:t>below or less than</a:t>
+              <a:t>below; too little</a:t>
             </a:r>
             <a:endParaRPr lang="en-US" sz="850" dirty="0"/>
           </a:p>
@@ -24873,7 +24882,7 @@
                 <a:ea typeface="Calibri" pitchFamily="34" charset="-122"/>
                 <a:cs typeface="Calibri" pitchFamily="34" charset="-120"/>
               </a:rPr>
-              <a:t>past tense; having been done</a:t>
+              <a:t>past tense</a:t>
             </a:r>
             <a:endParaRPr lang="en-US" sz="850" dirty="0"/>
           </a:p>
@@ -25468,7 +25477,7 @@
                 <a:ea typeface="Calibri" pitchFamily="34" charset="-122"/>
                 <a:cs typeface="Calibri" pitchFamily="34" charset="-120"/>
               </a:rPr>
-              <a:t>Word Labs  •  wordlabs.app  •  Root: 'value' = worth, importance, or price</a:t>
+              <a:t>Word Labs  •  wordlabs.app  •  Root: 'value' = worth, importance, price</a:t>
             </a:r>
             <a:endParaRPr lang="en-US" sz="800" dirty="0"/>
           </a:p>
@@ -25541,7 +25550,7 @@
                 <a:ea typeface="Trebuchet MS" pitchFamily="34" charset="-122"/>
                 <a:cs typeface="Trebuchet MS" pitchFamily="34" charset="-120"/>
               </a:rPr>
-              <a:t>We are learning that the root 'value' means 'worth, importance, or price'.</a:t>
+              <a:t>We are learning that the root 'value' means 'worth, importance, price'.</a:t>
             </a:r>
             <a:endParaRPr lang="en-US" sz="2000" dirty="0"/>
           </a:p>
@@ -26187,7 +26196,7 @@
                 <a:ea typeface="Calibri" pitchFamily="34" charset="-122"/>
                 <a:cs typeface="Calibri" pitchFamily="34" charset="-120"/>
               </a:rPr>
-              <a:t>Word Labs  •  wordlabs.app  •  Root: 'value' = worth, importance, or price</a:t>
+              <a:t>Word Labs  •  wordlabs.app  •  Root: 'value' = worth, importance, price</a:t>
             </a:r>
             <a:endParaRPr lang="en-US" sz="800" dirty="0"/>
           </a:p>
@@ -26504,7 +26513,7 @@
                 <a:ea typeface="Calibri" pitchFamily="34" charset="-122"/>
                 <a:cs typeface="Calibri" pitchFamily="34" charset="-120"/>
               </a:rPr>
-              <a:t>below or less than</a:t>
+              <a:t>below; too little</a:t>
             </a:r>
             <a:endParaRPr lang="en-US" sz="850" dirty="0"/>
           </a:p>
@@ -26728,7 +26737,7 @@
                 <a:ea typeface="Calibri" pitchFamily="34" charset="-122"/>
                 <a:cs typeface="Calibri" pitchFamily="34" charset="-120"/>
               </a:rPr>
-              <a:t>past tense; having been done</a:t>
+              <a:t>past tense</a:t>
             </a:r>
             <a:endParaRPr lang="en-US" sz="850" dirty="0"/>
           </a:p>
@@ -27665,7 +27674,7 @@
                 <a:ea typeface="Calibri" pitchFamily="34" charset="-122"/>
                 <a:cs typeface="Calibri" pitchFamily="34" charset="-120"/>
               </a:rPr>
-              <a:t>Word Labs  •  wordlabs.app  •  Root: 'value' = worth, importance, or price</a:t>
+              <a:t>Word Labs  •  wordlabs.app  •  Root: 'value' = worth, importance, price</a:t>
             </a:r>
             <a:endParaRPr lang="en-US" sz="800" dirty="0"/>
           </a:p>
@@ -27982,7 +27991,7 @@
                 <a:ea typeface="Calibri" pitchFamily="34" charset="-122"/>
                 <a:cs typeface="Calibri" pitchFamily="34" charset="-120"/>
               </a:rPr>
-              <a:t>below or less than</a:t>
+              <a:t>below; too little</a:t>
             </a:r>
             <a:endParaRPr lang="en-US" sz="850" dirty="0"/>
           </a:p>
@@ -28206,7 +28215,7 @@
                 <a:ea typeface="Calibri" pitchFamily="34" charset="-122"/>
                 <a:cs typeface="Calibri" pitchFamily="34" charset="-120"/>
               </a:rPr>
-              <a:t>past tense; having been done</a:t>
+              <a:t>past tense</a:t>
             </a:r>
             <a:endParaRPr lang="en-US" sz="850" dirty="0"/>
           </a:p>
@@ -28826,8 +28835,8 @@
         </p:nvSpPr>
         <p:spPr>
           <a:xfrm>
-            <a:off x="1951330" y="4169664"/>
-            <a:ext cx="676656" cy="475488"/>
+            <a:off x="2023872" y="4169664"/>
+            <a:ext cx="685800" cy="475488"/>
           </a:xfrm>
           <a:prstGeom prst="rect">
             <a:avLst>
@@ -28853,8 +28862,8 @@
         </p:nvSpPr>
         <p:spPr>
           <a:xfrm>
-            <a:off x="1951330" y="4169664"/>
-            <a:ext cx="676656" cy="475488"/>
+            <a:off x="2023872" y="4169664"/>
+            <a:ext cx="685800" cy="475488"/>
           </a:xfrm>
           <a:prstGeom prst="rect">
             <a:avLst/>
@@ -28892,8 +28901,8 @@
         </p:nvSpPr>
         <p:spPr>
           <a:xfrm>
-            <a:off x="2677363" y="4169664"/>
-            <a:ext cx="676656" cy="475488"/>
+            <a:off x="2831592" y="4169664"/>
+            <a:ext cx="685800" cy="475488"/>
           </a:xfrm>
           <a:prstGeom prst="rect">
             <a:avLst>
@@ -28919,8 +28928,8 @@
         </p:nvSpPr>
         <p:spPr>
           <a:xfrm>
-            <a:off x="2677363" y="4169664"/>
-            <a:ext cx="676656" cy="475488"/>
+            <a:off x="2831592" y="4169664"/>
+            <a:ext cx="685800" cy="475488"/>
           </a:xfrm>
           <a:prstGeom prst="rect">
             <a:avLst/>
@@ -28958,8 +28967,8 @@
         </p:nvSpPr>
         <p:spPr>
           <a:xfrm>
-            <a:off x="3403397" y="4169664"/>
-            <a:ext cx="676656" cy="475488"/>
+            <a:off x="3639312" y="4169664"/>
+            <a:ext cx="685800" cy="475488"/>
           </a:xfrm>
           <a:prstGeom prst="rect">
             <a:avLst>
@@ -28985,8 +28994,8 @@
         </p:nvSpPr>
         <p:spPr>
           <a:xfrm>
-            <a:off x="3403397" y="4169664"/>
-            <a:ext cx="676656" cy="475488"/>
+            <a:off x="3639312" y="4169664"/>
+            <a:ext cx="685800" cy="475488"/>
           </a:xfrm>
           <a:prstGeom prst="rect">
             <a:avLst/>
@@ -29024,8 +29033,8 @@
         </p:nvSpPr>
         <p:spPr>
           <a:xfrm>
-            <a:off x="4129430" y="4169664"/>
-            <a:ext cx="676656" cy="475488"/>
+            <a:off x="4447032" y="4169664"/>
+            <a:ext cx="685800" cy="475488"/>
           </a:xfrm>
           <a:prstGeom prst="rect">
             <a:avLst>
@@ -29051,8 +29060,8 @@
         </p:nvSpPr>
         <p:spPr>
           <a:xfrm>
-            <a:off x="4129430" y="4169664"/>
-            <a:ext cx="676656" cy="475488"/>
+            <a:off x="4447032" y="4169664"/>
+            <a:ext cx="685800" cy="475488"/>
           </a:xfrm>
           <a:prstGeom prst="rect">
             <a:avLst/>
@@ -29090,8 +29099,8 @@
         </p:nvSpPr>
         <p:spPr>
           <a:xfrm>
-            <a:off x="4855464" y="4169664"/>
-            <a:ext cx="676656" cy="475488"/>
+            <a:off x="5254752" y="4169664"/>
+            <a:ext cx="685800" cy="475488"/>
           </a:xfrm>
           <a:prstGeom prst="rect">
             <a:avLst>
@@ -29117,8 +29126,8 @@
         </p:nvSpPr>
         <p:spPr>
           <a:xfrm>
-            <a:off x="4855464" y="4169664"/>
-            <a:ext cx="676656" cy="475488"/>
+            <a:off x="5254752" y="4169664"/>
+            <a:ext cx="685800" cy="475488"/>
           </a:xfrm>
           <a:prstGeom prst="rect">
             <a:avLst/>
@@ -29156,8 +29165,8 @@
         </p:nvSpPr>
         <p:spPr>
           <a:xfrm>
-            <a:off x="5581498" y="4169664"/>
-            <a:ext cx="676656" cy="475488"/>
+            <a:off x="6062472" y="4169664"/>
+            <a:ext cx="685800" cy="475488"/>
           </a:xfrm>
           <a:prstGeom prst="rect">
             <a:avLst>
@@ -29183,8 +29192,8 @@
         </p:nvSpPr>
         <p:spPr>
           <a:xfrm>
-            <a:off x="5581498" y="4169664"/>
-            <a:ext cx="676656" cy="475488"/>
+            <a:off x="6062472" y="4169664"/>
+            <a:ext cx="685800" cy="475488"/>
           </a:xfrm>
           <a:prstGeom prst="rect">
             <a:avLst/>
@@ -29208,7 +29217,7 @@
                 <a:ea typeface="Trebuchet MS" pitchFamily="34" charset="-122"/>
                 <a:cs typeface="Trebuchet MS" pitchFamily="34" charset="-120"/>
               </a:rPr>
-              <a:t>a</a:t>
+              <a:t>al</a:t>
             </a:r>
             <a:endParaRPr lang="en-US" sz="900" dirty="0"/>
           </a:p>
@@ -29222,8 +29231,8 @@
         </p:nvSpPr>
         <p:spPr>
           <a:xfrm>
-            <a:off x="6307531" y="4169664"/>
-            <a:ext cx="676656" cy="475488"/>
+            <a:off x="6870192" y="4169664"/>
+            <a:ext cx="685800" cy="475488"/>
           </a:xfrm>
           <a:prstGeom prst="rect">
             <a:avLst>
@@ -29249,8 +29258,8 @@
         </p:nvSpPr>
         <p:spPr>
           <a:xfrm>
-            <a:off x="6307531" y="4169664"/>
-            <a:ext cx="676656" cy="475488"/>
+            <a:off x="6870192" y="4169664"/>
+            <a:ext cx="685800" cy="475488"/>
           </a:xfrm>
           <a:prstGeom prst="rect">
             <a:avLst/>
@@ -29274,7 +29283,7 @@
                 <a:ea typeface="Trebuchet MS" pitchFamily="34" charset="-122"/>
                 <a:cs typeface="Trebuchet MS" pitchFamily="34" charset="-120"/>
               </a:rPr>
-              <a:t>l</a:t>
+              <a:t>u</a:t>
             </a:r>
             <a:endParaRPr lang="en-US" sz="900" dirty="0"/>
           </a:p>
@@ -29288,8 +29297,8 @@
         </p:nvSpPr>
         <p:spPr>
           <a:xfrm>
-            <a:off x="7033565" y="4169664"/>
-            <a:ext cx="676656" cy="475488"/>
+            <a:off x="7677912" y="4169664"/>
+            <a:ext cx="685800" cy="475488"/>
           </a:xfrm>
           <a:prstGeom prst="rect">
             <a:avLst>
@@ -29315,74 +29324,8 @@
         </p:nvSpPr>
         <p:spPr>
           <a:xfrm>
-            <a:off x="7033565" y="4169664"/>
-            <a:ext cx="676656" cy="475488"/>
-          </a:xfrm>
-          <a:prstGeom prst="rect">
-            <a:avLst/>
-          </a:prstGeom>
-          <a:noFill/>
-          <a:ln/>
-        </p:spPr>
-        <p:txBody>
-          <a:bodyPr wrap="square" lIns="0" tIns="0" rIns="0" bIns="0" rtlCol="0" anchor="ctr"/>
-          <a:lstStyle/>
-          <a:p>
-            <a:pPr algn="ctr" indent="0" marL="0">
-              <a:buNone/>
-            </a:pPr>
-            <a:r>
-              <a:rPr lang="en-US" sz="900" b="1" dirty="0">
-                <a:solidFill>
-                  <a:srgbClr val="9D174D"/>
-                </a:solidFill>
-                <a:latin typeface="Trebuchet MS" pitchFamily="34" charset="0"/>
-                <a:ea typeface="Trebuchet MS" pitchFamily="34" charset="-122"/>
-                <a:cs typeface="Trebuchet MS" pitchFamily="34" charset="-120"/>
-              </a:rPr>
-              <a:t>u</a:t>
-            </a:r>
-            <a:endParaRPr lang="en-US" sz="900" dirty="0"/>
-          </a:p>
-        </p:txBody>
-      </p:sp>
-      <p:sp>
-        <p:nvSpPr>
-          <p:cNvPr id="59" name="Shape 57"/>
-          <p:cNvSpPr/>
-          <p:nvPr/>
-        </p:nvSpPr>
-        <p:spPr>
-          <a:xfrm>
-            <a:off x="7759598" y="4169664"/>
-            <a:ext cx="676656" cy="475488"/>
-          </a:xfrm>
-          <a:prstGeom prst="rect">
-            <a:avLst>
-              <a:gd name="adj" fmla="val 7692"/>
-            </a:avLst>
-          </a:prstGeom>
-          <a:solidFill>
-            <a:srgbClr val="FFFFFF"/>
-          </a:solidFill>
-          <a:ln w="12700">
-            <a:solidFill>
-              <a:srgbClr val="DB2777"/>
-            </a:solidFill>
-            <a:prstDash val="solid"/>
-          </a:ln>
-        </p:spPr>
-      </p:sp>
-      <p:sp>
-        <p:nvSpPr>
-          <p:cNvPr id="60" name="Text 58"/>
-          <p:cNvSpPr/>
-          <p:nvPr/>
-        </p:nvSpPr>
-        <p:spPr>
-          <a:xfrm>
-            <a:off x="7759598" y="4169664"/>
-            <a:ext cx="676656" cy="475488"/>
+            <a:off x="7677912" y="4169664"/>
+            <a:ext cx="685800" cy="475488"/>
           </a:xfrm>
           <a:prstGeom prst="rect">
             <a:avLst/>
@@ -29698,7 +29641,7 @@
                 <a:ea typeface="Calibri" pitchFamily="34" charset="-122"/>
                 <a:cs typeface="Calibri" pitchFamily="34" charset="-120"/>
               </a:rPr>
-              <a:t>Word Labs  •  wordlabs.app  •  Root: 'value' = worth, importance, or price</a:t>
+              <a:t>Word Labs  •  wordlabs.app  •  Root: 'value' = worth, importance, price</a:t>
             </a:r>
             <a:endParaRPr lang="en-US" sz="800" dirty="0"/>
           </a:p>
@@ -29837,7 +29780,7 @@
                 <a:ea typeface="Trebuchet MS" pitchFamily="34" charset="-122"/>
                 <a:cs typeface="Trebuchet MS" pitchFamily="34" charset="-120"/>
               </a:rPr>
-              <a:t>valued</a:t>
+              <a:t>revalue</a:t>
             </a:r>
             <a:endParaRPr lang="en-US" sz="2800" dirty="0"/>
           </a:p>
@@ -30525,7 +30468,7 @@
                 <a:ea typeface="Calibri" pitchFamily="34" charset="-122"/>
                 <a:cs typeface="Calibri" pitchFamily="34" charset="-120"/>
               </a:rPr>
-              <a:t>Word Labs  •  wordlabs.app  •  Root: 'value' = worth, importance, or price</a:t>
+              <a:t>Word Labs  •  wordlabs.app  •  Root: 'value' = worth, importance, price</a:t>
             </a:r>
             <a:endParaRPr lang="en-US" sz="800" dirty="0"/>
           </a:p>
@@ -30664,7 +30607,7 @@
                 <a:ea typeface="Trebuchet MS" pitchFamily="34" charset="-122"/>
                 <a:cs typeface="Trebuchet MS" pitchFamily="34" charset="-120"/>
               </a:rPr>
-              <a:t>valued</a:t>
+              <a:t>revalue</a:t>
             </a:r>
             <a:endParaRPr lang="en-US" sz="2800" dirty="0"/>
           </a:p>
@@ -30753,11 +30696,11 @@
             </a:avLst>
           </a:prstGeom>
           <a:solidFill>
-            <a:srgbClr val="CCFBF1"/>
+            <a:srgbClr val="DDD6FE"/>
           </a:solidFill>
           <a:ln w="19050">
             <a:solidFill>
-              <a:srgbClr val="0D9488"/>
+              <a:srgbClr val="7C3AED"/>
             </a:solidFill>
             <a:prstDash val="solid"/>
           </a:ln>
@@ -30797,13 +30740,13 @@
             <a:r>
               <a:rPr lang="en-US" sz="1300" b="1" dirty="0">
                 <a:solidFill>
-                  <a:srgbClr val="0F766E"/>
+                  <a:srgbClr val="4C1D95"/>
                 </a:solidFill>
                 <a:latin typeface="Trebuchet MS" pitchFamily="34" charset="0"/>
                 <a:ea typeface="Trebuchet MS" pitchFamily="34" charset="-122"/>
                 <a:cs typeface="Trebuchet MS" pitchFamily="34" charset="-120"/>
               </a:rPr>
-              <a:t>value</a:t>
+              <a:t>re</a:t>
             </a:r>
             <a:endParaRPr lang="en-US" sz="1300" dirty="0"/>
           </a:p>
@@ -30842,7 +30785,7 @@
                 <a:ea typeface="Calibri" pitchFamily="34" charset="-122"/>
                 <a:cs typeface="Calibri" pitchFamily="34" charset="-120"/>
               </a:rPr>
-              <a:t>worth</a:t>
+              <a:t>again</a:t>
             </a:r>
             <a:endParaRPr lang="en-US" sz="850" dirty="0"/>
           </a:p>
@@ -30865,11 +30808,11 @@
             </a:avLst>
           </a:prstGeom>
           <a:solidFill>
-            <a:srgbClr val="FCE7F3"/>
+            <a:srgbClr val="CCFBF1"/>
           </a:solidFill>
           <a:ln w="19050">
             <a:solidFill>
-              <a:srgbClr val="DB2777"/>
+              <a:srgbClr val="0D9488"/>
             </a:solidFill>
             <a:prstDash val="solid"/>
           </a:ln>
@@ -30909,13 +30852,13 @@
             <a:r>
               <a:rPr lang="en-US" sz="1300" b="1" dirty="0">
                 <a:solidFill>
-                  <a:srgbClr val="9D174D"/>
+                  <a:srgbClr val="0F766E"/>
                 </a:solidFill>
                 <a:latin typeface="Trebuchet MS" pitchFamily="34" charset="0"/>
                 <a:ea typeface="Trebuchet MS" pitchFamily="34" charset="-122"/>
                 <a:cs typeface="Trebuchet MS" pitchFamily="34" charset="-120"/>
               </a:rPr>
-              <a:t>ed</a:t>
+              <a:t>value</a:t>
             </a:r>
             <a:endParaRPr lang="en-US" sz="1300" dirty="0"/>
           </a:p>
@@ -30954,7 +30897,7 @@
                 <a:ea typeface="Calibri" pitchFamily="34" charset="-122"/>
                 <a:cs typeface="Calibri" pitchFamily="34" charset="-120"/>
               </a:rPr>
-              <a:t>past tense; having been done</a:t>
+              <a:t>worth</a:t>
             </a:r>
             <a:endParaRPr lang="en-US" sz="850" dirty="0"/>
           </a:p>
@@ -30962,57 +30905,150 @@
       </p:sp>
       <p:sp>
         <p:nvSpPr>
-          <p:cNvPr id="22" name="Text 20"/>
-          <p:cNvSpPr/>
-          <p:nvPr/>
-        </p:nvSpPr>
-        <p:spPr>
-          <a:xfrm>
-            <a:off x="5803392" y="2752344"/>
-            <a:ext cx="1828800" cy="182880"/>
-          </a:xfrm>
-          <a:prstGeom prst="rect">
-            <a:avLst/>
-          </a:prstGeom>
-          <a:noFill/>
-          <a:ln/>
-        </p:spPr>
-        <p:txBody>
-          <a:bodyPr wrap="square" lIns="0" tIns="0" rIns="0" bIns="0" rtlCol="0" anchor="t"/>
-          <a:lstStyle/>
-          <a:p>
-            <a:pPr algn="ctr" indent="0" marL="0">
-              <a:buNone/>
-            </a:pPr>
-            <a:r>
-              <a:rPr lang="en-US" sz="700" i="1" dirty="0">
-                <a:solidFill>
-                  <a:srgbClr val="94A3B8"/>
+          <p:cNvPr id="22" name="Shape 20"/>
+          <p:cNvSpPr/>
+          <p:nvPr/>
+        </p:nvSpPr>
+        <p:spPr>
+          <a:xfrm>
+            <a:off x="365760" y="3273552"/>
+            <a:ext cx="1371600" cy="658368"/>
+          </a:xfrm>
+          <a:prstGeom prst="rect">
+            <a:avLst>
+              <a:gd name="adj" fmla="val 8333"/>
+            </a:avLst>
+          </a:prstGeom>
+          <a:solidFill>
+            <a:srgbClr val="E2E8F0"/>
+          </a:solidFill>
+          <a:ln w="12700">
+            <a:solidFill>
+              <a:srgbClr val="E2E8F0"/>
+            </a:solidFill>
+            <a:prstDash val="solid"/>
+          </a:ln>
+        </p:spPr>
+      </p:sp>
+      <p:sp>
+        <p:nvSpPr>
+          <p:cNvPr id="23" name="Text 21"/>
+          <p:cNvSpPr/>
+          <p:nvPr/>
+        </p:nvSpPr>
+        <p:spPr>
+          <a:xfrm>
+            <a:off x="365760" y="3273552"/>
+            <a:ext cx="1371600" cy="658368"/>
+          </a:xfrm>
+          <a:prstGeom prst="rect">
+            <a:avLst/>
+          </a:prstGeom>
+          <a:noFill/>
+          <a:ln/>
+        </p:spPr>
+        <p:txBody>
+          <a:bodyPr wrap="square" lIns="0" tIns="0" rIns="0" bIns="0" rtlCol="0" anchor="ctr"/>
+          <a:lstStyle/>
+          <a:p>
+            <a:pPr algn="ctr" indent="0" marL="0">
+              <a:buNone/>
+            </a:pPr>
+            <a:r>
+              <a:rPr lang="en-US" sz="1100" b="1" dirty="0">
+                <a:solidFill>
+                  <a:srgbClr val="475569"/>
+                </a:solidFill>
+                <a:latin typeface="Trebuchet MS" pitchFamily="34" charset="0"/>
+                <a:ea typeface="Trebuchet MS" pitchFamily="34" charset="-122"/>
+                <a:cs typeface="Trebuchet MS" pitchFamily="34" charset="-120"/>
+              </a:rPr>
+              <a:t>Syllables</a:t>
+            </a:r>
+            <a:endParaRPr lang="en-US" sz="1100" dirty="0"/>
+          </a:p>
+        </p:txBody>
+      </p:sp>
+      <p:sp>
+        <p:nvSpPr>
+          <p:cNvPr id="24" name="Shape 22"/>
+          <p:cNvSpPr/>
+          <p:nvPr/>
+        </p:nvSpPr>
+        <p:spPr>
+          <a:xfrm>
+            <a:off x="1874520" y="3273552"/>
+            <a:ext cx="6903720" cy="658368"/>
+          </a:xfrm>
+          <a:prstGeom prst="rect">
+            <a:avLst>
+              <a:gd name="adj" fmla="val 8333"/>
+            </a:avLst>
+          </a:prstGeom>
+          <a:solidFill>
+            <a:srgbClr val="F8FAFC"/>
+          </a:solidFill>
+          <a:ln w="12700">
+            <a:solidFill>
+              <a:srgbClr val="E2E8F0"/>
+            </a:solidFill>
+            <a:prstDash val="dash"/>
+          </a:ln>
+        </p:spPr>
+      </p:sp>
+      <p:sp>
+        <p:nvSpPr>
+          <p:cNvPr id="25" name="Text 23"/>
+          <p:cNvSpPr/>
+          <p:nvPr/>
+        </p:nvSpPr>
+        <p:spPr>
+          <a:xfrm>
+            <a:off x="1874520" y="3273552"/>
+            <a:ext cx="6903720" cy="658368"/>
+          </a:xfrm>
+          <a:prstGeom prst="rect">
+            <a:avLst/>
+          </a:prstGeom>
+          <a:noFill/>
+          <a:ln/>
+        </p:spPr>
+        <p:txBody>
+          <a:bodyPr wrap="square" rtlCol="0" anchor="ctr"/>
+          <a:lstStyle/>
+          <a:p>
+            <a:pPr algn="ctr" indent="0" marL="0">
+              <a:buNone/>
+            </a:pPr>
+            <a:r>
+              <a:rPr lang="en-US" sz="1100" i="1" dirty="0">
+                <a:solidFill>
+                  <a:srgbClr val="CBD5E1"/>
                 </a:solidFill>
                 <a:latin typeface="Calibri" pitchFamily="34" charset="0"/>
                 <a:ea typeface="Calibri" pitchFamily="34" charset="-122"/>
                 <a:cs typeface="Calibri" pitchFamily="34" charset="-120"/>
               </a:rPr>
-              <a:t>'e' dropped before vowel suffix</a:t>
-            </a:r>
-            <a:endParaRPr lang="en-US" sz="700" dirty="0"/>
-          </a:p>
-        </p:txBody>
-      </p:sp>
-      <p:sp>
-        <p:nvSpPr>
-          <p:cNvPr id="23" name="Shape 21"/>
-          <p:cNvSpPr/>
-          <p:nvPr/>
-        </p:nvSpPr>
-        <p:spPr>
-          <a:xfrm>
-            <a:off x="365760" y="3273552"/>
-            <a:ext cx="1371600" cy="658368"/>
+              <a:t>Write here...</a:t>
+            </a:r>
+            <a:endParaRPr lang="en-US" sz="1100" dirty="0"/>
+          </a:p>
+        </p:txBody>
+      </p:sp>
+      <p:sp>
+        <p:nvSpPr>
+          <p:cNvPr id="26" name="Shape 24"/>
+          <p:cNvSpPr/>
+          <p:nvPr/>
+        </p:nvSpPr>
+        <p:spPr>
+          <a:xfrm>
+            <a:off x="365760" y="4096512"/>
+            <a:ext cx="1371600" cy="804672"/>
           </a:xfrm>
           <a:prstGeom prst="rect">
             <a:avLst>
-              <a:gd name="adj" fmla="val 8333"/>
+              <a:gd name="adj" fmla="val 6818"/>
             </a:avLst>
           </a:prstGeom>
           <a:solidFill>
@@ -31028,14 +31064,14 @@
       </p:sp>
       <p:sp>
         <p:nvSpPr>
-          <p:cNvPr id="24" name="Text 22"/>
-          <p:cNvSpPr/>
-          <p:nvPr/>
-        </p:nvSpPr>
-        <p:spPr>
-          <a:xfrm>
-            <a:off x="365760" y="3273552"/>
-            <a:ext cx="1371600" cy="658368"/>
+          <p:cNvPr id="27" name="Text 25"/>
+          <p:cNvSpPr/>
+          <p:nvPr/>
+        </p:nvSpPr>
+        <p:spPr>
+          <a:xfrm>
+            <a:off x="365760" y="4096512"/>
+            <a:ext cx="1371600" cy="804672"/>
           </a:xfrm>
           <a:prstGeom prst="rect">
             <a:avLst/>
@@ -31059,7 +31095,7 @@
                 <a:ea typeface="Trebuchet MS" pitchFamily="34" charset="-122"/>
                 <a:cs typeface="Trebuchet MS" pitchFamily="34" charset="-120"/>
               </a:rPr>
-              <a:t>Syllables</a:t>
+              <a:t>Phonemes</a:t>
             </a:r>
             <a:endParaRPr lang="en-US" sz="1100" dirty="0"/>
           </a:p>
@@ -31067,80 +31103,14 @@
       </p:sp>
       <p:sp>
         <p:nvSpPr>
-          <p:cNvPr id="25" name="Shape 23"/>
-          <p:cNvSpPr/>
-          <p:nvPr/>
-        </p:nvSpPr>
-        <p:spPr>
-          <a:xfrm>
-            <a:off x="1874520" y="3273552"/>
-            <a:ext cx="6903720" cy="658368"/>
-          </a:xfrm>
-          <a:prstGeom prst="rect">
-            <a:avLst>
-              <a:gd name="adj" fmla="val 8333"/>
-            </a:avLst>
-          </a:prstGeom>
-          <a:solidFill>
-            <a:srgbClr val="F8FAFC"/>
-          </a:solidFill>
-          <a:ln w="12700">
-            <a:solidFill>
-              <a:srgbClr val="E2E8F0"/>
-            </a:solidFill>
-            <a:prstDash val="dash"/>
-          </a:ln>
-        </p:spPr>
-      </p:sp>
-      <p:sp>
-        <p:nvSpPr>
-          <p:cNvPr id="26" name="Text 24"/>
-          <p:cNvSpPr/>
-          <p:nvPr/>
-        </p:nvSpPr>
-        <p:spPr>
-          <a:xfrm>
-            <a:off x="1874520" y="3273552"/>
-            <a:ext cx="6903720" cy="658368"/>
-          </a:xfrm>
-          <a:prstGeom prst="rect">
-            <a:avLst/>
-          </a:prstGeom>
-          <a:noFill/>
-          <a:ln/>
-        </p:spPr>
-        <p:txBody>
-          <a:bodyPr wrap="square" rtlCol="0" anchor="ctr"/>
-          <a:lstStyle/>
-          <a:p>
-            <a:pPr algn="ctr" indent="0" marL="0">
-              <a:buNone/>
-            </a:pPr>
-            <a:r>
-              <a:rPr lang="en-US" sz="1100" i="1" dirty="0">
-                <a:solidFill>
-                  <a:srgbClr val="CBD5E1"/>
-                </a:solidFill>
-                <a:latin typeface="Calibri" pitchFamily="34" charset="0"/>
-                <a:ea typeface="Calibri" pitchFamily="34" charset="-122"/>
-                <a:cs typeface="Calibri" pitchFamily="34" charset="-120"/>
-              </a:rPr>
-              <a:t>Write here...</a:t>
-            </a:r>
-            <a:endParaRPr lang="en-US" sz="1100" dirty="0"/>
-          </a:p>
-        </p:txBody>
-      </p:sp>
-      <p:sp>
-        <p:nvSpPr>
-          <p:cNvPr id="27" name="Shape 25"/>
-          <p:cNvSpPr/>
-          <p:nvPr/>
-        </p:nvSpPr>
-        <p:spPr>
-          <a:xfrm>
-            <a:off x="365760" y="4096512"/>
-            <a:ext cx="1371600" cy="804672"/>
+          <p:cNvPr id="28" name="Shape 26"/>
+          <p:cNvSpPr/>
+          <p:nvPr/>
+        </p:nvSpPr>
+        <p:spPr>
+          <a:xfrm>
+            <a:off x="1874520" y="4096512"/>
+            <a:ext cx="6903720" cy="804672"/>
           </a:xfrm>
           <a:prstGeom prst="rect">
             <a:avLst>
@@ -31148,85 +31118,19 @@
             </a:avLst>
           </a:prstGeom>
           <a:solidFill>
-            <a:srgbClr val="E2E8F0"/>
+            <a:srgbClr val="F8FAFC"/>
           </a:solidFill>
           <a:ln w="12700">
             <a:solidFill>
               <a:srgbClr val="E2E8F0"/>
             </a:solidFill>
-            <a:prstDash val="solid"/>
-          </a:ln>
-        </p:spPr>
-      </p:sp>
-      <p:sp>
-        <p:nvSpPr>
-          <p:cNvPr id="28" name="Text 26"/>
-          <p:cNvSpPr/>
-          <p:nvPr/>
-        </p:nvSpPr>
-        <p:spPr>
-          <a:xfrm>
-            <a:off x="365760" y="4096512"/>
-            <a:ext cx="1371600" cy="804672"/>
-          </a:xfrm>
-          <a:prstGeom prst="rect">
-            <a:avLst/>
-          </a:prstGeom>
-          <a:noFill/>
-          <a:ln/>
-        </p:spPr>
-        <p:txBody>
-          <a:bodyPr wrap="square" lIns="0" tIns="0" rIns="0" bIns="0" rtlCol="0" anchor="ctr"/>
-          <a:lstStyle/>
-          <a:p>
-            <a:pPr algn="ctr" indent="0" marL="0">
-              <a:buNone/>
-            </a:pPr>
-            <a:r>
-              <a:rPr lang="en-US" sz="1100" b="1" dirty="0">
-                <a:solidFill>
-                  <a:srgbClr val="475569"/>
-                </a:solidFill>
-                <a:latin typeface="Trebuchet MS" pitchFamily="34" charset="0"/>
-                <a:ea typeface="Trebuchet MS" pitchFamily="34" charset="-122"/>
-                <a:cs typeface="Trebuchet MS" pitchFamily="34" charset="-120"/>
-              </a:rPr>
-              <a:t>Phonemes</a:t>
-            </a:r>
-            <a:endParaRPr lang="en-US" sz="1100" dirty="0"/>
-          </a:p>
-        </p:txBody>
-      </p:sp>
-      <p:sp>
-        <p:nvSpPr>
-          <p:cNvPr id="29" name="Shape 27"/>
-          <p:cNvSpPr/>
-          <p:nvPr/>
-        </p:nvSpPr>
-        <p:spPr>
-          <a:xfrm>
-            <a:off x="1874520" y="4096512"/>
-            <a:ext cx="6903720" cy="804672"/>
-          </a:xfrm>
-          <a:prstGeom prst="rect">
-            <a:avLst>
-              <a:gd name="adj" fmla="val 6818"/>
-            </a:avLst>
-          </a:prstGeom>
-          <a:solidFill>
-            <a:srgbClr val="F8FAFC"/>
-          </a:solidFill>
-          <a:ln w="12700">
-            <a:solidFill>
-              <a:srgbClr val="E2E8F0"/>
-            </a:solidFill>
             <a:prstDash val="dash"/>
           </a:ln>
         </p:spPr>
       </p:sp>
       <p:sp>
         <p:nvSpPr>
-          <p:cNvPr id="30" name="Text 28"/>
+          <p:cNvPr id="29" name="Text 27"/>
           <p:cNvSpPr/>
           <p:nvPr/>
         </p:nvSpPr>
@@ -31549,7 +31453,7 @@
                 <a:ea typeface="Calibri" pitchFamily="34" charset="-122"/>
                 <a:cs typeface="Calibri" pitchFamily="34" charset="-120"/>
               </a:rPr>
-              <a:t>Word Labs  •  wordlabs.app  •  Root: 'value' = worth, importance, or price</a:t>
+              <a:t>Word Labs  •  wordlabs.app  •  Root: 'value' = worth, importance, price</a:t>
             </a:r>
             <a:endParaRPr lang="en-US" sz="800" dirty="0"/>
           </a:p>
@@ -31688,7 +31592,7 @@
                 <a:ea typeface="Trebuchet MS" pitchFamily="34" charset="-122"/>
                 <a:cs typeface="Trebuchet MS" pitchFamily="34" charset="-120"/>
               </a:rPr>
-              <a:t>valued</a:t>
+              <a:t>revalue</a:t>
             </a:r>
             <a:endParaRPr lang="en-US" sz="2800" dirty="0"/>
           </a:p>
@@ -31777,11 +31681,11 @@
             </a:avLst>
           </a:prstGeom>
           <a:solidFill>
-            <a:srgbClr val="CCFBF1"/>
+            <a:srgbClr val="DDD6FE"/>
           </a:solidFill>
           <a:ln w="19050">
             <a:solidFill>
-              <a:srgbClr val="0D9488"/>
+              <a:srgbClr val="7C3AED"/>
             </a:solidFill>
             <a:prstDash val="solid"/>
           </a:ln>
@@ -31821,13 +31725,13 @@
             <a:r>
               <a:rPr lang="en-US" sz="1300" b="1" dirty="0">
                 <a:solidFill>
-                  <a:srgbClr val="0F766E"/>
+                  <a:srgbClr val="4C1D95"/>
                 </a:solidFill>
                 <a:latin typeface="Trebuchet MS" pitchFamily="34" charset="0"/>
                 <a:ea typeface="Trebuchet MS" pitchFamily="34" charset="-122"/>
                 <a:cs typeface="Trebuchet MS" pitchFamily="34" charset="-120"/>
               </a:rPr>
-              <a:t>value</a:t>
+              <a:t>re</a:t>
             </a:r>
             <a:endParaRPr lang="en-US" sz="1300" dirty="0"/>
           </a:p>
@@ -31866,7 +31770,7 @@
                 <a:ea typeface="Calibri" pitchFamily="34" charset="-122"/>
                 <a:cs typeface="Calibri" pitchFamily="34" charset="-120"/>
               </a:rPr>
-              <a:t>worth</a:t>
+              <a:t>again</a:t>
             </a:r>
             <a:endParaRPr lang="en-US" sz="850" dirty="0"/>
           </a:p>
@@ -31889,11 +31793,11 @@
             </a:avLst>
           </a:prstGeom>
           <a:solidFill>
-            <a:srgbClr val="FCE7F3"/>
+            <a:srgbClr val="CCFBF1"/>
           </a:solidFill>
           <a:ln w="19050">
             <a:solidFill>
-              <a:srgbClr val="DB2777"/>
+              <a:srgbClr val="0D9488"/>
             </a:solidFill>
             <a:prstDash val="solid"/>
           </a:ln>
@@ -31933,13 +31837,13 @@
             <a:r>
               <a:rPr lang="en-US" sz="1300" b="1" dirty="0">
                 <a:solidFill>
-                  <a:srgbClr val="9D174D"/>
+                  <a:srgbClr val="0F766E"/>
                 </a:solidFill>
                 <a:latin typeface="Trebuchet MS" pitchFamily="34" charset="0"/>
                 <a:ea typeface="Trebuchet MS" pitchFamily="34" charset="-122"/>
                 <a:cs typeface="Trebuchet MS" pitchFamily="34" charset="-120"/>
               </a:rPr>
-              <a:t>ed</a:t>
+              <a:t>value</a:t>
             </a:r>
             <a:endParaRPr lang="en-US" sz="1300" dirty="0"/>
           </a:p>
@@ -31978,7 +31882,7 @@
                 <a:ea typeface="Calibri" pitchFamily="34" charset="-122"/>
                 <a:cs typeface="Calibri" pitchFamily="34" charset="-120"/>
               </a:rPr>
-              <a:t>past tense; having been done</a:t>
+              <a:t>worth</a:t>
             </a:r>
             <a:endParaRPr lang="en-US" sz="850" dirty="0"/>
           </a:p>
@@ -31986,46 +31890,7 @@
       </p:sp>
       <p:sp>
         <p:nvSpPr>
-          <p:cNvPr id="22" name="Text 20"/>
-          <p:cNvSpPr/>
-          <p:nvPr/>
-        </p:nvSpPr>
-        <p:spPr>
-          <a:xfrm>
-            <a:off x="5803392" y="2752344"/>
-            <a:ext cx="1828800" cy="182880"/>
-          </a:xfrm>
-          <a:prstGeom prst="rect">
-            <a:avLst/>
-          </a:prstGeom>
-          <a:noFill/>
-          <a:ln/>
-        </p:spPr>
-        <p:txBody>
-          <a:bodyPr wrap="square" lIns="0" tIns="0" rIns="0" bIns="0" rtlCol="0" anchor="t"/>
-          <a:lstStyle/>
-          <a:p>
-            <a:pPr algn="ctr" indent="0" marL="0">
-              <a:buNone/>
-            </a:pPr>
-            <a:r>
-              <a:rPr lang="en-US" sz="700" i="1" dirty="0">
-                <a:solidFill>
-                  <a:srgbClr val="94A3B8"/>
-                </a:solidFill>
-                <a:latin typeface="Calibri" pitchFamily="34" charset="0"/>
-                <a:ea typeface="Calibri" pitchFamily="34" charset="-122"/>
-                <a:cs typeface="Calibri" pitchFamily="34" charset="-120"/>
-              </a:rPr>
-              <a:t>'e' dropped before vowel suffix</a:t>
-            </a:r>
-            <a:endParaRPr lang="en-US" sz="700" dirty="0"/>
-          </a:p>
-        </p:txBody>
-      </p:sp>
-      <p:sp>
-        <p:nvSpPr>
-          <p:cNvPr id="23" name="Shape 21"/>
+          <p:cNvPr id="22" name="Shape 20"/>
           <p:cNvSpPr/>
           <p:nvPr/>
         </p:nvSpPr>
@@ -32052,7 +31917,7 @@
       </p:sp>
       <p:sp>
         <p:nvSpPr>
-          <p:cNvPr id="24" name="Text 22"/>
+          <p:cNvPr id="23" name="Text 21"/>
           <p:cNvSpPr/>
           <p:nvPr/>
         </p:nvSpPr>
@@ -32091,7 +31956,7 @@
       </p:sp>
       <p:sp>
         <p:nvSpPr>
-          <p:cNvPr id="25" name="Shape 23"/>
+          <p:cNvPr id="24" name="Shape 22"/>
           <p:cNvSpPr/>
           <p:nvPr/>
         </p:nvSpPr>
@@ -32118,13 +31983,13 @@
       </p:sp>
       <p:sp>
         <p:nvSpPr>
-          <p:cNvPr id="26" name="Shape 24"/>
-          <p:cNvSpPr/>
-          <p:nvPr/>
-        </p:nvSpPr>
-        <p:spPr>
-          <a:xfrm>
-            <a:off x="2999232" y="3364992"/>
+          <p:cNvPr id="25" name="Shape 23"/>
+          <p:cNvSpPr/>
+          <p:nvPr/>
+        </p:nvSpPr>
+        <p:spPr>
+          <a:xfrm>
+            <a:off x="2313432" y="3364992"/>
             <a:ext cx="1645920" cy="475488"/>
           </a:xfrm>
           <a:prstGeom prst="rect">
@@ -32145,13 +32010,13 @@
       </p:sp>
       <p:sp>
         <p:nvSpPr>
-          <p:cNvPr id="27" name="Text 25"/>
-          <p:cNvSpPr/>
-          <p:nvPr/>
-        </p:nvSpPr>
-        <p:spPr>
-          <a:xfrm>
-            <a:off x="2999232" y="3364992"/>
+          <p:cNvPr id="26" name="Text 24"/>
+          <p:cNvSpPr/>
+          <p:nvPr/>
+        </p:nvSpPr>
+        <p:spPr>
+          <a:xfrm>
+            <a:off x="2313432" y="3364992"/>
             <a:ext cx="1645920" cy="475488"/>
           </a:xfrm>
           <a:prstGeom prst="rect">
@@ -32176,7 +32041,7 @@
                 <a:ea typeface="Trebuchet MS" pitchFamily="34" charset="-122"/>
                 <a:cs typeface="Trebuchet MS" pitchFamily="34" charset="-120"/>
               </a:rPr>
-              <a:t>val</a:t>
+              <a:t>re</a:t>
             </a:r>
             <a:endParaRPr lang="en-US" sz="1400" dirty="0"/>
           </a:p>
@@ -32184,14 +32049,14 @@
       </p:sp>
       <p:sp>
         <p:nvSpPr>
-          <p:cNvPr id="28" name="Text 26"/>
-          <p:cNvSpPr/>
-          <p:nvPr/>
-        </p:nvSpPr>
-        <p:spPr>
-          <a:xfrm>
-            <a:off x="4645152" y="3364992"/>
-            <a:ext cx="1097280" cy="475488"/>
+          <p:cNvPr id="27" name="Text 25"/>
+          <p:cNvSpPr/>
+          <p:nvPr/>
+        </p:nvSpPr>
+        <p:spPr>
+          <a:xfrm>
+            <a:off x="3959352" y="3364992"/>
+            <a:ext cx="411480" cy="475488"/>
           </a:xfrm>
           <a:prstGeom prst="rect">
             <a:avLst/>
@@ -32223,13 +32088,13 @@
       </p:sp>
       <p:sp>
         <p:nvSpPr>
-          <p:cNvPr id="29" name="Shape 27"/>
-          <p:cNvSpPr/>
-          <p:nvPr/>
-        </p:nvSpPr>
-        <p:spPr>
-          <a:xfrm>
-            <a:off x="5742432" y="3364992"/>
+          <p:cNvPr id="28" name="Shape 26"/>
+          <p:cNvSpPr/>
+          <p:nvPr/>
+        </p:nvSpPr>
+        <p:spPr>
+          <a:xfrm>
+            <a:off x="4370832" y="3364992"/>
             <a:ext cx="1645920" cy="475488"/>
           </a:xfrm>
           <a:prstGeom prst="rect">
@@ -32250,13 +32115,13 @@
       </p:sp>
       <p:sp>
         <p:nvSpPr>
-          <p:cNvPr id="30" name="Text 28"/>
-          <p:cNvSpPr/>
-          <p:nvPr/>
-        </p:nvSpPr>
-        <p:spPr>
-          <a:xfrm>
-            <a:off x="5742432" y="3364992"/>
+          <p:cNvPr id="29" name="Text 27"/>
+          <p:cNvSpPr/>
+          <p:nvPr/>
+        </p:nvSpPr>
+        <p:spPr>
+          <a:xfrm>
+            <a:off x="4370832" y="3364992"/>
             <a:ext cx="1645920" cy="475488"/>
           </a:xfrm>
           <a:prstGeom prst="rect">
@@ -32281,7 +32146,7 @@
                 <a:ea typeface="Trebuchet MS" pitchFamily="34" charset="-122"/>
                 <a:cs typeface="Trebuchet MS" pitchFamily="34" charset="-120"/>
               </a:rPr>
-              <a:t>ued</a:t>
+              <a:t>val</a:t>
             </a:r>
             <a:endParaRPr lang="en-US" sz="1400" dirty="0"/>
           </a:p>
@@ -32289,7 +32154,112 @@
       </p:sp>
       <p:sp>
         <p:nvSpPr>
+          <p:cNvPr id="30" name="Text 28"/>
+          <p:cNvSpPr/>
+          <p:nvPr/>
+        </p:nvSpPr>
+        <p:spPr>
+          <a:xfrm>
+            <a:off x="6016752" y="3364992"/>
+            <a:ext cx="411480" cy="475488"/>
+          </a:xfrm>
+          <a:prstGeom prst="rect">
+            <a:avLst/>
+          </a:prstGeom>
+          <a:noFill/>
+          <a:ln/>
+        </p:spPr>
+        <p:txBody>
+          <a:bodyPr wrap="square" lIns="0" tIns="0" rIns="0" bIns="0" rtlCol="0" anchor="ctr"/>
+          <a:lstStyle/>
+          <a:p>
+            <a:pPr algn="ctr" indent="0" marL="0">
+              <a:buNone/>
+            </a:pPr>
+            <a:r>
+              <a:rPr lang="en-US" sz="1600" b="1" dirty="0">
+                <a:solidFill>
+                  <a:srgbClr val="0D9488"/>
+                </a:solidFill>
+                <a:latin typeface="Trebuchet MS" pitchFamily="34" charset="0"/>
+                <a:ea typeface="Trebuchet MS" pitchFamily="34" charset="-122"/>
+                <a:cs typeface="Trebuchet MS" pitchFamily="34" charset="-120"/>
+              </a:rPr>
+              <a:t>·</a:t>
+            </a:r>
+            <a:endParaRPr lang="en-US" sz="1600" dirty="0"/>
+          </a:p>
+        </p:txBody>
+      </p:sp>
+      <p:sp>
+        <p:nvSpPr>
           <p:cNvPr id="31" name="Shape 29"/>
+          <p:cNvSpPr/>
+          <p:nvPr/>
+        </p:nvSpPr>
+        <p:spPr>
+          <a:xfrm>
+            <a:off x="6428232" y="3364992"/>
+            <a:ext cx="1645920" cy="475488"/>
+          </a:xfrm>
+          <a:prstGeom prst="rect">
+            <a:avLst>
+              <a:gd name="adj" fmla="val 9615"/>
+            </a:avLst>
+          </a:prstGeom>
+          <a:solidFill>
+            <a:srgbClr val="FFFFFF"/>
+          </a:solidFill>
+          <a:ln w="12700">
+            <a:solidFill>
+              <a:srgbClr val="0D9488"/>
+            </a:solidFill>
+            <a:prstDash val="solid"/>
+          </a:ln>
+        </p:spPr>
+      </p:sp>
+      <p:sp>
+        <p:nvSpPr>
+          <p:cNvPr id="32" name="Text 30"/>
+          <p:cNvSpPr/>
+          <p:nvPr/>
+        </p:nvSpPr>
+        <p:spPr>
+          <a:xfrm>
+            <a:off x="6428232" y="3364992"/>
+            <a:ext cx="1645920" cy="475488"/>
+          </a:xfrm>
+          <a:prstGeom prst="rect">
+            <a:avLst/>
+          </a:prstGeom>
+          <a:noFill/>
+          <a:ln/>
+        </p:spPr>
+        <p:txBody>
+          <a:bodyPr wrap="square" lIns="0" tIns="0" rIns="0" bIns="0" rtlCol="0" anchor="ctr"/>
+          <a:lstStyle/>
+          <a:p>
+            <a:pPr algn="ctr" indent="0" marL="0">
+              <a:buNone/>
+            </a:pPr>
+            <a:r>
+              <a:rPr lang="en-US" sz="1400" b="1" dirty="0">
+                <a:solidFill>
+                  <a:srgbClr val="0D9488"/>
+                </a:solidFill>
+                <a:latin typeface="Trebuchet MS" pitchFamily="34" charset="0"/>
+                <a:ea typeface="Trebuchet MS" pitchFamily="34" charset="-122"/>
+                <a:cs typeface="Trebuchet MS" pitchFamily="34" charset="-120"/>
+              </a:rPr>
+              <a:t>ue</a:t>
+            </a:r>
+            <a:endParaRPr lang="en-US" sz="1400" dirty="0"/>
+          </a:p>
+        </p:txBody>
+      </p:sp>
+      <p:sp>
+        <p:nvSpPr>
+          <p:cNvPr id="33" name="Shape 31"/>
           <p:cNvSpPr/>
           <p:nvPr/>
         </p:nvSpPr>
@@ -32316,7 +32286,7 @@
       </p:sp>
       <p:sp>
         <p:nvSpPr>
-          <p:cNvPr id="32" name="Text 30"/>
+          <p:cNvPr id="34" name="Text 32"/>
           <p:cNvSpPr/>
           <p:nvPr/>
         </p:nvSpPr>
@@ -32355,7 +32325,7 @@
       </p:sp>
       <p:sp>
         <p:nvSpPr>
-          <p:cNvPr id="33" name="Shape 31"/>
+          <p:cNvPr id="35" name="Shape 33"/>
           <p:cNvSpPr/>
           <p:nvPr/>
         </p:nvSpPr>
@@ -32382,7 +32352,7 @@
       </p:sp>
       <p:sp>
         <p:nvSpPr>
-          <p:cNvPr id="34" name="Text 32"/>
+          <p:cNvPr id="36" name="Text 34"/>
           <p:cNvSpPr/>
           <p:nvPr/>
         </p:nvSpPr>
@@ -32705,7 +32675,7 @@
                 <a:ea typeface="Calibri" pitchFamily="34" charset="-122"/>
                 <a:cs typeface="Calibri" pitchFamily="34" charset="-120"/>
               </a:rPr>
-              <a:t>Word Labs  •  wordlabs.app  •  Root: 'value' = worth, importance, or price</a:t>
+              <a:t>Word Labs  •  wordlabs.app  •  Root: 'value' = worth, importance, price</a:t>
             </a:r>
             <a:endParaRPr lang="en-US" sz="800" dirty="0"/>
           </a:p>
@@ -32844,7 +32814,7 @@
                 <a:ea typeface="Trebuchet MS" pitchFamily="34" charset="-122"/>
                 <a:cs typeface="Trebuchet MS" pitchFamily="34" charset="-120"/>
               </a:rPr>
-              <a:t>valued</a:t>
+              <a:t>revalue</a:t>
             </a:r>
             <a:endParaRPr lang="en-US" sz="2800" dirty="0"/>
           </a:p>
@@ -32933,11 +32903,11 @@
             </a:avLst>
           </a:prstGeom>
           <a:solidFill>
-            <a:srgbClr val="CCFBF1"/>
+            <a:srgbClr val="DDD6FE"/>
           </a:solidFill>
           <a:ln w="19050">
             <a:solidFill>
-              <a:srgbClr val="0D9488"/>
+              <a:srgbClr val="7C3AED"/>
             </a:solidFill>
             <a:prstDash val="solid"/>
           </a:ln>
@@ -32977,13 +32947,13 @@
             <a:r>
               <a:rPr lang="en-US" sz="1300" b="1" dirty="0">
                 <a:solidFill>
-                  <a:srgbClr val="0F766E"/>
+                  <a:srgbClr val="4C1D95"/>
                 </a:solidFill>
                 <a:latin typeface="Trebuchet MS" pitchFamily="34" charset="0"/>
                 <a:ea typeface="Trebuchet MS" pitchFamily="34" charset="-122"/>
                 <a:cs typeface="Trebuchet MS" pitchFamily="34" charset="-120"/>
               </a:rPr>
-              <a:t>value</a:t>
+              <a:t>re</a:t>
             </a:r>
             <a:endParaRPr lang="en-US" sz="1300" dirty="0"/>
           </a:p>
@@ -33022,7 +32992,7 @@
                 <a:ea typeface="Calibri" pitchFamily="34" charset="-122"/>
                 <a:cs typeface="Calibri" pitchFamily="34" charset="-120"/>
               </a:rPr>
-              <a:t>worth</a:t>
+              <a:t>again</a:t>
             </a:r>
             <a:endParaRPr lang="en-US" sz="850" dirty="0"/>
           </a:p>
@@ -33045,11 +33015,11 @@
             </a:avLst>
           </a:prstGeom>
           <a:solidFill>
-            <a:srgbClr val="FCE7F3"/>
+            <a:srgbClr val="CCFBF1"/>
           </a:solidFill>
           <a:ln w="19050">
             <a:solidFill>
-              <a:srgbClr val="DB2777"/>
+              <a:srgbClr val="0D9488"/>
             </a:solidFill>
             <a:prstDash val="solid"/>
           </a:ln>
@@ -33089,13 +33059,13 @@
             <a:r>
               <a:rPr lang="en-US" sz="1300" b="1" dirty="0">
                 <a:solidFill>
-                  <a:srgbClr val="9D174D"/>
+                  <a:srgbClr val="0F766E"/>
                 </a:solidFill>
                 <a:latin typeface="Trebuchet MS" pitchFamily="34" charset="0"/>
                 <a:ea typeface="Trebuchet MS" pitchFamily="34" charset="-122"/>
                 <a:cs typeface="Trebuchet MS" pitchFamily="34" charset="-120"/>
               </a:rPr>
-              <a:t>ed</a:t>
+              <a:t>value</a:t>
             </a:r>
             <a:endParaRPr lang="en-US" sz="1300" dirty="0"/>
           </a:p>
@@ -33134,7 +33104,7 @@
                 <a:ea typeface="Calibri" pitchFamily="34" charset="-122"/>
                 <a:cs typeface="Calibri" pitchFamily="34" charset="-120"/>
               </a:rPr>
-              <a:t>past tense; having been done</a:t>
+              <a:t>worth</a:t>
             </a:r>
             <a:endParaRPr lang="en-US" sz="850" dirty="0"/>
           </a:p>
@@ -33142,46 +33112,7 @@
       </p:sp>
       <p:sp>
         <p:nvSpPr>
-          <p:cNvPr id="22" name="Text 20"/>
-          <p:cNvSpPr/>
-          <p:nvPr/>
-        </p:nvSpPr>
-        <p:spPr>
-          <a:xfrm>
-            <a:off x="5803392" y="2752344"/>
-            <a:ext cx="1828800" cy="182880"/>
-          </a:xfrm>
-          <a:prstGeom prst="rect">
-            <a:avLst/>
-          </a:prstGeom>
-          <a:noFill/>
-          <a:ln/>
-        </p:spPr>
-        <p:txBody>
-          <a:bodyPr wrap="square" lIns="0" tIns="0" rIns="0" bIns="0" rtlCol="0" anchor="t"/>
-          <a:lstStyle/>
-          <a:p>
-            <a:pPr algn="ctr" indent="0" marL="0">
-              <a:buNone/>
-            </a:pPr>
-            <a:r>
-              <a:rPr lang="en-US" sz="700" i="1" dirty="0">
-                <a:solidFill>
-                  <a:srgbClr val="94A3B8"/>
-                </a:solidFill>
-                <a:latin typeface="Calibri" pitchFamily="34" charset="0"/>
-                <a:ea typeface="Calibri" pitchFamily="34" charset="-122"/>
-                <a:cs typeface="Calibri" pitchFamily="34" charset="-120"/>
-              </a:rPr>
-              <a:t>'e' dropped before vowel suffix</a:t>
-            </a:r>
-            <a:endParaRPr lang="en-US" sz="700" dirty="0"/>
-          </a:p>
-        </p:txBody>
-      </p:sp>
-      <p:sp>
-        <p:nvSpPr>
-          <p:cNvPr id="23" name="Shape 21"/>
+          <p:cNvPr id="22" name="Shape 20"/>
           <p:cNvSpPr/>
           <p:nvPr/>
         </p:nvSpPr>
@@ -33208,7 +33139,7 @@
       </p:sp>
       <p:sp>
         <p:nvSpPr>
-          <p:cNvPr id="24" name="Text 22"/>
+          <p:cNvPr id="23" name="Text 21"/>
           <p:cNvSpPr/>
           <p:nvPr/>
         </p:nvSpPr>
@@ -33247,7 +33178,7 @@
       </p:sp>
       <p:sp>
         <p:nvSpPr>
-          <p:cNvPr id="25" name="Shape 23"/>
+          <p:cNvPr id="24" name="Shape 22"/>
           <p:cNvSpPr/>
           <p:nvPr/>
         </p:nvSpPr>
@@ -33274,13 +33205,13 @@
       </p:sp>
       <p:sp>
         <p:nvSpPr>
-          <p:cNvPr id="26" name="Shape 24"/>
-          <p:cNvSpPr/>
-          <p:nvPr/>
-        </p:nvSpPr>
-        <p:spPr>
-          <a:xfrm>
-            <a:off x="2999232" y="3364992"/>
+          <p:cNvPr id="25" name="Shape 23"/>
+          <p:cNvSpPr/>
+          <p:nvPr/>
+        </p:nvSpPr>
+        <p:spPr>
+          <a:xfrm>
+            <a:off x="2313432" y="3364992"/>
             <a:ext cx="1645920" cy="475488"/>
           </a:xfrm>
           <a:prstGeom prst="rect">
@@ -33301,13 +33232,13 @@
       </p:sp>
       <p:sp>
         <p:nvSpPr>
-          <p:cNvPr id="27" name="Text 25"/>
-          <p:cNvSpPr/>
-          <p:nvPr/>
-        </p:nvSpPr>
-        <p:spPr>
-          <a:xfrm>
-            <a:off x="2999232" y="3364992"/>
+          <p:cNvPr id="26" name="Text 24"/>
+          <p:cNvSpPr/>
+          <p:nvPr/>
+        </p:nvSpPr>
+        <p:spPr>
+          <a:xfrm>
+            <a:off x="2313432" y="3364992"/>
             <a:ext cx="1645920" cy="475488"/>
           </a:xfrm>
           <a:prstGeom prst="rect">
@@ -33332,7 +33263,7 @@
                 <a:ea typeface="Trebuchet MS" pitchFamily="34" charset="-122"/>
                 <a:cs typeface="Trebuchet MS" pitchFamily="34" charset="-120"/>
               </a:rPr>
-              <a:t>val</a:t>
+              <a:t>re</a:t>
             </a:r>
             <a:endParaRPr lang="en-US" sz="1400" dirty="0"/>
           </a:p>
@@ -33340,14 +33271,14 @@
       </p:sp>
       <p:sp>
         <p:nvSpPr>
-          <p:cNvPr id="28" name="Text 26"/>
-          <p:cNvSpPr/>
-          <p:nvPr/>
-        </p:nvSpPr>
-        <p:spPr>
-          <a:xfrm>
-            <a:off x="4645152" y="3364992"/>
-            <a:ext cx="1097280" cy="475488"/>
+          <p:cNvPr id="27" name="Text 25"/>
+          <p:cNvSpPr/>
+          <p:nvPr/>
+        </p:nvSpPr>
+        <p:spPr>
+          <a:xfrm>
+            <a:off x="3959352" y="3364992"/>
+            <a:ext cx="411480" cy="475488"/>
           </a:xfrm>
           <a:prstGeom prst="rect">
             <a:avLst/>
@@ -33379,13 +33310,13 @@
       </p:sp>
       <p:sp>
         <p:nvSpPr>
-          <p:cNvPr id="29" name="Shape 27"/>
-          <p:cNvSpPr/>
-          <p:nvPr/>
-        </p:nvSpPr>
-        <p:spPr>
-          <a:xfrm>
-            <a:off x="5742432" y="3364992"/>
+          <p:cNvPr id="28" name="Shape 26"/>
+          <p:cNvSpPr/>
+          <p:nvPr/>
+        </p:nvSpPr>
+        <p:spPr>
+          <a:xfrm>
+            <a:off x="4370832" y="3364992"/>
             <a:ext cx="1645920" cy="475488"/>
           </a:xfrm>
           <a:prstGeom prst="rect">
@@ -33406,13 +33337,13 @@
       </p:sp>
       <p:sp>
         <p:nvSpPr>
-          <p:cNvPr id="30" name="Text 28"/>
-          <p:cNvSpPr/>
-          <p:nvPr/>
-        </p:nvSpPr>
-        <p:spPr>
-          <a:xfrm>
-            <a:off x="5742432" y="3364992"/>
+          <p:cNvPr id="29" name="Text 27"/>
+          <p:cNvSpPr/>
+          <p:nvPr/>
+        </p:nvSpPr>
+        <p:spPr>
+          <a:xfrm>
+            <a:off x="4370832" y="3364992"/>
             <a:ext cx="1645920" cy="475488"/>
           </a:xfrm>
           <a:prstGeom prst="rect">
@@ -33437,7 +33368,7 @@
                 <a:ea typeface="Trebuchet MS" pitchFamily="34" charset="-122"/>
                 <a:cs typeface="Trebuchet MS" pitchFamily="34" charset="-120"/>
               </a:rPr>
-              <a:t>ued</a:t>
+              <a:t>val</a:t>
             </a:r>
             <a:endParaRPr lang="en-US" sz="1400" dirty="0"/>
           </a:p>
@@ -33445,7 +33376,112 @@
       </p:sp>
       <p:sp>
         <p:nvSpPr>
+          <p:cNvPr id="30" name="Text 28"/>
+          <p:cNvSpPr/>
+          <p:nvPr/>
+        </p:nvSpPr>
+        <p:spPr>
+          <a:xfrm>
+            <a:off x="6016752" y="3364992"/>
+            <a:ext cx="411480" cy="475488"/>
+          </a:xfrm>
+          <a:prstGeom prst="rect">
+            <a:avLst/>
+          </a:prstGeom>
+          <a:noFill/>
+          <a:ln/>
+        </p:spPr>
+        <p:txBody>
+          <a:bodyPr wrap="square" lIns="0" tIns="0" rIns="0" bIns="0" rtlCol="0" anchor="ctr"/>
+          <a:lstStyle/>
+          <a:p>
+            <a:pPr algn="ctr" indent="0" marL="0">
+              <a:buNone/>
+            </a:pPr>
+            <a:r>
+              <a:rPr lang="en-US" sz="1600" b="1" dirty="0">
+                <a:solidFill>
+                  <a:srgbClr val="0D9488"/>
+                </a:solidFill>
+                <a:latin typeface="Trebuchet MS" pitchFamily="34" charset="0"/>
+                <a:ea typeface="Trebuchet MS" pitchFamily="34" charset="-122"/>
+                <a:cs typeface="Trebuchet MS" pitchFamily="34" charset="-120"/>
+              </a:rPr>
+              <a:t>·</a:t>
+            </a:r>
+            <a:endParaRPr lang="en-US" sz="1600" dirty="0"/>
+          </a:p>
+        </p:txBody>
+      </p:sp>
+      <p:sp>
+        <p:nvSpPr>
           <p:cNvPr id="31" name="Shape 29"/>
+          <p:cNvSpPr/>
+          <p:nvPr/>
+        </p:nvSpPr>
+        <p:spPr>
+          <a:xfrm>
+            <a:off x="6428232" y="3364992"/>
+            <a:ext cx="1645920" cy="475488"/>
+          </a:xfrm>
+          <a:prstGeom prst="rect">
+            <a:avLst>
+              <a:gd name="adj" fmla="val 9615"/>
+            </a:avLst>
+          </a:prstGeom>
+          <a:solidFill>
+            <a:srgbClr val="FFFFFF"/>
+          </a:solidFill>
+          <a:ln w="12700">
+            <a:solidFill>
+              <a:srgbClr val="0D9488"/>
+            </a:solidFill>
+            <a:prstDash val="solid"/>
+          </a:ln>
+        </p:spPr>
+      </p:sp>
+      <p:sp>
+        <p:nvSpPr>
+          <p:cNvPr id="32" name="Text 30"/>
+          <p:cNvSpPr/>
+          <p:nvPr/>
+        </p:nvSpPr>
+        <p:spPr>
+          <a:xfrm>
+            <a:off x="6428232" y="3364992"/>
+            <a:ext cx="1645920" cy="475488"/>
+          </a:xfrm>
+          <a:prstGeom prst="rect">
+            <a:avLst/>
+          </a:prstGeom>
+          <a:noFill/>
+          <a:ln/>
+        </p:spPr>
+        <p:txBody>
+          <a:bodyPr wrap="square" lIns="0" tIns="0" rIns="0" bIns="0" rtlCol="0" anchor="ctr"/>
+          <a:lstStyle/>
+          <a:p>
+            <a:pPr algn="ctr" indent="0" marL="0">
+              <a:buNone/>
+            </a:pPr>
+            <a:r>
+              <a:rPr lang="en-US" sz="1400" b="1" dirty="0">
+                <a:solidFill>
+                  <a:srgbClr val="0D9488"/>
+                </a:solidFill>
+                <a:latin typeface="Trebuchet MS" pitchFamily="34" charset="0"/>
+                <a:ea typeface="Trebuchet MS" pitchFamily="34" charset="-122"/>
+                <a:cs typeface="Trebuchet MS" pitchFamily="34" charset="-120"/>
+              </a:rPr>
+              <a:t>ue</a:t>
+            </a:r>
+            <a:endParaRPr lang="en-US" sz="1400" dirty="0"/>
+          </a:p>
+        </p:txBody>
+      </p:sp>
+      <p:sp>
+        <p:nvSpPr>
+          <p:cNvPr id="33" name="Shape 31"/>
           <p:cNvSpPr/>
           <p:nvPr/>
         </p:nvSpPr>
@@ -33472,7 +33508,7 @@
       </p:sp>
       <p:sp>
         <p:nvSpPr>
-          <p:cNvPr id="32" name="Text 30"/>
+          <p:cNvPr id="34" name="Text 32"/>
           <p:cNvSpPr/>
           <p:nvPr/>
         </p:nvSpPr>
@@ -33511,7 +33547,7 @@
       </p:sp>
       <p:sp>
         <p:nvSpPr>
-          <p:cNvPr id="33" name="Shape 31"/>
+          <p:cNvPr id="35" name="Shape 33"/>
           <p:cNvSpPr/>
           <p:nvPr/>
         </p:nvSpPr>
@@ -33538,13 +33574,13 @@
       </p:sp>
       <p:sp>
         <p:nvSpPr>
-          <p:cNvPr id="34" name="Shape 32"/>
-          <p:cNvSpPr/>
-          <p:nvPr/>
-        </p:nvSpPr>
-        <p:spPr>
-          <a:xfrm>
-            <a:off x="2427732" y="4169664"/>
+          <p:cNvPr id="36" name="Shape 34"/>
+          <p:cNvSpPr/>
+          <p:nvPr/>
+        </p:nvSpPr>
+        <p:spPr>
+          <a:xfrm>
+            <a:off x="2254649" y="4169664"/>
             <a:ext cx="685800" cy="475488"/>
           </a:xfrm>
           <a:prstGeom prst="rect">
@@ -33565,13 +33601,13 @@
       </p:sp>
       <p:sp>
         <p:nvSpPr>
-          <p:cNvPr id="35" name="Text 33"/>
-          <p:cNvSpPr/>
-          <p:nvPr/>
-        </p:nvSpPr>
-        <p:spPr>
-          <a:xfrm>
-            <a:off x="2427732" y="4169664"/>
+          <p:cNvPr id="37" name="Text 35"/>
+          <p:cNvSpPr/>
+          <p:nvPr/>
+        </p:nvSpPr>
+        <p:spPr>
+          <a:xfrm>
+            <a:off x="2254649" y="4169664"/>
             <a:ext cx="685800" cy="475488"/>
           </a:xfrm>
           <a:prstGeom prst="rect">
@@ -33596,7 +33632,7 @@
                 <a:ea typeface="Trebuchet MS" pitchFamily="34" charset="-122"/>
                 <a:cs typeface="Trebuchet MS" pitchFamily="34" charset="-120"/>
               </a:rPr>
-              <a:t>v</a:t>
+              <a:t>r</a:t>
             </a:r>
             <a:endParaRPr lang="en-US" sz="900" dirty="0"/>
           </a:p>
@@ -33604,13 +33640,13 @@
       </p:sp>
       <p:sp>
         <p:nvSpPr>
-          <p:cNvPr id="36" name="Shape 34"/>
-          <p:cNvSpPr/>
-          <p:nvPr/>
-        </p:nvSpPr>
-        <p:spPr>
-          <a:xfrm>
-            <a:off x="3639312" y="4169664"/>
+          <p:cNvPr id="38" name="Shape 36"/>
+          <p:cNvSpPr/>
+          <p:nvPr/>
+        </p:nvSpPr>
+        <p:spPr>
+          <a:xfrm>
+            <a:off x="3293146" y="4169664"/>
             <a:ext cx="685800" cy="475488"/>
           </a:xfrm>
           <a:prstGeom prst="rect">
@@ -33631,13 +33667,13 @@
       </p:sp>
       <p:sp>
         <p:nvSpPr>
-          <p:cNvPr id="37" name="Text 35"/>
-          <p:cNvSpPr/>
-          <p:nvPr/>
-        </p:nvSpPr>
-        <p:spPr>
-          <a:xfrm>
-            <a:off x="3639312" y="4169664"/>
+          <p:cNvPr id="39" name="Text 37"/>
+          <p:cNvSpPr/>
+          <p:nvPr/>
+        </p:nvSpPr>
+        <p:spPr>
+          <a:xfrm>
+            <a:off x="3293146" y="4169664"/>
             <a:ext cx="685800" cy="475488"/>
           </a:xfrm>
           <a:prstGeom prst="rect">
@@ -33662,7 +33698,7 @@
                 <a:ea typeface="Trebuchet MS" pitchFamily="34" charset="-122"/>
                 <a:cs typeface="Trebuchet MS" pitchFamily="34" charset="-120"/>
               </a:rPr>
-              <a:t>a</a:t>
+              <a:t>e</a:t>
             </a:r>
             <a:endParaRPr lang="en-US" sz="900" dirty="0"/>
           </a:p>
@@ -33670,13 +33706,13 @@
       </p:sp>
       <p:sp>
         <p:nvSpPr>
-          <p:cNvPr id="38" name="Shape 36"/>
-          <p:cNvSpPr/>
-          <p:nvPr/>
-        </p:nvSpPr>
-        <p:spPr>
-          <a:xfrm>
-            <a:off x="4850892" y="4169664"/>
+          <p:cNvPr id="40" name="Shape 38"/>
+          <p:cNvSpPr/>
+          <p:nvPr/>
+        </p:nvSpPr>
+        <p:spPr>
+          <a:xfrm>
+            <a:off x="4331643" y="4169664"/>
             <a:ext cx="685800" cy="475488"/>
           </a:xfrm>
           <a:prstGeom prst="rect">
@@ -33697,13 +33733,13 @@
       </p:sp>
       <p:sp>
         <p:nvSpPr>
-          <p:cNvPr id="39" name="Text 37"/>
-          <p:cNvSpPr/>
-          <p:nvPr/>
-        </p:nvSpPr>
-        <p:spPr>
-          <a:xfrm>
-            <a:off x="4850892" y="4169664"/>
+          <p:cNvPr id="41" name="Text 39"/>
+          <p:cNvSpPr/>
+          <p:nvPr/>
+        </p:nvSpPr>
+        <p:spPr>
+          <a:xfrm>
+            <a:off x="4331643" y="4169664"/>
             <a:ext cx="685800" cy="475488"/>
           </a:xfrm>
           <a:prstGeom prst="rect">
@@ -33728,7 +33764,7 @@
                 <a:ea typeface="Trebuchet MS" pitchFamily="34" charset="-122"/>
                 <a:cs typeface="Trebuchet MS" pitchFamily="34" charset="-120"/>
               </a:rPr>
-              <a:t>l</a:t>
+              <a:t>v</a:t>
             </a:r>
             <a:endParaRPr lang="en-US" sz="900" dirty="0"/>
           </a:p>
@@ -33736,13 +33772,13 @@
       </p:sp>
       <p:sp>
         <p:nvSpPr>
-          <p:cNvPr id="40" name="Shape 38"/>
-          <p:cNvSpPr/>
-          <p:nvPr/>
-        </p:nvSpPr>
-        <p:spPr>
-          <a:xfrm>
-            <a:off x="6062472" y="4169664"/>
+          <p:cNvPr id="42" name="Shape 40"/>
+          <p:cNvSpPr/>
+          <p:nvPr/>
+        </p:nvSpPr>
+        <p:spPr>
+          <a:xfrm>
+            <a:off x="5370141" y="4169664"/>
             <a:ext cx="685800" cy="475488"/>
           </a:xfrm>
           <a:prstGeom prst="rect">
@@ -33763,13 +33799,13 @@
       </p:sp>
       <p:sp>
         <p:nvSpPr>
-          <p:cNvPr id="41" name="Text 39"/>
-          <p:cNvSpPr/>
-          <p:nvPr/>
-        </p:nvSpPr>
-        <p:spPr>
-          <a:xfrm>
-            <a:off x="6062472" y="4169664"/>
+          <p:cNvPr id="43" name="Text 41"/>
+          <p:cNvSpPr/>
+          <p:nvPr/>
+        </p:nvSpPr>
+        <p:spPr>
+          <a:xfrm>
+            <a:off x="5370141" y="4169664"/>
             <a:ext cx="685800" cy="475488"/>
           </a:xfrm>
           <a:prstGeom prst="rect">
@@ -33794,7 +33830,7 @@
                 <a:ea typeface="Trebuchet MS" pitchFamily="34" charset="-122"/>
                 <a:cs typeface="Trebuchet MS" pitchFamily="34" charset="-120"/>
               </a:rPr>
-              <a:t>u</a:t>
+              <a:t>al</a:t>
             </a:r>
             <a:endParaRPr lang="en-US" sz="900" dirty="0"/>
           </a:p>
@@ -33802,13 +33838,13 @@
       </p:sp>
       <p:sp>
         <p:nvSpPr>
-          <p:cNvPr id="42" name="Shape 40"/>
-          <p:cNvSpPr/>
-          <p:nvPr/>
-        </p:nvSpPr>
-        <p:spPr>
-          <a:xfrm>
-            <a:off x="7274052" y="4169664"/>
+          <p:cNvPr id="44" name="Shape 42"/>
+          <p:cNvSpPr/>
+          <p:nvPr/>
+        </p:nvSpPr>
+        <p:spPr>
+          <a:xfrm>
+            <a:off x="6408638" y="4169664"/>
             <a:ext cx="685800" cy="475488"/>
           </a:xfrm>
           <a:prstGeom prst="rect">
@@ -33829,13 +33865,13 @@
       </p:sp>
       <p:sp>
         <p:nvSpPr>
-          <p:cNvPr id="43" name="Text 41"/>
-          <p:cNvSpPr/>
-          <p:nvPr/>
-        </p:nvSpPr>
-        <p:spPr>
-          <a:xfrm>
-            <a:off x="7274052" y="4169664"/>
+          <p:cNvPr id="45" name="Text 43"/>
+          <p:cNvSpPr/>
+          <p:nvPr/>
+        </p:nvSpPr>
+        <p:spPr>
+          <a:xfrm>
+            <a:off x="6408638" y="4169664"/>
             <a:ext cx="685800" cy="475488"/>
           </a:xfrm>
           <a:prstGeom prst="rect">
@@ -33860,7 +33896,73 @@
                 <a:ea typeface="Trebuchet MS" pitchFamily="34" charset="-122"/>
                 <a:cs typeface="Trebuchet MS" pitchFamily="34" charset="-120"/>
               </a:rPr>
-              <a:t>ed</a:t>
+              <a:t>u</a:t>
+            </a:r>
+            <a:endParaRPr lang="en-US" sz="900" dirty="0"/>
+          </a:p>
+        </p:txBody>
+      </p:sp>
+      <p:sp>
+        <p:nvSpPr>
+          <p:cNvPr id="46" name="Shape 44"/>
+          <p:cNvSpPr/>
+          <p:nvPr/>
+        </p:nvSpPr>
+        <p:spPr>
+          <a:xfrm>
+            <a:off x="7447135" y="4169664"/>
+            <a:ext cx="685800" cy="475488"/>
+          </a:xfrm>
+          <a:prstGeom prst="rect">
+            <a:avLst>
+              <a:gd name="adj" fmla="val 7692"/>
+            </a:avLst>
+          </a:prstGeom>
+          <a:solidFill>
+            <a:srgbClr val="FFFFFF"/>
+          </a:solidFill>
+          <a:ln w="12700">
+            <a:solidFill>
+              <a:srgbClr val="DB2777"/>
+            </a:solidFill>
+            <a:prstDash val="solid"/>
+          </a:ln>
+        </p:spPr>
+      </p:sp>
+      <p:sp>
+        <p:nvSpPr>
+          <p:cNvPr id="47" name="Text 45"/>
+          <p:cNvSpPr/>
+          <p:nvPr/>
+        </p:nvSpPr>
+        <p:spPr>
+          <a:xfrm>
+            <a:off x="7447135" y="4169664"/>
+            <a:ext cx="685800" cy="475488"/>
+          </a:xfrm>
+          <a:prstGeom prst="rect">
+            <a:avLst/>
+          </a:prstGeom>
+          <a:noFill/>
+          <a:ln/>
+        </p:spPr>
+        <p:txBody>
+          <a:bodyPr wrap="square" lIns="0" tIns="0" rIns="0" bIns="0" rtlCol="0" anchor="ctr"/>
+          <a:lstStyle/>
+          <a:p>
+            <a:pPr algn="ctr" indent="0" marL="0">
+              <a:buNone/>
+            </a:pPr>
+            <a:r>
+              <a:rPr lang="en-US" sz="900" b="1" dirty="0">
+                <a:solidFill>
+                  <a:srgbClr val="9D174D"/>
+                </a:solidFill>
+                <a:latin typeface="Trebuchet MS" pitchFamily="34" charset="0"/>
+                <a:ea typeface="Trebuchet MS" pitchFamily="34" charset="-122"/>
+                <a:cs typeface="Trebuchet MS" pitchFamily="34" charset="-120"/>
+              </a:rPr>
+              <a:t>e</a:t>
             </a:r>
             <a:endParaRPr lang="en-US" sz="900" dirty="0"/>
           </a:p>
@@ -34152,7 +34254,7 @@
                 <a:ea typeface="Calibri" pitchFamily="34" charset="-122"/>
                 <a:cs typeface="Calibri" pitchFamily="34" charset="-120"/>
               </a:rPr>
-              <a:t>Word Labs  •  wordlabs.app  •  Root: 'value' = worth, importance, or price</a:t>
+              <a:t>Word Labs  •  wordlabs.app  •  Root: 'value' = worth, importance, price</a:t>
             </a:r>
             <a:endParaRPr lang="en-US" sz="800" dirty="0"/>
           </a:p>
@@ -35321,7 +35423,7 @@
                 <a:ea typeface="Calibri" pitchFamily="34" charset="-122"/>
                 <a:cs typeface="Calibri" pitchFamily="34" charset="-120"/>
               </a:rPr>
-              <a:t>Word Labs  •  wordlabs.app  •  Root: 'value' = worth, importance, or price</a:t>
+              <a:t>Word Labs  •  wordlabs.app  •  Root: 'value' = worth, importance, price</a:t>
             </a:r>
             <a:endParaRPr lang="en-US" sz="800" dirty="0"/>
           </a:p>
@@ -35814,7 +35916,7 @@
                 <a:ea typeface="Trebuchet MS" pitchFamily="34" charset="-122"/>
                 <a:cs typeface="Trebuchet MS" pitchFamily="34" charset="-120"/>
               </a:rPr>
-              <a:t>un-</a:t>
+              <a:t>re-</a:t>
             </a:r>
             <a:endParaRPr lang="en-US" sz="1300" dirty="0"/>
           </a:p>
@@ -35967,7 +36069,7 @@
                 <a:ea typeface="Trebuchet MS" pitchFamily="34" charset="-122"/>
                 <a:cs typeface="Trebuchet MS" pitchFamily="34" charset="-120"/>
               </a:rPr>
-              <a:t>re-</a:t>
+              <a:t>over-</a:t>
             </a:r>
             <a:endParaRPr lang="en-US" sz="1300" dirty="0"/>
           </a:p>
@@ -36120,7 +36222,7 @@
                 <a:ea typeface="Trebuchet MS" pitchFamily="34" charset="-122"/>
                 <a:cs typeface="Trebuchet MS" pitchFamily="34" charset="-120"/>
               </a:rPr>
-              <a:t>over-</a:t>
+              <a:t>under-</a:t>
             </a:r>
             <a:endParaRPr lang="en-US" sz="1300" dirty="0"/>
           </a:p>
@@ -36273,7 +36375,7 @@
                 <a:ea typeface="Trebuchet MS" pitchFamily="34" charset="-122"/>
                 <a:cs typeface="Trebuchet MS" pitchFamily="34" charset="-120"/>
               </a:rPr>
-              <a:t>under-</a:t>
+              <a:t>un-</a:t>
             </a:r>
             <a:endParaRPr lang="en-US" sz="1300" dirty="0"/>
           </a:p>
@@ -36533,7 +36635,7 @@
                 <a:ea typeface="Trebuchet MS" pitchFamily="34" charset="-122"/>
                 <a:cs typeface="Trebuchet MS" pitchFamily="34" charset="-120"/>
               </a:rPr>
-              <a:t>valued</a:t>
+              <a:t>devalue</a:t>
             </a:r>
             <a:endParaRPr lang="en-US" sz="1200" dirty="0"/>
           </a:p>
@@ -36599,7 +36701,7 @@
                 <a:ea typeface="Trebuchet MS" pitchFamily="34" charset="-122"/>
                 <a:cs typeface="Trebuchet MS" pitchFamily="34" charset="-120"/>
               </a:rPr>
-              <a:t>valuation</a:t>
+              <a:t>revalue</a:t>
             </a:r>
             <a:endParaRPr lang="en-US" sz="1200" dirty="0"/>
           </a:p>
@@ -36665,7 +36767,7 @@
                 <a:ea typeface="Trebuchet MS" pitchFamily="34" charset="-122"/>
                 <a:cs typeface="Trebuchet MS" pitchFamily="34" charset="-120"/>
               </a:rPr>
-              <a:t>devalue</a:t>
+              <a:t>overvalue</a:t>
             </a:r>
             <a:endParaRPr lang="en-US" sz="1200" dirty="0"/>
           </a:p>
@@ -36797,7 +36899,7 @@
                 <a:ea typeface="Trebuchet MS" pitchFamily="34" charset="-122"/>
                 <a:cs typeface="Trebuchet MS" pitchFamily="34" charset="-120"/>
               </a:rPr>
-              <a:t>overvalue</a:t>
+              <a:t>valueless</a:t>
             </a:r>
             <a:endParaRPr lang="en-US" sz="1200" dirty="0"/>
           </a:p>
@@ -36863,7 +36965,7 @@
                 <a:ea typeface="Trebuchet MS" pitchFamily="34" charset="-122"/>
                 <a:cs typeface="Trebuchet MS" pitchFamily="34" charset="-120"/>
               </a:rPr>
-              <a:t>valueless</a:t>
+              <a:t>valuation</a:t>
             </a:r>
             <a:endParaRPr lang="en-US" sz="1200" dirty="0"/>
           </a:p>
@@ -36929,7 +37031,7 @@
                 <a:ea typeface="Trebuchet MS" pitchFamily="34" charset="-122"/>
                 <a:cs typeface="Trebuchet MS" pitchFamily="34" charset="-120"/>
               </a:rPr>
-              <a:t>revalue</a:t>
+              <a:t>valued</a:t>
             </a:r>
             <a:endParaRPr lang="en-US" sz="1200" dirty="0"/>
           </a:p>
@@ -37221,7 +37323,7 @@
                 <a:ea typeface="Calibri" pitchFamily="34" charset="-122"/>
                 <a:cs typeface="Calibri" pitchFamily="34" charset="-120"/>
               </a:rPr>
-              <a:t>Word Labs  •  wordlabs.app  •  Root: 'value' = worth, importance, or price</a:t>
+              <a:t>Word Labs  •  wordlabs.app  •  Root: 'value' = worth, importance, price</a:t>
             </a:r>
             <a:endParaRPr lang="en-US" sz="800" dirty="0"/>
           </a:p>
@@ -37385,7 +37487,7 @@
                 <a:ea typeface="Calibri" pitchFamily="34" charset="-122"/>
                 <a:cs typeface="Calibri" pitchFamily="34" charset="-120"/>
               </a:rPr>
-              <a:t>The core part of a word carrying its basic meaning. For example, 'value' means 'worth, importance, or price'.</a:t>
+              <a:t>The core part of a word carrying its basic meaning. For example, 'value' means 'worth, importance, price'.</a:t>
             </a:r>
             <a:endParaRPr lang="en-US" sz="1350" dirty="0"/>
           </a:p>
@@ -38005,7 +38107,7 @@
                 <a:ea typeface="Calibri" pitchFamily="34" charset="-122"/>
                 <a:cs typeface="Calibri" pitchFamily="34" charset="-120"/>
               </a:rPr>
-              <a:t>Word Labs  •  wordlabs.app  •  Root: 'value' = worth, importance, or price</a:t>
+              <a:t>Word Labs  •  wordlabs.app  •  Root: 'value' = worth, importance, price</a:t>
             </a:r>
             <a:endParaRPr lang="en-US" sz="800" dirty="0"/>
           </a:p>
@@ -38117,7 +38219,7 @@
                 <a:ea typeface="Calibri" pitchFamily="34" charset="-122"/>
                 <a:cs typeface="Calibri" pitchFamily="34" charset="-120"/>
               </a:rPr>
-              <a:t>1.  The root 'value' comes from a Latin word meaning worth or be strong.</a:t>
+              <a:t>1.  The word 'valueless' means something is extremely valuable.</a:t>
             </a:r>
             <a:endParaRPr lang="en-US" sz="1300" dirty="0"/>
           </a:p>
@@ -38140,11 +38242,11 @@
             </a:avLst>
           </a:prstGeom>
           <a:solidFill>
-            <a:srgbClr val="DCFCE7"/>
-          </a:solidFill>
-          <a:ln w="12700">
-            <a:solidFill>
-              <a:srgbClr val="16A34A"/>
+            <a:srgbClr val="FEE2E2"/>
+          </a:solidFill>
+          <a:ln w="12700">
+            <a:solidFill>
+              <a:srgbClr val="DC2626"/>
             </a:solidFill>
             <a:prstDash val="solid"/>
           </a:ln>
@@ -38177,13 +38279,13 @@
             <a:r>
               <a:rPr lang="en-US" sz="1100" b="1" dirty="0">
                 <a:solidFill>
-                  <a:srgbClr val="16A34A"/>
+                  <a:srgbClr val="DC2626"/>
                 </a:solidFill>
                 <a:latin typeface="Trebuchet MS" pitchFamily="34" charset="0"/>
                 <a:ea typeface="Trebuchet MS" pitchFamily="34" charset="-122"/>
                 <a:cs typeface="Trebuchet MS" pitchFamily="34" charset="-120"/>
               </a:rPr>
-              <a:t>TRUE</a:t>
+              <a:t>FALSE</a:t>
             </a:r>
             <a:endParaRPr lang="en-US" sz="1100" dirty="0"/>
           </a:p>
@@ -38256,7 +38358,7 @@
                 <a:ea typeface="Calibri" pitchFamily="34" charset="-122"/>
                 <a:cs typeface="Calibri" pitchFamily="34" charset="-120"/>
               </a:rPr>
-              <a:t>2.  The word 'valueless' means something that is extremely valuable.</a:t>
+              <a:t>2.  The prefix 'under' in 'undervalue' means to value something too little.</a:t>
             </a:r>
             <a:endParaRPr lang="en-US" sz="1300" dirty="0"/>
           </a:p>
@@ -38279,11 +38381,11 @@
             </a:avLst>
           </a:prstGeom>
           <a:solidFill>
-            <a:srgbClr val="FEE2E2"/>
-          </a:solidFill>
-          <a:ln w="12700">
-            <a:solidFill>
-              <a:srgbClr val="DC2626"/>
+            <a:srgbClr val="DCFCE7"/>
+          </a:solidFill>
+          <a:ln w="12700">
+            <a:solidFill>
+              <a:srgbClr val="16A34A"/>
             </a:solidFill>
             <a:prstDash val="solid"/>
           </a:ln>
@@ -38316,13 +38418,13 @@
             <a:r>
               <a:rPr lang="en-US" sz="1100" b="1" dirty="0">
                 <a:solidFill>
-                  <a:srgbClr val="DC2626"/>
+                  <a:srgbClr val="16A34A"/>
                 </a:solidFill>
                 <a:latin typeface="Trebuchet MS" pitchFamily="34" charset="0"/>
                 <a:ea typeface="Trebuchet MS" pitchFamily="34" charset="-122"/>
                 <a:cs typeface="Trebuchet MS" pitchFamily="34" charset="-120"/>
               </a:rPr>
-              <a:t>FALSE</a:t>
+              <a:t>TRUE</a:t>
             </a:r>
             <a:endParaRPr lang="en-US" sz="1100" dirty="0"/>
           </a:p>
@@ -38395,7 +38497,7 @@
                 <a:ea typeface="Calibri" pitchFamily="34" charset="-122"/>
                 <a:cs typeface="Calibri" pitchFamily="34" charset="-120"/>
               </a:rPr>
-              <a:t>3.  Adding the prefix 'under' to 'value' makes the word 'undervalue', meaning to think something is worth less than it is.</a:t>
+              <a:t>3.  The word 'devalue' means to make something worth more money.</a:t>
             </a:r>
             <a:endParaRPr lang="en-US" sz="1300" dirty="0"/>
           </a:p>
@@ -38418,11 +38520,11 @@
             </a:avLst>
           </a:prstGeom>
           <a:solidFill>
-            <a:srgbClr val="DCFCE7"/>
-          </a:solidFill>
-          <a:ln w="12700">
-            <a:solidFill>
-              <a:srgbClr val="16A34A"/>
+            <a:srgbClr val="FEE2E2"/>
+          </a:solidFill>
+          <a:ln w="12700">
+            <a:solidFill>
+              <a:srgbClr val="DC2626"/>
             </a:solidFill>
             <a:prstDash val="solid"/>
           </a:ln>
@@ -38455,13 +38557,13 @@
             <a:r>
               <a:rPr lang="en-US" sz="1100" b="1" dirty="0">
                 <a:solidFill>
-                  <a:srgbClr val="16A34A"/>
+                  <a:srgbClr val="DC2626"/>
                 </a:solidFill>
                 <a:latin typeface="Trebuchet MS" pitchFamily="34" charset="0"/>
                 <a:ea typeface="Trebuchet MS" pitchFamily="34" charset="-122"/>
                 <a:cs typeface="Trebuchet MS" pitchFamily="34" charset="-120"/>
               </a:rPr>
-              <a:t>TRUE</a:t>
+              <a:t>FALSE</a:t>
             </a:r>
             <a:endParaRPr lang="en-US" sz="1100" dirty="0"/>
           </a:p>
@@ -38534,7 +38636,7 @@
                 <a:ea typeface="Calibri" pitchFamily="34" charset="-122"/>
                 <a:cs typeface="Calibri" pitchFamily="34" charset="-120"/>
               </a:rPr>
-              <a:t>4.  The word 'valuable' contains the root 'value' plus the suffix '-able'.</a:t>
+              <a:t>4.  The suffix '-able' in 'valuable' means able to be valued or having great worth.</a:t>
             </a:r>
             <a:endParaRPr lang="en-US" sz="1300" dirty="0"/>
           </a:p>
@@ -38673,7 +38775,7 @@
                 <a:ea typeface="Calibri" pitchFamily="34" charset="-122"/>
                 <a:cs typeface="Calibri" pitchFamily="34" charset="-120"/>
               </a:rPr>
-              <a:t>5.  The prefix 'de' in 'devalue' means above or more than.</a:t>
+              <a:t>5.  The root 'value' comes from a Latin word meaning worth or strength.</a:t>
             </a:r>
             <a:endParaRPr lang="en-US" sz="1300" dirty="0"/>
           </a:p>
@@ -38696,11 +38798,11 @@
             </a:avLst>
           </a:prstGeom>
           <a:solidFill>
-            <a:srgbClr val="FEE2E2"/>
-          </a:solidFill>
-          <a:ln w="12700">
-            <a:solidFill>
-              <a:srgbClr val="DC2626"/>
+            <a:srgbClr val="DCFCE7"/>
+          </a:solidFill>
+          <a:ln w="12700">
+            <a:solidFill>
+              <a:srgbClr val="16A34A"/>
             </a:solidFill>
             <a:prstDash val="solid"/>
           </a:ln>
@@ -38733,13 +38835,13 @@
             <a:r>
               <a:rPr lang="en-US" sz="1100" b="1" dirty="0">
                 <a:solidFill>
-                  <a:srgbClr val="DC2626"/>
+                  <a:srgbClr val="16A34A"/>
                 </a:solidFill>
                 <a:latin typeface="Trebuchet MS" pitchFamily="34" charset="0"/>
                 <a:ea typeface="Trebuchet MS" pitchFamily="34" charset="-122"/>
                 <a:cs typeface="Trebuchet MS" pitchFamily="34" charset="-120"/>
               </a:rPr>
-              <a:t>FALSE</a:t>
+              <a:t>TRUE</a:t>
             </a:r>
             <a:endParaRPr lang="en-US" sz="1100" dirty="0"/>
           </a:p>
@@ -39031,7 +39133,7 @@
                 <a:ea typeface="Calibri" pitchFamily="34" charset="-122"/>
                 <a:cs typeface="Calibri" pitchFamily="34" charset="-120"/>
               </a:rPr>
-              <a:t>Word Labs  •  wordlabs.app  •  Root: 'value' = worth, importance, or price</a:t>
+              <a:t>Word Labs  •  wordlabs.app  •  Root: 'value' = worth, importance, price</a:t>
             </a:r>
             <a:endParaRPr lang="en-US" sz="800" dirty="0"/>
           </a:p>
@@ -39168,7 +39270,7 @@
                 <a:ea typeface="Trebuchet MS" pitchFamily="34" charset="-122"/>
                 <a:cs typeface="Trebuchet MS" pitchFamily="34" charset="-120"/>
               </a:rPr>
-              <a:t>worth, importance, or price</a:t>
+              <a:t>worth, importance, price</a:t>
             </a:r>
             <a:endParaRPr lang="en-US" sz="2000" dirty="0"/>
           </a:p>
@@ -39378,7 +39480,7 @@
                 <a:ea typeface="Trebuchet MS" pitchFamily="34" charset="-122"/>
                 <a:cs typeface="Trebuchet MS" pitchFamily="34" charset="-120"/>
               </a:rPr>
-              <a:t>valued</a:t>
+              <a:t>devalue</a:t>
             </a:r>
             <a:endParaRPr lang="en-US" sz="1300" dirty="0"/>
           </a:p>
@@ -39444,7 +39546,7 @@
                 <a:ea typeface="Trebuchet MS" pitchFamily="34" charset="-122"/>
                 <a:cs typeface="Trebuchet MS" pitchFamily="34" charset="-120"/>
               </a:rPr>
-              <a:t>valuation</a:t>
+              <a:t>revalue</a:t>
             </a:r>
             <a:endParaRPr lang="en-US" sz="1300" dirty="0"/>
           </a:p>
@@ -39510,7 +39612,7 @@
                 <a:ea typeface="Trebuchet MS" pitchFamily="34" charset="-122"/>
                 <a:cs typeface="Trebuchet MS" pitchFamily="34" charset="-120"/>
               </a:rPr>
-              <a:t>devalue</a:t>
+              <a:t>overvalue</a:t>
             </a:r>
             <a:endParaRPr lang="en-US" sz="1300" dirty="0"/>
           </a:p>
@@ -39642,7 +39744,7 @@
                 <a:ea typeface="Trebuchet MS" pitchFamily="34" charset="-122"/>
                 <a:cs typeface="Trebuchet MS" pitchFamily="34" charset="-120"/>
               </a:rPr>
-              <a:t>overvalue</a:t>
+              <a:t>valueless</a:t>
             </a:r>
             <a:endParaRPr lang="en-US" sz="1300" dirty="0"/>
           </a:p>
@@ -39708,7 +39810,7 @@
                 <a:ea typeface="Trebuchet MS" pitchFamily="34" charset="-122"/>
                 <a:cs typeface="Trebuchet MS" pitchFamily="34" charset="-120"/>
               </a:rPr>
-              <a:t>valueless</a:t>
+              <a:t>valuation</a:t>
             </a:r>
             <a:endParaRPr lang="en-US" sz="1300" dirty="0"/>
           </a:p>
@@ -40000,7 +40102,7 @@
                 <a:ea typeface="Calibri" pitchFamily="34" charset="-122"/>
                 <a:cs typeface="Calibri" pitchFamily="34" charset="-120"/>
               </a:rPr>
-              <a:t>Word Labs  •  wordlabs.app  •  Root: 'value' = worth, importance, or price</a:t>
+              <a:t>Word Labs  •  wordlabs.app  •  Root: 'value' = worth, importance, price</a:t>
             </a:r>
             <a:endParaRPr lang="en-US" sz="800" dirty="0"/>
           </a:p>
@@ -40493,7 +40595,7 @@
                 <a:ea typeface="Trebuchet MS" pitchFamily="34" charset="-122"/>
                 <a:cs typeface="Trebuchet MS" pitchFamily="34" charset="-120"/>
               </a:rPr>
-              <a:t>un-</a:t>
+              <a:t>re-</a:t>
             </a:r>
             <a:endParaRPr lang="en-US" sz="1300" dirty="0"/>
           </a:p>
@@ -40646,7 +40748,7 @@
                 <a:ea typeface="Trebuchet MS" pitchFamily="34" charset="-122"/>
                 <a:cs typeface="Trebuchet MS" pitchFamily="34" charset="-120"/>
               </a:rPr>
-              <a:t>re-</a:t>
+              <a:t>over-</a:t>
             </a:r>
             <a:endParaRPr lang="en-US" sz="1300" dirty="0"/>
           </a:p>
@@ -40799,7 +40901,7 @@
                 <a:ea typeface="Trebuchet MS" pitchFamily="34" charset="-122"/>
                 <a:cs typeface="Trebuchet MS" pitchFamily="34" charset="-120"/>
               </a:rPr>
-              <a:t>over-</a:t>
+              <a:t>under-</a:t>
             </a:r>
             <a:endParaRPr lang="en-US" sz="1300" dirty="0"/>
           </a:p>
@@ -40952,7 +41054,7 @@
                 <a:ea typeface="Trebuchet MS" pitchFamily="34" charset="-122"/>
                 <a:cs typeface="Trebuchet MS" pitchFamily="34" charset="-120"/>
               </a:rPr>
-              <a:t>under-</a:t>
+              <a:t>un-</a:t>
             </a:r>
             <a:endParaRPr lang="en-US" sz="1300" dirty="0"/>
           </a:p>
@@ -41774,7 +41876,7 @@
                 <a:ea typeface="Calibri" pitchFamily="34" charset="-122"/>
                 <a:cs typeface="Calibri" pitchFamily="34" charset="-120"/>
               </a:rPr>
-              <a:t>Word Labs  •  wordlabs.app  •  Root: 'value' = worth, importance, or price</a:t>
+              <a:t>Word Labs  •  wordlabs.app  •  Root: 'value' = worth, importance, price</a:t>
             </a:r>
             <a:endParaRPr lang="en-US" sz="800" dirty="0"/>
           </a:p>
@@ -41952,7 +42054,7 @@
                 <a:ea typeface="Calibri" pitchFamily="34" charset="-122"/>
                 <a:cs typeface="Calibri" pitchFamily="34" charset="-120"/>
               </a:rPr>
-              <a:t>The process of working out how much something is worth.</a:t>
+              <a:t>To decide that something is worth a different, usually higher, amount.</a:t>
             </a:r>
             <a:endParaRPr lang="en-US" sz="1200" dirty="0"/>
           </a:p>
@@ -42025,7 +42127,7 @@
                 <a:ea typeface="Trebuchet MS" pitchFamily="34" charset="-122"/>
                 <a:cs typeface="Trebuchet MS" pitchFamily="34" charset="-120"/>
               </a:rPr>
-              <a:t>valued</a:t>
+              <a:t>devalue</a:t>
             </a:r>
             <a:endParaRPr lang="en-US" sz="1200" dirty="0"/>
           </a:p>
@@ -42091,7 +42193,7 @@
                 <a:ea typeface="Calibri" pitchFamily="34" charset="-122"/>
                 <a:cs typeface="Calibri" pitchFamily="34" charset="-120"/>
               </a:rPr>
-              <a:t>To think something or someone is worth less than they really are.</a:t>
+              <a:t>To think something is worth less than it really is.</a:t>
             </a:r>
             <a:endParaRPr lang="en-US" sz="1200" dirty="0"/>
           </a:p>
@@ -42164,7 +42266,7 @@
                 <a:ea typeface="Trebuchet MS" pitchFamily="34" charset="-122"/>
                 <a:cs typeface="Trebuchet MS" pitchFamily="34" charset="-120"/>
               </a:rPr>
-              <a:t>valuation</a:t>
+              <a:t>revalue</a:t>
             </a:r>
             <a:endParaRPr lang="en-US" sz="1200" dirty="0"/>
           </a:p>
@@ -42303,7 +42405,7 @@
                 <a:ea typeface="Trebuchet MS" pitchFamily="34" charset="-122"/>
                 <a:cs typeface="Trebuchet MS" pitchFamily="34" charset="-120"/>
               </a:rPr>
-              <a:t>devalue</a:t>
+              <a:t>overvalue</a:t>
             </a:r>
             <a:endParaRPr lang="en-US" sz="1200" dirty="0"/>
           </a:p>
@@ -42369,7 +42471,7 @@
                 <a:ea typeface="Calibri" pitchFamily="34" charset="-122"/>
                 <a:cs typeface="Calibri" pitchFamily="34" charset="-120"/>
               </a:rPr>
-              <a:t>Having no worth or importance at all.</a:t>
+              <a:t>When someone works out how much something is worth.</a:t>
             </a:r>
             <a:endParaRPr lang="en-US" sz="1200" dirty="0"/>
           </a:p>
@@ -42508,7 +42610,7 @@
                 <a:ea typeface="Calibri" pitchFamily="34" charset="-122"/>
                 <a:cs typeface="Calibri" pitchFamily="34" charset="-120"/>
               </a:rPr>
-              <a:t>To think something is worth more than it actually is.</a:t>
+              <a:t>Something that has no worth or importance at all.</a:t>
             </a:r>
             <a:endParaRPr lang="en-US" sz="1200" dirty="0"/>
           </a:p>
@@ -42581,7 +42683,7 @@
                 <a:ea typeface="Trebuchet MS" pitchFamily="34" charset="-122"/>
                 <a:cs typeface="Trebuchet MS" pitchFamily="34" charset="-120"/>
               </a:rPr>
-              <a:t>overvalue</a:t>
+              <a:t>valueless</a:t>
             </a:r>
             <a:endParaRPr lang="en-US" sz="1200" dirty="0"/>
           </a:p>
@@ -42647,7 +42749,7 @@
                 <a:ea typeface="Calibri" pitchFamily="34" charset="-122"/>
                 <a:cs typeface="Calibri" pitchFamily="34" charset="-120"/>
               </a:rPr>
-              <a:t>To make something seem less important or worth less than before.</a:t>
+              <a:t>To think something is worth more than it really is.</a:t>
             </a:r>
             <a:endParaRPr lang="en-US" sz="1200" dirty="0"/>
           </a:p>
@@ -42720,7 +42822,7 @@
                 <a:ea typeface="Trebuchet MS" pitchFamily="34" charset="-122"/>
                 <a:cs typeface="Trebuchet MS" pitchFamily="34" charset="-120"/>
               </a:rPr>
-              <a:t>valueless</a:t>
+              <a:t>valuation</a:t>
             </a:r>
             <a:endParaRPr lang="en-US" sz="1200" dirty="0"/>
           </a:p>
@@ -42786,7 +42888,7 @@
                 <a:ea typeface="Calibri" pitchFamily="34" charset="-122"/>
                 <a:cs typeface="Calibri" pitchFamily="34" charset="-120"/>
               </a:rPr>
-              <a:t>Treated as important and appreciated by others.</a:t>
+              <a:t>To make something worth less than it was before.</a:t>
             </a:r>
             <a:endParaRPr lang="en-US" sz="1200" dirty="0"/>
           </a:p>
@@ -43078,7 +43180,7 @@
                 <a:ea typeface="Calibri" pitchFamily="34" charset="-122"/>
                 <a:cs typeface="Calibri" pitchFamily="34" charset="-120"/>
               </a:rPr>
-              <a:t>Word Labs  •  wordlabs.app  •  Root: 'value' = worth, importance, or price</a:t>
+              <a:t>Word Labs  •  wordlabs.app  •  Root: 'value' = worth, importance, price</a:t>
             </a:r>
             <a:endParaRPr lang="en-US" sz="800" dirty="0"/>
           </a:p>
@@ -43445,7 +43547,7 @@
                 <a:ea typeface="Calibri" pitchFamily="34" charset="-122"/>
                 <a:cs typeface="Calibri" pitchFamily="34" charset="-120"/>
               </a:rPr>
-              <a:t>Our teacher told us that kindness and honesty are two values that help us treat others well.</a:t>
+              <a:t>Our teacher reminded us that kindness and honesty are the most important values we can have.</a:t>
             </a:r>
             <a:endParaRPr lang="en-US" sz="1500" dirty="0"/>
           </a:p>
@@ -43609,7 +43711,7 @@
                 <a:ea typeface="Calibri" pitchFamily="34" charset="-122"/>
                 <a:cs typeface="Calibri" pitchFamily="34" charset="-120"/>
               </a:rPr>
-              <a:t>The real estate agent came to do a valuation of the house before it was put up for sale.</a:t>
+              <a:t>The bank will revalue the old coins to find out exactly how much they are worth today.</a:t>
             </a:r>
             <a:endParaRPr lang="en-US" sz="1500" dirty="0"/>
           </a:p>
